--- a/examples/南京埃斯顿深度研究报告-AI创意版.pptx
+++ b/examples/南京埃斯顿深度研究报告-AI创意版.pptx
@@ -136,7 +136,17 @@
   <c:chart>
     <c:autoTitleDeleted val="1"/>
     <c:plotArea>
-      <c:layout/>
+      <c:layout>
+        <c:manualLayout>
+          <c:layoutTarget val="inner"/>
+          <c:xMode val="edge"/>
+          <c:yMode val="edge"/>
+          <c:x val="0.008802816901408451"/>
+          <c:y val="0.015384615384615385"/>
+          <c:w val="0.9823943661971831"/>
+          <c:h val="0.9179487179487179"/>
+        </c:manualLayout>
+      </c:layout>
       <c:lineChart>
         <c:varyColors val="0"/>
         <c:ser>
@@ -155,9 +165,11 @@
           </c:tx>
           <c:spPr>
             <a:solidFill>
-              <a:srgbClr val="F26322"/>
+              <a:srgbClr val="F26322">
+                <a:alpha val="100000"/>
+              </a:srgbClr>
             </a:solidFill>
-            <a:ln w="25400" cap="flat">
+            <a:ln w="19050" cap="flat">
               <a:solidFill>
                 <a:srgbClr val="F26322"/>
               </a:solidFill>
@@ -168,21 +180,22 @@
           </c:spPr>
           <c:invertIfNegative val="0"/>
           <c:dLbls>
-            <c:numFmt formatCode="#,##0" sourceLinked="0"/>
+            <c:numFmt formatCode="General" sourceLinked="0"/>
             <c:txPr>
               <a:bodyPr/>
               <a:lstStyle/>
               <a:p>
                 <a:pPr>
-                  <a:defRPr b="0" i="0" strike="noStrike" sz="1200" u="none">
+                  <a:defRPr b="0" i="0" strike="noStrike" sz="675" u="none">
                     <a:solidFill>
-                      <a:srgbClr val="000000"/>
+                      <a:srgbClr val="5B6879"/>
                     </a:solidFill>
-                    <a:latin typeface="Arial"/>
+                    <a:latin typeface="Microsoft YaHei"/>
                   </a:defRPr>
                 </a:pPr>
               </a:p>
             </c:txPr>
+            <c:dLblPos val="t"/>
             <c:showLegendKey val="0"/>
             <c:showVal val="1"/>
             <c:showCatName val="0"/>
@@ -193,7 +206,7 @@
           </c:dLbls>
           <c:marker>
             <c:symbol val="circle"/>
-            <c:size val="6"/>
+            <c:size val="5"/>
             <c:spPr>
               <a:solidFill>
                 <a:srgbClr val="F26322"/>
@@ -248,21 +261,22 @@
           <c:smooth val="0"/>
         </c:ser>
         <c:dLbls>
-          <c:numFmt formatCode="#,##0" sourceLinked="0"/>
+          <c:numFmt formatCode="General" sourceLinked="0"/>
           <c:txPr>
             <a:bodyPr/>
             <a:lstStyle/>
             <a:p>
               <a:pPr>
-                <a:defRPr b="0" i="0" strike="noStrike" sz="1200" u="none">
+                <a:defRPr b="0" i="0" strike="noStrike" sz="675" u="none">
                   <a:solidFill>
-                    <a:srgbClr val="000000"/>
+                    <a:srgbClr val="5B6879"/>
                   </a:solidFill>
-                  <a:latin typeface="Arial"/>
+                  <a:latin typeface="Microsoft YaHei"/>
                 </a:defRPr>
               </a:pPr>
             </a:p>
           </c:txPr>
+          <c:dLblPos val="t"/>
           <c:showLegendKey val="0"/>
           <c:showVal val="1"/>
           <c:showCatName val="0"/>
@@ -284,13 +298,13 @@
         <c:delete val="0"/>
         <c:axPos val="b"/>
         <c:numFmt formatCode="General" sourceLinked="1"/>
-        <c:majorTickMark val="out"/>
+        <c:majorTickMark val="none"/>
         <c:minorTickMark val="none"/>
         <c:tickLblPos val="low"/>
         <c:spPr>
-          <a:ln w="12700" cap="flat">
+          <a:ln w="9525" cap="flat">
             <a:solidFill>
-              <a:srgbClr val="888888"/>
+              <a:srgbClr val="CBD5E1"/>
             </a:solidFill>
             <a:prstDash val="solid"/>
             <a:round/>
@@ -301,11 +315,11 @@
           <a:lstStyle/>
           <a:p>
             <a:pPr>
-              <a:defRPr sz="1200" b="0" i="0" u="none" strike="noStrike">
-                <a:solidFill>
-                  <a:srgbClr val="000000"/>
-                </a:solidFill>
-                <a:latin typeface="Arial"/>
+              <a:defRPr sz="750" b="0" i="0" u="none" strike="noStrike">
+                <a:solidFill>
+                  <a:srgbClr val="5B6879"/>
+                </a:solidFill>
+                <a:latin typeface="Microsoft YaHei"/>
               </a:defRPr>
             </a:pPr>
             <a:endParaRPr lang="en-US"/>
@@ -321,20 +335,11 @@
         <c:axId val="2094734552"/>
         <c:scaling>
           <c:orientation val="minMax"/>
+          <c:max val="75.60000000000001"/>
+          <c:min val="0"/>
         </c:scaling>
-        <c:delete val="0"/>
+        <c:delete val="1"/>
         <c:axPos val="l"/>
-        <c:majorGridlines>
-          <c:spPr>
-            <a:ln w="12700" cap="flat">
-              <a:solidFill>
-                <a:srgbClr val="888888"/>
-              </a:solidFill>
-              <a:prstDash val="solid"/>
-              <a:round/>
-            </a:ln>
-          </c:spPr>
-        </c:majorGridlines>
         <c:numFmt formatCode="General" sourceLinked="0"/>
         <c:majorTickMark val="out"/>
         <c:minorTickMark val="none"/>
@@ -357,7 +362,7 @@
                 <a:solidFill>
                   <a:srgbClr val="000000"/>
                 </a:solidFill>
-                <a:latin typeface="Arial"/>
+                <a:latin typeface="Microsoft YaHei"/>
               </a:defRPr>
             </a:pPr>
             <a:endParaRPr lang="en-US"/>
@@ -398,7 +403,17 @@
   <c:chart>
     <c:autoTitleDeleted val="1"/>
     <c:plotArea>
-      <c:layout/>
+      <c:layout>
+        <c:manualLayout>
+          <c:layoutTarget val="inner"/>
+          <c:xMode val="edge"/>
+          <c:yMode val="edge"/>
+          <c:x val="0.016129032258064516"/>
+          <c:y val="0.015384615384615385"/>
+          <c:w val="0.967741935483871"/>
+          <c:h val="0.9179487179487179"/>
+        </c:manualLayout>
+      </c:layout>
       <c:barChart>
         <c:barDir val="col"/>
         <c:grouping val="clustered"/>
@@ -419,23 +434,25 @@
           </c:tx>
           <c:spPr>
             <a:solidFill>
-              <a:srgbClr val="09192C"/>
+              <a:srgbClr val="09192C">
+                <a:alpha val="100000"/>
+              </a:srgbClr>
             </a:solidFill>
             <a:effectLst/>
           </c:spPr>
           <c:invertIfNegative val="0"/>
           <c:dLbls>
-            <c:numFmt formatCode="#,##0" sourceLinked="0"/>
+            <c:numFmt formatCode="General" sourceLinked="0"/>
             <c:txPr>
               <a:bodyPr/>
               <a:lstStyle/>
               <a:p>
                 <a:pPr>
-                  <a:defRPr b="0" i="0" strike="noStrike" sz="1200" u="none">
+                  <a:defRPr b="0" i="0" strike="noStrike" sz="675" u="none">
                     <a:solidFill>
-                      <a:srgbClr val="000000"/>
+                      <a:srgbClr val="5B6879"/>
                     </a:solidFill>
-                    <a:latin typeface="Arial"/>
+                    <a:latin typeface="Microsoft YaHei"/>
                   </a:defRPr>
                 </a:pPr>
               </a:p>
@@ -505,17 +522,17 @@
           </c:val>
         </c:ser>
         <c:dLbls>
-          <c:numFmt formatCode="#,##0" sourceLinked="0"/>
+          <c:numFmt formatCode="General" sourceLinked="0"/>
           <c:txPr>
             <a:bodyPr/>
             <a:lstStyle/>
             <a:p>
               <a:pPr>
-                <a:defRPr b="0" i="0" strike="noStrike" sz="1200" u="none">
+                <a:defRPr b="0" i="0" strike="noStrike" sz="675" u="none">
                   <a:solidFill>
-                    <a:srgbClr val="000000"/>
+                    <a:srgbClr val="5B6879"/>
                   </a:solidFill>
-                  <a:latin typeface="Arial"/>
+                  <a:latin typeface="Microsoft YaHei"/>
                 </a:defRPr>
               </a:pPr>
             </a:p>
@@ -542,13 +559,13 @@
         <c:delete val="0"/>
         <c:axPos val="b"/>
         <c:numFmt formatCode="General" sourceLinked="1"/>
-        <c:majorTickMark val="out"/>
+        <c:majorTickMark val="none"/>
         <c:minorTickMark val="none"/>
         <c:tickLblPos val="low"/>
         <c:spPr>
-          <a:ln w="12700" cap="flat">
+          <a:ln w="9525" cap="flat">
             <a:solidFill>
-              <a:srgbClr val="888888"/>
+              <a:srgbClr val="CBD5E1"/>
             </a:solidFill>
             <a:prstDash val="solid"/>
             <a:round/>
@@ -559,11 +576,11 @@
           <a:lstStyle/>
           <a:p>
             <a:pPr>
-              <a:defRPr sz="1200" b="0" i="0" u="none" strike="noStrike">
-                <a:solidFill>
-                  <a:srgbClr val="000000"/>
-                </a:solidFill>
-                <a:latin typeface="Arial"/>
+              <a:defRPr sz="750" b="0" i="0" u="none" strike="noStrike">
+                <a:solidFill>
+                  <a:srgbClr val="5B6879"/>
+                </a:solidFill>
+                <a:latin typeface="Microsoft YaHei"/>
               </a:defRPr>
             </a:pPr>
             <a:endParaRPr lang="en-US"/>
@@ -579,20 +596,11 @@
         <c:axId val="2094734552"/>
         <c:scaling>
           <c:orientation val="minMax"/>
+          <c:max val="52.790400000000005"/>
+          <c:min val="0"/>
         </c:scaling>
-        <c:delete val="0"/>
+        <c:delete val="1"/>
         <c:axPos val="l"/>
-        <c:majorGridlines>
-          <c:spPr>
-            <a:ln w="12700" cap="flat">
-              <a:solidFill>
-                <a:srgbClr val="888888"/>
-              </a:solidFill>
-              <a:prstDash val="solid"/>
-              <a:round/>
-            </a:ln>
-          </c:spPr>
-        </c:majorGridlines>
         <c:numFmt formatCode="General" sourceLinked="0"/>
         <c:majorTickMark val="out"/>
         <c:minorTickMark val="none"/>
@@ -615,7 +623,7 @@
                 <a:solidFill>
                   <a:srgbClr val="000000"/>
                 </a:solidFill>
-                <a:latin typeface="Arial"/>
+                <a:latin typeface="Microsoft YaHei"/>
               </a:defRPr>
             </a:pPr>
             <a:endParaRPr lang="en-US"/>
@@ -656,7 +664,17 @@
   <c:chart>
     <c:autoTitleDeleted val="1"/>
     <c:plotArea>
-      <c:layout/>
+      <c:layout>
+        <c:manualLayout>
+          <c:layoutTarget val="inner"/>
+          <c:xMode val="edge"/>
+          <c:yMode val="edge"/>
+          <c:x val="0.02"/>
+          <c:y val="0.015384615384615385"/>
+          <c:w val="0.96"/>
+          <c:h val="0.9179487179487179"/>
+        </c:manualLayout>
+      </c:layout>
       <c:barChart>
         <c:barDir val="col"/>
         <c:grouping val="clustered"/>
@@ -677,23 +695,25 @@
           </c:tx>
           <c:spPr>
             <a:solidFill>
-              <a:srgbClr val="F26322"/>
+              <a:srgbClr val="F26322">
+                <a:alpha val="100000"/>
+              </a:srgbClr>
             </a:solidFill>
             <a:effectLst/>
           </c:spPr>
           <c:invertIfNegative val="0"/>
           <c:dLbls>
-            <c:numFmt formatCode="#,##0" sourceLinked="0"/>
+            <c:numFmt formatCode="General" sourceLinked="0"/>
             <c:txPr>
               <a:bodyPr/>
               <a:lstStyle/>
               <a:p>
                 <a:pPr>
-                  <a:defRPr b="0" i="0" strike="noStrike" sz="1200" u="none">
+                  <a:defRPr b="0" i="0" strike="noStrike" sz="675" u="none">
                     <a:solidFill>
-                      <a:srgbClr val="000000"/>
+                      <a:srgbClr val="5B6879"/>
                     </a:solidFill>
-                    <a:latin typeface="Arial"/>
+                    <a:latin typeface="Microsoft YaHei"/>
                   </a:defRPr>
                 </a:pPr>
               </a:p>
@@ -763,17 +783,17 @@
           </c:val>
         </c:ser>
         <c:dLbls>
-          <c:numFmt formatCode="#,##0" sourceLinked="0"/>
+          <c:numFmt formatCode="General" sourceLinked="0"/>
           <c:txPr>
             <a:bodyPr/>
             <a:lstStyle/>
             <a:p>
               <a:pPr>
-                <a:defRPr b="0" i="0" strike="noStrike" sz="1200" u="none">
+                <a:defRPr b="0" i="0" strike="noStrike" sz="675" u="none">
                   <a:solidFill>
-                    <a:srgbClr val="000000"/>
+                    <a:srgbClr val="5B6879"/>
                   </a:solidFill>
-                  <a:latin typeface="Arial"/>
+                  <a:latin typeface="Microsoft YaHei"/>
                 </a:defRPr>
               </a:pPr>
             </a:p>
@@ -800,13 +820,13 @@
         <c:delete val="0"/>
         <c:axPos val="b"/>
         <c:numFmt formatCode="General" sourceLinked="1"/>
-        <c:majorTickMark val="out"/>
+        <c:majorTickMark val="none"/>
         <c:minorTickMark val="none"/>
         <c:tickLblPos val="low"/>
         <c:spPr>
-          <a:ln w="12700" cap="flat">
+          <a:ln w="9525" cap="flat">
             <a:solidFill>
-              <a:srgbClr val="888888"/>
+              <a:srgbClr val="CBD5E1"/>
             </a:solidFill>
             <a:prstDash val="solid"/>
             <a:round/>
@@ -817,11 +837,11 @@
           <a:lstStyle/>
           <a:p>
             <a:pPr>
-              <a:defRPr sz="1200" b="0" i="0" u="none" strike="noStrike">
-                <a:solidFill>
-                  <a:srgbClr val="000000"/>
-                </a:solidFill>
-                <a:latin typeface="Arial"/>
+              <a:defRPr sz="750" b="0" i="0" u="none" strike="noStrike">
+                <a:solidFill>
+                  <a:srgbClr val="5B6879"/>
+                </a:solidFill>
+                <a:latin typeface="Microsoft YaHei"/>
               </a:defRPr>
             </a:pPr>
             <a:endParaRPr lang="en-US"/>
@@ -837,20 +857,11 @@
         <c:axId val="2094734552"/>
         <c:scaling>
           <c:orientation val="minMax"/>
+          <c:max val="1.7928"/>
+          <c:min val="-8.748"/>
         </c:scaling>
-        <c:delete val="0"/>
+        <c:delete val="1"/>
         <c:axPos val="l"/>
-        <c:majorGridlines>
-          <c:spPr>
-            <a:ln w="12700" cap="flat">
-              <a:solidFill>
-                <a:srgbClr val="888888"/>
-              </a:solidFill>
-              <a:prstDash val="solid"/>
-              <a:round/>
-            </a:ln>
-          </c:spPr>
-        </c:majorGridlines>
         <c:numFmt formatCode="General" sourceLinked="0"/>
         <c:majorTickMark val="out"/>
         <c:minorTickMark val="none"/>
@@ -873,7 +884,7 @@
                 <a:solidFill>
                   <a:srgbClr val="000000"/>
                 </a:solidFill>
-                <a:latin typeface="Arial"/>
+                <a:latin typeface="Microsoft YaHei"/>
               </a:defRPr>
             </a:pPr>
             <a:endParaRPr lang="en-US"/>
@@ -914,7 +925,17 @@
   <c:chart>
     <c:autoTitleDeleted val="1"/>
     <c:plotArea>
-      <c:layout/>
+      <c:layout>
+        <c:manualLayout>
+          <c:layoutTarget val="inner"/>
+          <c:xMode val="edge"/>
+          <c:yMode val="edge"/>
+          <c:x val="0.019230769230769232"/>
+          <c:y val="0.0761904761904762"/>
+          <c:w val="0.9615384615384616"/>
+          <c:h val="0.9047619047619048"/>
+        </c:manualLayout>
+      </c:layout>
       <c:doughnutChart>
         <c:varyColors val="1"/>
         <c:ser>
@@ -974,11 +995,11 @@
                 <a:lstStyle/>
                 <a:p>
                   <a:pPr>
-                    <a:defRPr sz="1200" b="0" i="0" u="none" strike="noStrike">
+                    <a:defRPr sz="675" b="0" i="0" u="none" strike="noStrike">
                       <a:solidFill>
-                        <a:srgbClr val="000000"/>
+                        <a:srgbClr val="5B6879"/>
                       </a:solidFill>
-                      <a:latin typeface="Arial"/>
+                      <a:latin typeface="Microsoft YaHei"/>
                     </a:defRPr>
                   </a:pPr>
                 </a:p>
@@ -999,11 +1020,11 @@
                 <a:lstStyle/>
                 <a:p>
                   <a:pPr>
-                    <a:defRPr sz="1200" b="0" i="0" u="none" strike="noStrike">
+                    <a:defRPr sz="675" b="0" i="0" u="none" strike="noStrike">
                       <a:solidFill>
-                        <a:srgbClr val="000000"/>
+                        <a:srgbClr val="5B6879"/>
                       </a:solidFill>
-                      <a:latin typeface="Arial"/>
+                      <a:latin typeface="Microsoft YaHei"/>
                     </a:defRPr>
                   </a:pPr>
                 </a:p>
@@ -1068,7 +1089,7 @@
           </c:val>
         </c:ser>
         <c:firstSliceAng val="0"/>
-        <c:holeSize val="50"/>
+        <c:holeSize val="55"/>
       </c:doughnutChart>
       <c:spPr>
         <a:noFill/>
@@ -1079,8 +1100,24 @@
       </c:spPr>
     </c:plotArea>
     <c:legend>
-      <c:legendPos val="r"/>
+      <c:legendPos val="t"/>
       <c:overlay val="0"/>
+      <c:txPr>
+        <a:bodyPr/>
+        <a:lstStyle/>
+        <a:p>
+          <a:pPr>
+            <a:defRPr sz="825">
+              <a:solidFill>
+                <a:srgbClr val="5B6879"/>
+              </a:solidFill>
+              <a:latin typeface="Microsoft YaHei"/>
+              <a:cs typeface="Microsoft YaHei"/>
+            </a:defRPr>
+          </a:pPr>
+          <a:endParaRPr lang="en-US"/>
+        </a:p>
+      </c:txPr>
     </c:legend>
     <c:plotVisOnly val="1"/>
     <c:dispBlanksAs val="span"/>
@@ -1105,7 +1142,17 @@
   <c:chart>
     <c:autoTitleDeleted val="1"/>
     <c:plotArea>
-      <c:layout/>
+      <c:layout>
+        <c:manualLayout>
+          <c:layoutTarget val="inner"/>
+          <c:xMode val="edge"/>
+          <c:yMode val="edge"/>
+          <c:x val="0.014285714285714285"/>
+          <c:y val="0.014285714285714285"/>
+          <c:w val="0.9714285714285714"/>
+          <c:h val="0.9238095238095239"/>
+        </c:manualLayout>
+      </c:layout>
       <c:lineChart>
         <c:varyColors val="0"/>
         <c:ser>
@@ -1124,9 +1171,11 @@
           </c:tx>
           <c:spPr>
             <a:solidFill>
-              <a:srgbClr val="09192C"/>
+              <a:srgbClr val="09192C">
+                <a:alpha val="100000"/>
+              </a:srgbClr>
             </a:solidFill>
-            <a:ln w="25400" cap="flat">
+            <a:ln w="19050" cap="flat">
               <a:solidFill>
                 <a:srgbClr val="09192C"/>
               </a:solidFill>
@@ -1137,21 +1186,22 @@
           </c:spPr>
           <c:invertIfNegative val="0"/>
           <c:dLbls>
-            <c:numFmt formatCode="#,##0" sourceLinked="0"/>
+            <c:numFmt formatCode="General" sourceLinked="0"/>
             <c:txPr>
               <a:bodyPr/>
               <a:lstStyle/>
               <a:p>
                 <a:pPr>
-                  <a:defRPr b="0" i="0" strike="noStrike" sz="1200" u="none">
+                  <a:defRPr b="0" i="0" strike="noStrike" sz="675" u="none">
                     <a:solidFill>
-                      <a:srgbClr val="000000"/>
+                      <a:srgbClr val="5B6879"/>
                     </a:solidFill>
-                    <a:latin typeface="Arial"/>
+                    <a:latin typeface="Microsoft YaHei"/>
                   </a:defRPr>
                 </a:pPr>
               </a:p>
             </c:txPr>
+            <c:dLblPos val="t"/>
             <c:showLegendKey val="0"/>
             <c:showVal val="1"/>
             <c:showCatName val="0"/>
@@ -1162,7 +1212,7 @@
           </c:dLbls>
           <c:marker>
             <c:symbol val="circle"/>
-            <c:size val="6"/>
+            <c:size val="5"/>
             <c:spPr>
               <a:solidFill>
                 <a:srgbClr val="09192C"/>
@@ -1223,21 +1273,22 @@
           <c:smooth val="0"/>
         </c:ser>
         <c:dLbls>
-          <c:numFmt formatCode="#,##0" sourceLinked="0"/>
+          <c:numFmt formatCode="General" sourceLinked="0"/>
           <c:txPr>
             <a:bodyPr/>
             <a:lstStyle/>
             <a:p>
               <a:pPr>
-                <a:defRPr b="0" i="0" strike="noStrike" sz="1200" u="none">
+                <a:defRPr b="0" i="0" strike="noStrike" sz="675" u="none">
                   <a:solidFill>
-                    <a:srgbClr val="000000"/>
+                    <a:srgbClr val="5B6879"/>
                   </a:solidFill>
-                  <a:latin typeface="Arial"/>
+                  <a:latin typeface="Microsoft YaHei"/>
                 </a:defRPr>
               </a:pPr>
             </a:p>
           </c:txPr>
+          <c:dLblPos val="t"/>
           <c:showLegendKey val="0"/>
           <c:showVal val="1"/>
           <c:showCatName val="0"/>
@@ -1259,13 +1310,13 @@
         <c:delete val="0"/>
         <c:axPos val="b"/>
         <c:numFmt formatCode="General" sourceLinked="1"/>
-        <c:majorTickMark val="out"/>
+        <c:majorTickMark val="none"/>
         <c:minorTickMark val="none"/>
         <c:tickLblPos val="low"/>
         <c:spPr>
-          <a:ln w="12700" cap="flat">
+          <a:ln w="9525" cap="flat">
             <a:solidFill>
-              <a:srgbClr val="888888"/>
+              <a:srgbClr val="CBD5E1"/>
             </a:solidFill>
             <a:prstDash val="solid"/>
             <a:round/>
@@ -1276,11 +1327,11 @@
           <a:lstStyle/>
           <a:p>
             <a:pPr>
-              <a:defRPr sz="1200" b="0" i="0" u="none" strike="noStrike">
-                <a:solidFill>
-                  <a:srgbClr val="000000"/>
-                </a:solidFill>
-                <a:latin typeface="Arial"/>
+              <a:defRPr sz="750" b="0" i="0" u="none" strike="noStrike">
+                <a:solidFill>
+                  <a:srgbClr val="5B6879"/>
+                </a:solidFill>
+                <a:latin typeface="Microsoft YaHei"/>
               </a:defRPr>
             </a:pPr>
             <a:endParaRPr lang="en-US"/>
@@ -1296,20 +1347,11 @@
         <c:axId val="2094734552"/>
         <c:scaling>
           <c:orientation val="minMax"/>
+          <c:max val="87.804"/>
+          <c:min val="0"/>
         </c:scaling>
-        <c:delete val="0"/>
+        <c:delete val="1"/>
         <c:axPos val="l"/>
-        <c:majorGridlines>
-          <c:spPr>
-            <a:ln w="12700" cap="flat">
-              <a:solidFill>
-                <a:srgbClr val="888888"/>
-              </a:solidFill>
-              <a:prstDash val="solid"/>
-              <a:round/>
-            </a:ln>
-          </c:spPr>
-        </c:majorGridlines>
         <c:numFmt formatCode="General" sourceLinked="0"/>
         <c:majorTickMark val="out"/>
         <c:minorTickMark val="none"/>
@@ -1332,7 +1374,7 @@
                 <a:solidFill>
                   <a:srgbClr val="000000"/>
                 </a:solidFill>
-                <a:latin typeface="Arial"/>
+                <a:latin typeface="Microsoft YaHei"/>
               </a:defRPr>
             </a:pPr>
             <a:endParaRPr lang="en-US"/>
@@ -1373,7 +1415,17 @@
   <c:chart>
     <c:autoTitleDeleted val="1"/>
     <c:plotArea>
-      <c:layout/>
+      <c:layout>
+        <c:manualLayout>
+          <c:layoutTarget val="inner"/>
+          <c:xMode val="edge"/>
+          <c:yMode val="edge"/>
+          <c:x val="0.013888888888888888"/>
+          <c:y val="0.07804878048780488"/>
+          <c:w val="0.9722222222222222"/>
+          <c:h val="0.8585365853658536"/>
+        </c:manualLayout>
+      </c:layout>
       <c:lineChart>
         <c:varyColors val="0"/>
         <c:ser>
@@ -1392,9 +1444,11 @@
           </c:tx>
           <c:spPr>
             <a:solidFill>
-              <a:srgbClr val="09192C"/>
+              <a:srgbClr val="09192C">
+                <a:alpha val="100000"/>
+              </a:srgbClr>
             </a:solidFill>
-            <a:ln w="25400" cap="flat">
+            <a:ln w="19050" cap="flat">
               <a:solidFill>
                 <a:srgbClr val="09192C"/>
               </a:solidFill>
@@ -1405,21 +1459,22 @@
           </c:spPr>
           <c:invertIfNegative val="0"/>
           <c:dLbls>
-            <c:numFmt formatCode="#,##0" sourceLinked="0"/>
+            <c:numFmt formatCode="General" sourceLinked="0"/>
             <c:txPr>
               <a:bodyPr/>
               <a:lstStyle/>
               <a:p>
                 <a:pPr>
-                  <a:defRPr b="0" i="0" strike="noStrike" sz="1200" u="none">
+                  <a:defRPr b="0" i="0" strike="noStrike" sz="675" u="none">
                     <a:solidFill>
-                      <a:srgbClr val="000000"/>
+                      <a:srgbClr val="5B6879"/>
                     </a:solidFill>
-                    <a:latin typeface="Arial"/>
+                    <a:latin typeface="Microsoft YaHei"/>
                   </a:defRPr>
                 </a:pPr>
               </a:p>
             </c:txPr>
+            <c:dLblPos val="t"/>
             <c:showLegendKey val="0"/>
             <c:showVal val="1"/>
             <c:showCatName val="0"/>
@@ -1430,7 +1485,7 @@
           </c:dLbls>
           <c:marker>
             <c:symbol val="circle"/>
-            <c:size val="6"/>
+            <c:size val="5"/>
             <c:spPr>
               <a:solidFill>
                 <a:srgbClr val="09192C"/>
@@ -1494,9 +1549,11 @@
           </c:tx>
           <c:spPr>
             <a:solidFill>
-              <a:srgbClr val="F26322"/>
+              <a:srgbClr val="F26322">
+                <a:alpha val="100000"/>
+              </a:srgbClr>
             </a:solidFill>
-            <a:ln w="25400" cap="flat">
+            <a:ln w="19050" cap="flat">
               <a:solidFill>
                 <a:srgbClr val="F26322"/>
               </a:solidFill>
@@ -1507,21 +1564,22 @@
           </c:spPr>
           <c:invertIfNegative val="0"/>
           <c:dLbls>
-            <c:numFmt formatCode="#,##0" sourceLinked="0"/>
+            <c:numFmt formatCode="General" sourceLinked="0"/>
             <c:txPr>
               <a:bodyPr/>
               <a:lstStyle/>
               <a:p>
                 <a:pPr>
-                  <a:defRPr b="0" i="0" strike="noStrike" sz="1200" u="none">
+                  <a:defRPr b="0" i="0" strike="noStrike" sz="675" u="none">
                     <a:solidFill>
-                      <a:srgbClr val="000000"/>
+                      <a:srgbClr val="5B6879"/>
                     </a:solidFill>
-                    <a:latin typeface="Arial"/>
+                    <a:latin typeface="Microsoft YaHei"/>
                   </a:defRPr>
                 </a:pPr>
               </a:p>
             </c:txPr>
+            <c:dLblPos val="t"/>
             <c:showLegendKey val="0"/>
             <c:showVal val="1"/>
             <c:showCatName val="0"/>
@@ -1532,7 +1590,7 @@
           </c:dLbls>
           <c:marker>
             <c:symbol val="circle"/>
-            <c:size val="6"/>
+            <c:size val="5"/>
             <c:spPr>
               <a:solidFill>
                 <a:srgbClr val="F26322"/>
@@ -1581,21 +1639,22 @@
           <c:smooth val="0"/>
         </c:ser>
         <c:dLbls>
-          <c:numFmt formatCode="#,##0" sourceLinked="0"/>
+          <c:numFmt formatCode="General" sourceLinked="0"/>
           <c:txPr>
             <a:bodyPr/>
             <a:lstStyle/>
             <a:p>
               <a:pPr>
-                <a:defRPr b="0" i="0" strike="noStrike" sz="1200" u="none">
+                <a:defRPr b="0" i="0" strike="noStrike" sz="675" u="none">
                   <a:solidFill>
-                    <a:srgbClr val="000000"/>
+                    <a:srgbClr val="5B6879"/>
                   </a:solidFill>
-                  <a:latin typeface="Arial"/>
+                  <a:latin typeface="Microsoft YaHei"/>
                 </a:defRPr>
               </a:pPr>
             </a:p>
           </c:txPr>
+          <c:dLblPos val="t"/>
           <c:showLegendKey val="0"/>
           <c:showVal val="1"/>
           <c:showCatName val="0"/>
@@ -1617,13 +1676,13 @@
         <c:delete val="0"/>
         <c:axPos val="b"/>
         <c:numFmt formatCode="General" sourceLinked="1"/>
-        <c:majorTickMark val="out"/>
+        <c:majorTickMark val="none"/>
         <c:minorTickMark val="none"/>
         <c:tickLblPos val="low"/>
         <c:spPr>
-          <a:ln w="12700" cap="flat">
+          <a:ln w="9525" cap="flat">
             <a:solidFill>
-              <a:srgbClr val="888888"/>
+              <a:srgbClr val="CBD5E1"/>
             </a:solidFill>
             <a:prstDash val="solid"/>
             <a:round/>
@@ -1634,11 +1693,11 @@
           <a:lstStyle/>
           <a:p>
             <a:pPr>
-              <a:defRPr sz="1200" b="0" i="0" u="none" strike="noStrike">
-                <a:solidFill>
-                  <a:srgbClr val="000000"/>
-                </a:solidFill>
-                <a:latin typeface="Arial"/>
+              <a:defRPr sz="750" b="0" i="0" u="none" strike="noStrike">
+                <a:solidFill>
+                  <a:srgbClr val="5B6879"/>
+                </a:solidFill>
+                <a:latin typeface="Microsoft YaHei"/>
               </a:defRPr>
             </a:pPr>
             <a:endParaRPr lang="en-US"/>
@@ -1654,20 +1713,11 @@
         <c:axId val="2094734552"/>
         <c:scaling>
           <c:orientation val="minMax"/>
+          <c:max val="40.17600000000001"/>
+          <c:min val="0"/>
         </c:scaling>
-        <c:delete val="0"/>
+        <c:delete val="1"/>
         <c:axPos val="l"/>
-        <c:majorGridlines>
-          <c:spPr>
-            <a:ln w="12700" cap="flat">
-              <a:solidFill>
-                <a:srgbClr val="888888"/>
-              </a:solidFill>
-              <a:prstDash val="solid"/>
-              <a:round/>
-            </a:ln>
-          </c:spPr>
-        </c:majorGridlines>
         <c:numFmt formatCode="General" sourceLinked="0"/>
         <c:majorTickMark val="out"/>
         <c:minorTickMark val="none"/>
@@ -1690,7 +1740,7 @@
                 <a:solidFill>
                   <a:srgbClr val="000000"/>
                 </a:solidFill>
-                <a:latin typeface="Arial"/>
+                <a:latin typeface="Microsoft YaHei"/>
               </a:defRPr>
             </a:pPr>
             <a:endParaRPr lang="en-US"/>
@@ -1709,8 +1759,24 @@
       </c:spPr>
     </c:plotArea>
     <c:legend>
-      <c:legendPos val="r"/>
+      <c:legendPos val="t"/>
       <c:overlay val="0"/>
+      <c:txPr>
+        <a:bodyPr/>
+        <a:lstStyle/>
+        <a:p>
+          <a:pPr>
+            <a:defRPr sz="825">
+              <a:solidFill>
+                <a:srgbClr val="5B6879"/>
+              </a:solidFill>
+              <a:latin typeface="Microsoft YaHei"/>
+              <a:cs typeface="Microsoft YaHei"/>
+            </a:defRPr>
+          </a:pPr>
+          <a:endParaRPr lang="en-US"/>
+        </a:p>
+      </c:txPr>
     </c:legend>
     <c:plotVisOnly val="1"/>
     <c:dispBlanksAs val="span"/>
@@ -1735,7 +1801,17 @@
   <c:chart>
     <c:autoTitleDeleted val="1"/>
     <c:plotArea>
-      <c:layout/>
+      <c:layout>
+        <c:manualLayout>
+          <c:layoutTarget val="inner"/>
+          <c:xMode val="edge"/>
+          <c:yMode val="edge"/>
+          <c:x val="0.01282051282051282"/>
+          <c:y val="0.013953488372093023"/>
+          <c:w val="0.9743589743589743"/>
+          <c:h val="0.9255813953488372"/>
+        </c:manualLayout>
+      </c:layout>
       <c:areaChart>
         <c:varyColors val="0"/>
         <c:ser>
@@ -1754,23 +1830,25 @@
           </c:tx>
           <c:spPr>
             <a:solidFill>
-              <a:srgbClr val="F26322"/>
+              <a:srgbClr val="F26322">
+                <a:alpha val="20000"/>
+              </a:srgbClr>
             </a:solidFill>
             <a:effectLst/>
           </c:spPr>
           <c:invertIfNegative val="0"/>
           <c:dLbls>
-            <c:numFmt formatCode="#,##0" sourceLinked="0"/>
+            <c:numFmt formatCode="General" sourceLinked="0"/>
             <c:txPr>
               <a:bodyPr/>
               <a:lstStyle/>
               <a:p>
                 <a:pPr>
-                  <a:defRPr b="0" i="0" strike="noStrike" sz="1200" u="none">
+                  <a:defRPr b="0" i="0" strike="noStrike" sz="675" u="none">
                     <a:solidFill>
-                      <a:srgbClr val="000000"/>
+                      <a:srgbClr val="5B6879"/>
                     </a:solidFill>
-                    <a:latin typeface="Arial"/>
+                    <a:latin typeface="Microsoft YaHei"/>
                   </a:defRPr>
                 </a:pPr>
               </a:p>
@@ -1828,17 +1906,17 @@
           </c:val>
         </c:ser>
         <c:dLbls>
-          <c:numFmt formatCode="#,##0" sourceLinked="0"/>
+          <c:numFmt formatCode="General" sourceLinked="0"/>
           <c:txPr>
             <a:bodyPr/>
             <a:lstStyle/>
             <a:p>
               <a:pPr>
-                <a:defRPr b="0" i="0" strike="noStrike" sz="1200" u="none">
+                <a:defRPr b="0" i="0" strike="noStrike" sz="675" u="none">
                   <a:solidFill>
-                    <a:srgbClr val="000000"/>
+                    <a:srgbClr val="5B6879"/>
                   </a:solidFill>
-                  <a:latin typeface="Arial"/>
+                  <a:latin typeface="Microsoft YaHei"/>
                 </a:defRPr>
               </a:pPr>
             </a:p>
@@ -1863,13 +1941,13 @@
         <c:delete val="0"/>
         <c:axPos val="b"/>
         <c:numFmt formatCode="General" sourceLinked="1"/>
-        <c:majorTickMark val="out"/>
+        <c:majorTickMark val="none"/>
         <c:minorTickMark val="none"/>
         <c:tickLblPos val="low"/>
         <c:spPr>
-          <a:ln w="12700" cap="flat">
+          <a:ln w="9525" cap="flat">
             <a:solidFill>
-              <a:srgbClr val="888888"/>
+              <a:srgbClr val="CBD5E1"/>
             </a:solidFill>
             <a:prstDash val="solid"/>
             <a:round/>
@@ -1880,11 +1958,11 @@
           <a:lstStyle/>
           <a:p>
             <a:pPr>
-              <a:defRPr sz="1200" b="0" i="0" u="none" strike="noStrike">
-                <a:solidFill>
-                  <a:srgbClr val="000000"/>
-                </a:solidFill>
-                <a:latin typeface="Arial"/>
+              <a:defRPr sz="750" b="0" i="0" u="none" strike="noStrike">
+                <a:solidFill>
+                  <a:srgbClr val="5B6879"/>
+                </a:solidFill>
+                <a:latin typeface="Microsoft YaHei"/>
               </a:defRPr>
             </a:pPr>
             <a:endParaRPr lang="en-US"/>
@@ -1900,20 +1978,11 @@
         <c:axId val="2094734552"/>
         <c:scaling>
           <c:orientation val="minMax"/>
+          <c:max val="4.0932"/>
+          <c:min val="0"/>
         </c:scaling>
-        <c:delete val="0"/>
+        <c:delete val="1"/>
         <c:axPos val="l"/>
-        <c:majorGridlines>
-          <c:spPr>
-            <a:ln w="12700" cap="flat">
-              <a:solidFill>
-                <a:srgbClr val="888888"/>
-              </a:solidFill>
-              <a:prstDash val="solid"/>
-              <a:round/>
-            </a:ln>
-          </c:spPr>
-        </c:majorGridlines>
         <c:numFmt formatCode="General" sourceLinked="0"/>
         <c:majorTickMark val="out"/>
         <c:minorTickMark val="none"/>
@@ -1936,7 +2005,7 @@
                 <a:solidFill>
                   <a:srgbClr val="000000"/>
                 </a:solidFill>
-                <a:latin typeface="Arial"/>
+                <a:latin typeface="Microsoft YaHei"/>
               </a:defRPr>
             </a:pPr>
             <a:endParaRPr lang="en-US"/>
@@ -4859,14 +4928,17 @@
           <a:ln/>
         </p:spPr>
         <p:txBody>
-          <a:bodyPr wrap="square" rtlCol="0" anchor="ctr"/>
+          <a:bodyPr wrap="square" lIns="0" tIns="0" rIns="0" bIns="0" rtlCol="0" anchor="t"/>
           <a:lstStyle/>
           <a:p>
             <a:pPr indent="0" marL="0">
-              <a:buNone/>
-            </a:pPr>
-            <a:r>
-              <a:rPr lang="en-US" sz="730" b="1" spc="200" kern="0" dirty="0">
+              <a:lnSpc>
+                <a:spcPct val="125000"/>
+              </a:lnSpc>
+              <a:buNone/>
+            </a:pPr>
+            <a:r>
+              <a:rPr lang="en-US" sz="830" b="1" spc="200" kern="0" dirty="0">
                 <a:solidFill>
                   <a:srgbClr val="C7D1D9"/>
                 </a:solidFill>
@@ -4876,7 +4948,7 @@
               </a:rPr>
               <a:t>ESTUN AUTOMATION  DEEP RESEARCH</a:t>
             </a:r>
-            <a:endParaRPr lang="en-US" sz="730" dirty="0"/>
+            <a:endParaRPr lang="en-US" sz="830" dirty="0"/>
           </a:p>
         </p:txBody>
       </p:sp>
@@ -4898,7 +4970,7 @@
           <a:ln/>
         </p:spPr>
         <p:txBody>
-          <a:bodyPr wrap="square" rtlCol="0" anchor="ctr"/>
+          <a:bodyPr wrap="square" lIns="0" tIns="0" rIns="0" bIns="0" rtlCol="0" anchor="t"/>
           <a:lstStyle/>
           <a:p>
             <a:pPr indent="0" marL="0">
@@ -4908,7 +4980,7 @@
               <a:buNone/>
             </a:pPr>
             <a:r>
-              <a:rPr lang="en-US" sz="4530" b="1" dirty="0">
+              <a:rPr lang="en-US" sz="5100" b="1" dirty="0">
                 <a:solidFill>
                   <a:srgbClr val="FFFFFF"/>
                 </a:solidFill>
@@ -4918,7 +4990,7 @@
               </a:rPr>
               <a:t>埃斯顿</a:t>
             </a:r>
-            <a:endParaRPr lang="en-US" sz="4530" dirty="0"/>
+            <a:endParaRPr lang="en-US" sz="5100" dirty="0"/>
           </a:p>
           <a:p>
             <a:pPr indent="0" marL="0">
@@ -4928,7 +5000,7 @@
               <a:buNone/>
             </a:pPr>
             <a:r>
-              <a:rPr lang="en-US" sz="4530" b="1" dirty="0">
+              <a:rPr lang="en-US" sz="5100" b="1" dirty="0">
                 <a:solidFill>
                   <a:srgbClr val="FFFFFF"/>
                 </a:solidFill>
@@ -4938,7 +5010,7 @@
               </a:rPr>
               <a:t>规模之后</a:t>
             </a:r>
-            <a:endParaRPr lang="en-US" sz="4530" dirty="0"/>
+            <a:endParaRPr lang="en-US" sz="5100" dirty="0"/>
           </a:p>
         </p:txBody>
       </p:sp>
@@ -4960,14 +5032,17 @@
           <a:ln/>
         </p:spPr>
         <p:txBody>
-          <a:bodyPr wrap="square" rtlCol="0" anchor="ctr"/>
+          <a:bodyPr wrap="square" lIns="0" tIns="0" rIns="0" bIns="0" rtlCol="0" anchor="t"/>
           <a:lstStyle/>
           <a:p>
             <a:pPr indent="0" marL="0">
-              <a:buNone/>
-            </a:pPr>
-            <a:r>
-              <a:rPr lang="en-US" sz="1600" dirty="0">
+              <a:lnSpc>
+                <a:spcPct val="125000"/>
+              </a:lnSpc>
+              <a:buNone/>
+            </a:pPr>
+            <a:r>
+              <a:rPr lang="en-US" sz="1800" dirty="0">
                 <a:solidFill>
                   <a:srgbClr val="C7D1D9"/>
                 </a:solidFill>
@@ -4977,7 +5052,7 @@
               </a:rPr>
               <a:t>盈利修复与估值验证</a:t>
             </a:r>
-            <a:endParaRPr lang="en-US" sz="1600" dirty="0"/>
+            <a:endParaRPr lang="en-US" sz="1800" dirty="0"/>
           </a:p>
         </p:txBody>
       </p:sp>
@@ -4999,14 +5074,17 @@
           <a:ln/>
         </p:spPr>
         <p:txBody>
-          <a:bodyPr wrap="square" rtlCol="0" anchor="ctr"/>
+          <a:bodyPr wrap="square" lIns="0" tIns="0" rIns="0" bIns="0" rtlCol="0" anchor="ctr"/>
           <a:lstStyle/>
           <a:p>
             <a:pPr algn="ctr" indent="0" marL="0">
-              <a:buNone/>
-            </a:pPr>
-            <a:r>
-              <a:rPr lang="en-US" sz="5470" b="1" dirty="0">
+              <a:lnSpc>
+                <a:spcPct val="125000"/>
+              </a:lnSpc>
+              <a:buNone/>
+            </a:pPr>
+            <a:r>
+              <a:rPr lang="en-US" sz="6150" b="1" dirty="0">
                 <a:solidFill>
                   <a:srgbClr val="F26322"/>
                 </a:solidFill>
@@ -5016,7 +5094,7 @@
               </a:rPr>
               <a:t>10.6%</a:t>
             </a:r>
-            <a:endParaRPr lang="en-US" sz="5470" dirty="0"/>
+            <a:endParaRPr lang="en-US" sz="6150" dirty="0"/>
           </a:p>
         </p:txBody>
       </p:sp>
@@ -5038,7 +5116,7 @@
           <a:ln/>
         </p:spPr>
         <p:txBody>
-          <a:bodyPr wrap="square" rtlCol="0" anchor="ctr"/>
+          <a:bodyPr wrap="square" lIns="0" tIns="0" rIns="0" bIns="0" rtlCol="0" anchor="t"/>
           <a:lstStyle/>
           <a:p>
             <a:pPr algn="ctr" indent="0" marL="0">
@@ -5048,7 +5126,7 @@
               <a:buNone/>
             </a:pPr>
             <a:r>
-              <a:rPr lang="en-US" sz="1130" dirty="0">
+              <a:rPr lang="en-US" sz="1280" dirty="0">
                 <a:solidFill>
                   <a:srgbClr val="FFFFFF"/>
                 </a:solidFill>
@@ -5058,7 +5136,7 @@
               </a:rPr>
               <a:t>2025年中国工业机器人市场份额</a:t>
             </a:r>
-            <a:endParaRPr lang="en-US" sz="1130" dirty="0"/>
+            <a:endParaRPr lang="en-US" sz="1280" dirty="0"/>
           </a:p>
           <a:p>
             <a:pPr algn="ctr" indent="0" marL="0">
@@ -5068,7 +5146,7 @@
               <a:buNone/>
             </a:pPr>
             <a:r>
-              <a:rPr lang="en-US" sz="1130" dirty="0">
+              <a:rPr lang="en-US" sz="1280" dirty="0">
                 <a:solidFill>
                   <a:srgbClr val="FFFFFF"/>
                 </a:solidFill>
@@ -5078,7 +5156,7 @@
               </a:rPr>
               <a:t>首次超过四大家族</a:t>
             </a:r>
-            <a:endParaRPr lang="en-US" sz="1130" dirty="0"/>
+            <a:endParaRPr lang="en-US" sz="1280" dirty="0"/>
           </a:p>
         </p:txBody>
       </p:sp>
@@ -5123,7 +5201,7 @@
           <a:ln/>
         </p:spPr>
         <p:txBody>
-          <a:bodyPr wrap="square" rtlCol="0" anchor="ctr"/>
+          <a:bodyPr wrap="square" lIns="0" tIns="0" rIns="0" bIns="0" rtlCol="0" anchor="t"/>
           <a:lstStyle/>
           <a:p>
             <a:pPr indent="0" marL="0">
@@ -5133,7 +5211,7 @@
               <a:buNone/>
             </a:pPr>
             <a:r>
-              <a:rPr lang="en-US" sz="870" dirty="0">
+              <a:rPr lang="en-US" sz="980" dirty="0">
                 <a:solidFill>
                   <a:srgbClr val="AEBBC8"/>
                 </a:solidFill>
@@ -5143,7 +5221,7 @@
               </a:rPr>
               <a:t>研究日期  2026年9月3日</a:t>
             </a:r>
-            <a:endParaRPr lang="en-US" sz="870" dirty="0"/>
+            <a:endParaRPr lang="en-US" sz="980" dirty="0"/>
           </a:p>
         </p:txBody>
       </p:sp>
@@ -5197,14 +5275,17 @@
           <a:ln/>
         </p:spPr>
         <p:txBody>
-          <a:bodyPr wrap="square" rtlCol="0" anchor="ctr"/>
+          <a:bodyPr wrap="square" lIns="0" tIns="0" rIns="0" bIns="0" rtlCol="0" anchor="t"/>
           <a:lstStyle/>
           <a:p>
             <a:pPr indent="0" marL="0">
-              <a:buNone/>
-            </a:pPr>
-            <a:r>
-              <a:rPr lang="en-US" sz="730" b="1" spc="200" kern="0" dirty="0">
+              <a:lnSpc>
+                <a:spcPct val="125000"/>
+              </a:lnSpc>
+              <a:buNone/>
+            </a:pPr>
+            <a:r>
+              <a:rPr lang="en-US" sz="830" b="1" spc="200" kern="0" dirty="0">
                 <a:solidFill>
                   <a:srgbClr val="B63A06"/>
                 </a:solidFill>
@@ -5214,7 +5295,7 @@
               </a:rPr>
               <a:t>FINANCIAL DIVERGENCE</a:t>
             </a:r>
-            <a:endParaRPr lang="en-US" sz="730" dirty="0"/>
+            <a:endParaRPr lang="en-US" sz="830" dirty="0"/>
           </a:p>
         </p:txBody>
       </p:sp>
@@ -5236,7 +5317,7 @@
           <a:ln/>
         </p:spPr>
         <p:txBody>
-          <a:bodyPr wrap="square" rtlCol="0" anchor="ctr"/>
+          <a:bodyPr wrap="square" lIns="0" tIns="0" rIns="0" bIns="0" rtlCol="0" anchor="t"/>
           <a:lstStyle/>
           <a:p>
             <a:pPr indent="0" marL="0">
@@ -5246,7 +5327,7 @@
               <a:buNone/>
             </a:pPr>
             <a:r>
-              <a:rPr lang="en-US" sz="2270" b="1" dirty="0">
+              <a:rPr lang="en-US" sz="2550" b="1" dirty="0">
                 <a:solidFill>
                   <a:srgbClr val="132238"/>
                 </a:solidFill>
@@ -5256,7 +5337,7 @@
               </a:rPr>
               <a:t>收入向上，利润仍在寻找稳定斜率</a:t>
             </a:r>
-            <a:endParaRPr lang="en-US" sz="2270" dirty="0"/>
+            <a:endParaRPr lang="en-US" sz="2550" dirty="0"/>
           </a:p>
         </p:txBody>
       </p:sp>
@@ -5278,14 +5359,17 @@
           <a:ln/>
         </p:spPr>
         <p:txBody>
-          <a:bodyPr wrap="square" rtlCol="0" anchor="ctr"/>
+          <a:bodyPr wrap="square" lIns="0" tIns="0" rIns="0" bIns="0" rtlCol="0" anchor="t"/>
           <a:lstStyle/>
           <a:p>
             <a:pPr indent="0" marL="0">
-              <a:buNone/>
-            </a:pPr>
-            <a:r>
-              <a:rPr lang="en-US" sz="1200" b="1" dirty="0">
+              <a:lnSpc>
+                <a:spcPct val="125000"/>
+              </a:lnSpc>
+              <a:buNone/>
+            </a:pPr>
+            <a:r>
+              <a:rPr lang="en-US" sz="1350" b="1" dirty="0">
                 <a:solidFill>
                   <a:srgbClr val="09192C"/>
                 </a:solidFill>
@@ -5295,7 +5379,7 @@
               </a:rPr>
               <a:t>收入</a:t>
             </a:r>
-            <a:endParaRPr lang="en-US" sz="1200" dirty="0"/>
+            <a:endParaRPr lang="en-US" sz="1350" dirty="0"/>
           </a:p>
         </p:txBody>
       </p:sp>
@@ -5333,14 +5417,17 @@
           <a:ln/>
         </p:spPr>
         <p:txBody>
-          <a:bodyPr wrap="square" rtlCol="0" anchor="ctr"/>
+          <a:bodyPr wrap="square" lIns="0" tIns="0" rIns="0" bIns="0" rtlCol="0" anchor="t"/>
           <a:lstStyle/>
           <a:p>
             <a:pPr indent="0" marL="0">
-              <a:buNone/>
-            </a:pPr>
-            <a:r>
-              <a:rPr lang="en-US" sz="1200" b="1" dirty="0">
+              <a:lnSpc>
+                <a:spcPct val="125000"/>
+              </a:lnSpc>
+              <a:buNone/>
+            </a:pPr>
+            <a:r>
+              <a:rPr lang="en-US" sz="1350" b="1" dirty="0">
                 <a:solidFill>
                   <a:srgbClr val="B63A06"/>
                 </a:solidFill>
@@ -5350,7 +5437,7 @@
               </a:rPr>
               <a:t>利润</a:t>
             </a:r>
-            <a:endParaRPr lang="en-US" sz="1200" dirty="0"/>
+            <a:endParaRPr lang="en-US" sz="1350" dirty="0"/>
           </a:p>
         </p:txBody>
       </p:sp>
@@ -5411,14 +5498,17 @@
           <a:ln/>
         </p:spPr>
         <p:txBody>
-          <a:bodyPr wrap="square" rtlCol="0" anchor="ctr"/>
+          <a:bodyPr wrap="square" lIns="0" tIns="0" rIns="0" bIns="0" rtlCol="0" anchor="t"/>
           <a:lstStyle/>
           <a:p>
             <a:pPr algn="ctr" indent="0" marL="0">
-              <a:buNone/>
-            </a:pPr>
-            <a:r>
-              <a:rPr lang="en-US" sz="1200" b="1" dirty="0">
+              <a:lnSpc>
+                <a:spcPct val="125000"/>
+              </a:lnSpc>
+              <a:buNone/>
+            </a:pPr>
+            <a:r>
+              <a:rPr lang="en-US" sz="1350" b="1" dirty="0">
                 <a:solidFill>
                   <a:srgbClr val="B63A06"/>
                 </a:solidFill>
@@ -5428,7 +5518,7 @@
               </a:rPr>
               <a:t>估值依赖正常化利润，而不是收入规模本身</a:t>
             </a:r>
-            <a:endParaRPr lang="en-US" sz="1200" dirty="0"/>
+            <a:endParaRPr lang="en-US" sz="1350" dirty="0"/>
           </a:p>
         </p:txBody>
       </p:sp>
@@ -5482,14 +5572,17 @@
           <a:ln/>
         </p:spPr>
         <p:txBody>
-          <a:bodyPr wrap="square" rtlCol="0" anchor="ctr"/>
+          <a:bodyPr wrap="square" lIns="0" tIns="0" rIns="0" bIns="0" rtlCol="0" anchor="t"/>
           <a:lstStyle/>
           <a:p>
             <a:pPr indent="0" marL="0">
-              <a:buNone/>
-            </a:pPr>
-            <a:r>
-              <a:rPr lang="en-US" sz="730" b="1" spc="200" kern="0" dirty="0">
+              <a:lnSpc>
+                <a:spcPct val="125000"/>
+              </a:lnSpc>
+              <a:buNone/>
+            </a:pPr>
+            <a:r>
+              <a:rPr lang="en-US" sz="830" b="1" spc="200" kern="0" dirty="0">
                 <a:solidFill>
                   <a:srgbClr val="F26322"/>
                 </a:solidFill>
@@ -5499,7 +5592,7 @@
               </a:rPr>
               <a:t>THE 2024 CRATER</a:t>
             </a:r>
-            <a:endParaRPr lang="en-US" sz="730" dirty="0"/>
+            <a:endParaRPr lang="en-US" sz="830" dirty="0"/>
           </a:p>
         </p:txBody>
       </p:sp>
@@ -5521,7 +5614,7 @@
           <a:ln/>
         </p:spPr>
         <p:txBody>
-          <a:bodyPr wrap="square" rtlCol="0" anchor="ctr"/>
+          <a:bodyPr wrap="square" lIns="0" tIns="0" rIns="0" bIns="0" rtlCol="0" anchor="t"/>
           <a:lstStyle/>
           <a:p>
             <a:pPr indent="0" marL="0">
@@ -5531,7 +5624,7 @@
               <a:buNone/>
             </a:pPr>
             <a:r>
-              <a:rPr lang="en-US" sz="2270" b="1" dirty="0">
+              <a:rPr lang="en-US" sz="2550" b="1" dirty="0">
                 <a:solidFill>
                   <a:srgbClr val="FFFFFF"/>
                 </a:solidFill>
@@ -5541,7 +5634,7 @@
               </a:rPr>
               <a:t>四股压力在同一年汇合</a:t>
             </a:r>
-            <a:endParaRPr lang="en-US" sz="2270" dirty="0"/>
+            <a:endParaRPr lang="en-US" sz="2550" dirty="0"/>
           </a:p>
         </p:txBody>
       </p:sp>
@@ -5770,14 +5863,17 @@
           <a:ln/>
         </p:spPr>
         <p:txBody>
-          <a:bodyPr wrap="square" rtlCol="0" anchor="ctr"/>
+          <a:bodyPr wrap="square" lIns="0" tIns="0" rIns="0" bIns="0" rtlCol="0" anchor="ctr"/>
           <a:lstStyle/>
           <a:p>
             <a:pPr algn="ctr" indent="0" marL="0">
-              <a:buNone/>
-            </a:pPr>
-            <a:r>
-              <a:rPr lang="en-US" sz="3470" b="1" dirty="0">
+              <a:lnSpc>
+                <a:spcPct val="125000"/>
+              </a:lnSpc>
+              <a:buNone/>
+            </a:pPr>
+            <a:r>
+              <a:rPr lang="en-US" sz="3900" b="1" dirty="0">
                 <a:solidFill>
                   <a:srgbClr val="FFFFFF"/>
                 </a:solidFill>
@@ -5787,7 +5883,7 @@
               </a:rPr>
               <a:t>-8.10亿</a:t>
             </a:r>
-            <a:endParaRPr lang="en-US" sz="3470" dirty="0"/>
+            <a:endParaRPr lang="en-US" sz="3900" dirty="0"/>
           </a:p>
         </p:txBody>
       </p:sp>
@@ -5809,7 +5905,7 @@
           <a:ln/>
         </p:spPr>
         <p:txBody>
-          <a:bodyPr wrap="square" rtlCol="0" anchor="ctr"/>
+          <a:bodyPr wrap="square" lIns="0" tIns="0" rIns="0" bIns="0" rtlCol="0" anchor="t"/>
           <a:lstStyle/>
           <a:p>
             <a:pPr algn="ctr" indent="0" marL="0">
@@ -5819,7 +5915,7 @@
               <a:buNone/>
             </a:pPr>
             <a:r>
-              <a:rPr lang="en-US" sz="870" dirty="0">
+              <a:rPr lang="en-US" sz="980" dirty="0">
                 <a:solidFill>
                   <a:srgbClr val="AEBBC8"/>
                 </a:solidFill>
@@ -5829,7 +5925,7 @@
               </a:rPr>
               <a:t>2024年归母净利润</a:t>
             </a:r>
-            <a:endParaRPr lang="en-US" sz="870" dirty="0"/>
+            <a:endParaRPr lang="en-US" sz="980" dirty="0"/>
           </a:p>
         </p:txBody>
       </p:sp>
@@ -5851,14 +5947,17 @@
           <a:ln/>
         </p:spPr>
         <p:txBody>
-          <a:bodyPr wrap="square" rtlCol="0" anchor="ctr"/>
+          <a:bodyPr wrap="square" lIns="0" tIns="0" rIns="0" bIns="0" rtlCol="0" anchor="t"/>
           <a:lstStyle/>
           <a:p>
             <a:pPr indent="0" marL="0">
-              <a:buNone/>
-            </a:pPr>
-            <a:r>
-              <a:rPr lang="en-US" sz="1000" b="1" dirty="0">
+              <a:lnSpc>
+                <a:spcPct val="125000"/>
+              </a:lnSpc>
+              <a:buNone/>
+            </a:pPr>
+            <a:r>
+              <a:rPr lang="en-US" sz="1130" b="1" dirty="0">
                 <a:solidFill>
                   <a:srgbClr val="FFFFFF"/>
                 </a:solidFill>
@@ -5868,14 +5967,17 @@
               </a:rPr>
               <a:t>收入下降13.8%</a:t>
             </a:r>
-            <a:endParaRPr lang="en-US" sz="1000" dirty="0"/>
+            <a:endParaRPr lang="en-US" sz="1130" dirty="0"/>
           </a:p>
           <a:p>
             <a:pPr indent="0" marL="0">
-              <a:buNone/>
-            </a:pPr>
-            <a:r>
-              <a:rPr lang="en-US" sz="1000" b="1" dirty="0">
+              <a:lnSpc>
+                <a:spcPct val="125000"/>
+              </a:lnSpc>
+              <a:buNone/>
+            </a:pPr>
+            <a:r>
+              <a:rPr lang="en-US" sz="1130" b="1" dirty="0">
                 <a:solidFill>
                   <a:srgbClr val="FFFFFF"/>
                 </a:solidFill>
@@ -5885,7 +5987,7 @@
               </a:rPr>
               <a:t>毛利率降至28.3%</a:t>
             </a:r>
-            <a:endParaRPr lang="en-US" sz="1000" dirty="0"/>
+            <a:endParaRPr lang="en-US" sz="1130" dirty="0"/>
           </a:p>
         </p:txBody>
       </p:sp>
@@ -5907,14 +6009,17 @@
           <a:ln/>
         </p:spPr>
         <p:txBody>
-          <a:bodyPr wrap="square" rtlCol="0" anchor="ctr"/>
+          <a:bodyPr wrap="square" lIns="0" tIns="0" rIns="0" bIns="0" rtlCol="0" anchor="t"/>
           <a:lstStyle/>
           <a:p>
             <a:pPr algn="r" indent="0" marL="0">
-              <a:buNone/>
-            </a:pPr>
-            <a:r>
-              <a:rPr lang="en-US" sz="1000" b="1" dirty="0">
+              <a:lnSpc>
+                <a:spcPct val="125000"/>
+              </a:lnSpc>
+              <a:buNone/>
+            </a:pPr>
+            <a:r>
+              <a:rPr lang="en-US" sz="1130" b="1" dirty="0">
                 <a:solidFill>
                   <a:srgbClr val="FFFFFF"/>
                 </a:solidFill>
@@ -5924,14 +6029,17 @@
               </a:rPr>
               <a:t>商誉减值3.45亿元</a:t>
             </a:r>
-            <a:endParaRPr lang="en-US" sz="1000" dirty="0"/>
+            <a:endParaRPr lang="en-US" sz="1130" dirty="0"/>
           </a:p>
           <a:p>
             <a:pPr algn="r" indent="0" marL="0">
-              <a:buNone/>
-            </a:pPr>
-            <a:r>
-              <a:rPr lang="en-US" sz="1000" b="1" dirty="0">
+              <a:lnSpc>
+                <a:spcPct val="125000"/>
+              </a:lnSpc>
+              <a:buNone/>
+            </a:pPr>
+            <a:r>
+              <a:rPr lang="en-US" sz="1130" b="1" dirty="0">
                 <a:solidFill>
                   <a:srgbClr val="FFFFFF"/>
                 </a:solidFill>
@@ -5941,7 +6049,7 @@
               </a:rPr>
               <a:t>其他资产减值约1.2亿元</a:t>
             </a:r>
-            <a:endParaRPr lang="en-US" sz="1000" dirty="0"/>
+            <a:endParaRPr lang="en-US" sz="1130" dirty="0"/>
           </a:p>
         </p:txBody>
       </p:sp>
@@ -5963,14 +6071,17 @@
           <a:ln/>
         </p:spPr>
         <p:txBody>
-          <a:bodyPr wrap="square" rtlCol="0" anchor="ctr"/>
+          <a:bodyPr wrap="square" lIns="0" tIns="0" rIns="0" bIns="0" rtlCol="0" anchor="t"/>
           <a:lstStyle/>
           <a:p>
             <a:pPr indent="0" marL="0">
-              <a:buNone/>
-            </a:pPr>
-            <a:r>
-              <a:rPr lang="en-US" sz="1000" b="1" dirty="0">
+              <a:lnSpc>
+                <a:spcPct val="125000"/>
+              </a:lnSpc>
+              <a:buNone/>
+            </a:pPr>
+            <a:r>
+              <a:rPr lang="en-US" sz="1130" b="1" dirty="0">
                 <a:solidFill>
                   <a:srgbClr val="FFFFFF"/>
                 </a:solidFill>
@@ -5980,7 +6091,7 @@
               </a:rPr>
               <a:t>研发、销售与管理费用刚性</a:t>
             </a:r>
-            <a:endParaRPr lang="en-US" sz="1000" dirty="0"/>
+            <a:endParaRPr lang="en-US" sz="1130" dirty="0"/>
           </a:p>
         </p:txBody>
       </p:sp>
@@ -6002,14 +6113,17 @@
           <a:ln/>
         </p:spPr>
         <p:txBody>
-          <a:bodyPr wrap="square" rtlCol="0" anchor="ctr"/>
+          <a:bodyPr wrap="square" lIns="0" tIns="0" rIns="0" bIns="0" rtlCol="0" anchor="t"/>
           <a:lstStyle/>
           <a:p>
             <a:pPr algn="r" indent="0" marL="0">
-              <a:buNone/>
-            </a:pPr>
-            <a:r>
-              <a:rPr lang="en-US" sz="1000" b="1" dirty="0">
+              <a:lnSpc>
+                <a:spcPct val="125000"/>
+              </a:lnSpc>
+              <a:buNone/>
+            </a:pPr>
+            <a:r>
+              <a:rPr lang="en-US" sz="1130" b="1" dirty="0">
                 <a:solidFill>
                   <a:srgbClr val="FFFFFF"/>
                 </a:solidFill>
@@ -6019,14 +6133,17 @@
               </a:rPr>
               <a:t>递延所得税资产减计</a:t>
             </a:r>
-            <a:endParaRPr lang="en-US" sz="1000" dirty="0"/>
+            <a:endParaRPr lang="en-US" sz="1130" dirty="0"/>
           </a:p>
           <a:p>
             <a:pPr algn="r" indent="0" marL="0">
-              <a:buNone/>
-            </a:pPr>
-            <a:r>
-              <a:rPr lang="en-US" sz="1000" b="1" dirty="0">
+              <a:lnSpc>
+                <a:spcPct val="125000"/>
+              </a:lnSpc>
+              <a:buNone/>
+            </a:pPr>
+            <a:r>
+              <a:rPr lang="en-US" sz="1130" b="1" dirty="0">
                 <a:solidFill>
                   <a:srgbClr val="FFFFFF"/>
                 </a:solidFill>
@@ -6036,7 +6153,7 @@
               </a:rPr>
               <a:t>放大亏损</a:t>
             </a:r>
-            <a:endParaRPr lang="en-US" sz="1000" dirty="0"/>
+            <a:endParaRPr lang="en-US" sz="1130" dirty="0"/>
           </a:p>
         </p:txBody>
       </p:sp>
@@ -6058,14 +6175,17 @@
           <a:ln/>
         </p:spPr>
         <p:txBody>
-          <a:bodyPr wrap="square" rtlCol="0" anchor="ctr"/>
+          <a:bodyPr wrap="square" lIns="0" tIns="0" rIns="0" bIns="0" rtlCol="0" anchor="t"/>
           <a:lstStyle/>
           <a:p>
             <a:pPr algn="ctr" indent="0" marL="0">
-              <a:buNone/>
-            </a:pPr>
-            <a:r>
-              <a:rPr lang="en-US" sz="1130" b="1" dirty="0">
+              <a:lnSpc>
+                <a:spcPct val="125000"/>
+              </a:lnSpc>
+              <a:buNone/>
+            </a:pPr>
+            <a:r>
+              <a:rPr lang="en-US" sz="1280" b="1" dirty="0">
                 <a:solidFill>
                   <a:srgbClr val="F26322"/>
                 </a:solidFill>
@@ -6075,7 +6195,7 @@
               </a:rPr>
               <a:t>2026H1商誉仍有9.75亿元，出清并不彻底</a:t>
             </a:r>
-            <a:endParaRPr lang="en-US" sz="1130" dirty="0"/>
+            <a:endParaRPr lang="en-US" sz="1280" dirty="0"/>
           </a:p>
         </p:txBody>
       </p:sp>
@@ -6129,14 +6249,17 @@
           <a:ln/>
         </p:spPr>
         <p:txBody>
-          <a:bodyPr wrap="square" rtlCol="0" anchor="ctr"/>
+          <a:bodyPr wrap="square" lIns="0" tIns="0" rIns="0" bIns="0" rtlCol="0" anchor="t"/>
           <a:lstStyle/>
           <a:p>
             <a:pPr indent="0" marL="0">
-              <a:buNone/>
-            </a:pPr>
-            <a:r>
-              <a:rPr lang="en-US" sz="730" b="1" spc="200" kern="0" dirty="0">
+              <a:lnSpc>
+                <a:spcPct val="125000"/>
+              </a:lnSpc>
+              <a:buNone/>
+            </a:pPr>
+            <a:r>
+              <a:rPr lang="en-US" sz="830" b="1" spc="200" kern="0" dirty="0">
                 <a:solidFill>
                   <a:srgbClr val="B63A06"/>
                 </a:solidFill>
@@ -6146,7 +6269,7 @@
               </a:rPr>
               <a:t>EARNINGS QUALITY</a:t>
             </a:r>
-            <a:endParaRPr lang="en-US" sz="730" dirty="0"/>
+            <a:endParaRPr lang="en-US" sz="830" dirty="0"/>
           </a:p>
         </p:txBody>
       </p:sp>
@@ -6168,7 +6291,7 @@
           <a:ln/>
         </p:spPr>
         <p:txBody>
-          <a:bodyPr wrap="square" rtlCol="0" anchor="ctr"/>
+          <a:bodyPr wrap="square" lIns="0" tIns="0" rIns="0" bIns="0" rtlCol="0" anchor="t"/>
           <a:lstStyle/>
           <a:p>
             <a:pPr indent="0" marL="0">
@@ -6178,7 +6301,7 @@
               <a:buNone/>
             </a:pPr>
             <a:r>
-              <a:rPr lang="en-US" sz="2270" b="1" dirty="0">
+              <a:rPr lang="en-US" sz="2550" b="1" dirty="0">
                 <a:solidFill>
                   <a:srgbClr val="132238"/>
                 </a:solidFill>
@@ -6188,7 +6311,7 @@
               </a:rPr>
               <a:t>报表利润与主业利润之间还有一道桥</a:t>
             </a:r>
-            <a:endParaRPr lang="en-US" sz="2270" dirty="0"/>
+            <a:endParaRPr lang="en-US" sz="2550" dirty="0"/>
           </a:p>
         </p:txBody>
       </p:sp>
@@ -6232,14 +6355,17 @@
           <a:ln/>
         </p:spPr>
         <p:txBody>
-          <a:bodyPr wrap="square" rtlCol="0" anchor="ctr"/>
+          <a:bodyPr wrap="square" lIns="0" tIns="0" rIns="0" bIns="0" rtlCol="0" anchor="t"/>
           <a:lstStyle/>
           <a:p>
             <a:pPr algn="ctr" indent="0" marL="0">
-              <a:buNone/>
-            </a:pPr>
-            <a:r>
-              <a:rPr lang="en-US" sz="3600" b="1" dirty="0">
+              <a:lnSpc>
+                <a:spcPct val="125000"/>
+              </a:lnSpc>
+              <a:buNone/>
+            </a:pPr>
+            <a:r>
+              <a:rPr lang="en-US" sz="4050" b="1" dirty="0">
                 <a:solidFill>
                   <a:srgbClr val="FFFFFF"/>
                 </a:solidFill>
@@ -6249,7 +6375,7 @@
               </a:rPr>
               <a:t>1.61亿</a:t>
             </a:r>
-            <a:endParaRPr lang="en-US" sz="3600" dirty="0"/>
+            <a:endParaRPr lang="en-US" sz="4050" dirty="0"/>
           </a:p>
         </p:txBody>
       </p:sp>
@@ -6271,14 +6397,17 @@
           <a:ln/>
         </p:spPr>
         <p:txBody>
-          <a:bodyPr wrap="square" rtlCol="0" anchor="ctr"/>
+          <a:bodyPr wrap="square" lIns="0" tIns="0" rIns="0" bIns="0" rtlCol="0" anchor="t"/>
           <a:lstStyle/>
           <a:p>
             <a:pPr algn="ctr" indent="0" marL="0">
-              <a:buNone/>
-            </a:pPr>
-            <a:r>
-              <a:rPr lang="en-US" sz="1200" dirty="0">
+              <a:lnSpc>
+                <a:spcPct val="125000"/>
+              </a:lnSpc>
+              <a:buNone/>
+            </a:pPr>
+            <a:r>
+              <a:rPr lang="en-US" sz="1350" dirty="0">
                 <a:solidFill>
                   <a:srgbClr val="C7D1D9"/>
                 </a:solidFill>
@@ -6288,7 +6417,7 @@
               </a:rPr>
               <a:t>归母净利润</a:t>
             </a:r>
-            <a:endParaRPr lang="en-US" sz="1200" dirty="0"/>
+            <a:endParaRPr lang="en-US" sz="1350" dirty="0"/>
           </a:p>
         </p:txBody>
       </p:sp>
@@ -6334,14 +6463,17 @@
           <a:ln/>
         </p:spPr>
         <p:txBody>
-          <a:bodyPr wrap="square" rtlCol="0" anchor="ctr"/>
+          <a:bodyPr wrap="square" lIns="0" tIns="0" rIns="0" bIns="0" rtlCol="0" anchor="t"/>
           <a:lstStyle/>
           <a:p>
             <a:pPr algn="ctr" indent="0" marL="0">
-              <a:buNone/>
-            </a:pPr>
-            <a:r>
-              <a:rPr lang="en-US" sz="2000" b="1" dirty="0">
+              <a:lnSpc>
+                <a:spcPct val="125000"/>
+              </a:lnSpc>
+              <a:buNone/>
+            </a:pPr>
+            <a:r>
+              <a:rPr lang="en-US" sz="2250" b="1" dirty="0">
                 <a:solidFill>
                   <a:srgbClr val="B63A06"/>
                 </a:solidFill>
@@ -6351,7 +6483,7 @@
               </a:rPr>
               <a:t>-0.91亿</a:t>
             </a:r>
-            <a:endParaRPr lang="en-US" sz="2000" dirty="0"/>
+            <a:endParaRPr lang="en-US" sz="2250" dirty="0"/>
           </a:p>
         </p:txBody>
       </p:sp>
@@ -6373,7 +6505,7 @@
           <a:ln/>
         </p:spPr>
         <p:txBody>
-          <a:bodyPr wrap="square" rtlCol="0" anchor="ctr"/>
+          <a:bodyPr wrap="square" lIns="0" tIns="0" rIns="0" bIns="0" rtlCol="0" anchor="t"/>
           <a:lstStyle/>
           <a:p>
             <a:pPr algn="ctr" indent="0" marL="0">
@@ -6383,7 +6515,7 @@
               <a:buNone/>
             </a:pPr>
             <a:r>
-              <a:rPr lang="en-US" sz="870" dirty="0">
+              <a:rPr lang="en-US" sz="980" dirty="0">
                 <a:solidFill>
                   <a:srgbClr val="5B6879"/>
                 </a:solidFill>
@@ -6393,7 +6525,7 @@
               </a:rPr>
               <a:t>非经常性损益</a:t>
             </a:r>
-            <a:endParaRPr lang="en-US" sz="870" dirty="0"/>
+            <a:endParaRPr lang="en-US" sz="980" dirty="0"/>
           </a:p>
           <a:p>
             <a:pPr algn="ctr" indent="0" marL="0">
@@ -6403,7 +6535,7 @@
               <a:buNone/>
             </a:pPr>
             <a:r>
-              <a:rPr lang="en-US" sz="870" dirty="0">
+              <a:rPr lang="en-US" sz="980" dirty="0">
                 <a:solidFill>
                   <a:srgbClr val="5B6879"/>
                 </a:solidFill>
@@ -6413,7 +6545,7 @@
               </a:rPr>
               <a:t>含约0.995亿元公允价值变动收益</a:t>
             </a:r>
-            <a:endParaRPr lang="en-US" sz="870" dirty="0"/>
+            <a:endParaRPr lang="en-US" sz="980" dirty="0"/>
           </a:p>
         </p:txBody>
       </p:sp>
@@ -6459,14 +6591,17 @@
           <a:ln/>
         </p:spPr>
         <p:txBody>
-          <a:bodyPr wrap="square" rtlCol="0" anchor="ctr"/>
+          <a:bodyPr wrap="square" lIns="0" tIns="0" rIns="0" bIns="0" rtlCol="0" anchor="t"/>
           <a:lstStyle/>
           <a:p>
             <a:pPr algn="ctr" indent="0" marL="0">
-              <a:buNone/>
-            </a:pPr>
-            <a:r>
-              <a:rPr lang="en-US" sz="3200" b="1" dirty="0">
+              <a:lnSpc>
+                <a:spcPct val="125000"/>
+              </a:lnSpc>
+              <a:buNone/>
+            </a:pPr>
+            <a:r>
+              <a:rPr lang="en-US" sz="3600" b="1" dirty="0">
                 <a:solidFill>
                   <a:srgbClr val="FFFFFF"/>
                 </a:solidFill>
@@ -6476,7 +6611,7 @@
               </a:rPr>
               <a:t>0.70亿</a:t>
             </a:r>
-            <a:endParaRPr lang="en-US" sz="3200" dirty="0"/>
+            <a:endParaRPr lang="en-US" sz="3600" dirty="0"/>
           </a:p>
         </p:txBody>
       </p:sp>
@@ -6500,14 +6635,17 @@
           <a:ln/>
         </p:spPr>
         <p:txBody>
-          <a:bodyPr wrap="square" rtlCol="0" anchor="ctr"/>
+          <a:bodyPr wrap="square" lIns="0" tIns="0" rIns="0" bIns="0" rtlCol="0" anchor="t"/>
           <a:lstStyle/>
           <a:p>
             <a:pPr algn="ctr" indent="0" marL="0">
-              <a:buNone/>
-            </a:pPr>
-            <a:r>
-              <a:rPr lang="en-US" sz="1200" b="1" dirty="0">
+              <a:lnSpc>
+                <a:spcPct val="125000"/>
+              </a:lnSpc>
+              <a:buNone/>
+            </a:pPr>
+            <a:r>
+              <a:rPr lang="en-US" sz="1350" b="1" dirty="0">
                 <a:solidFill>
                   <a:srgbClr val="FFFFFF"/>
                 </a:solidFill>
@@ -6517,7 +6655,7 @@
               </a:rPr>
               <a:t>扣非净利润</a:t>
             </a:r>
-            <a:endParaRPr lang="en-US" sz="1200" dirty="0"/>
+            <a:endParaRPr lang="en-US" sz="1350" dirty="0"/>
           </a:p>
         </p:txBody>
       </p:sp>
@@ -6563,14 +6701,17 @@
           <a:ln/>
         </p:spPr>
         <p:txBody>
-          <a:bodyPr wrap="square" rtlCol="0" anchor="ctr"/>
+          <a:bodyPr wrap="square" lIns="0" tIns="0" rIns="0" bIns="0" rtlCol="0" anchor="t"/>
           <a:lstStyle/>
           <a:p>
             <a:pPr algn="ctr" indent="0" marL="0">
-              <a:buNone/>
-            </a:pPr>
-            <a:r>
-              <a:rPr lang="en-US" sz="2270" b="1" dirty="0">
+              <a:lnSpc>
+                <a:spcPct val="125000"/>
+              </a:lnSpc>
+              <a:buNone/>
+            </a:pPr>
+            <a:r>
+              <a:rPr lang="en-US" sz="2550" b="1" dirty="0">
                 <a:solidFill>
                   <a:srgbClr val="09192C"/>
                 </a:solidFill>
@@ -6580,7 +6721,7 @@
               </a:rPr>
               <a:t>约2.7%</a:t>
             </a:r>
-            <a:endParaRPr lang="en-US" sz="2270" dirty="0"/>
+            <a:endParaRPr lang="en-US" sz="2550" dirty="0"/>
           </a:p>
         </p:txBody>
       </p:sp>
@@ -6602,7 +6743,7 @@
           <a:ln/>
         </p:spPr>
         <p:txBody>
-          <a:bodyPr wrap="square" rtlCol="0" anchor="ctr"/>
+          <a:bodyPr wrap="square" lIns="0" tIns="0" rIns="0" bIns="0" rtlCol="0" anchor="t"/>
           <a:lstStyle/>
           <a:p>
             <a:pPr algn="ctr" indent="0" marL="0">
@@ -6612,7 +6753,7 @@
               <a:buNone/>
             </a:pPr>
             <a:r>
-              <a:rPr lang="en-US" sz="870" dirty="0">
+              <a:rPr lang="en-US" sz="980" dirty="0">
                 <a:solidFill>
                   <a:srgbClr val="5B6879"/>
                 </a:solidFill>
@@ -6622,7 +6763,7 @@
               </a:rPr>
               <a:t>主业净利率</a:t>
             </a:r>
-            <a:endParaRPr lang="en-US" sz="870" dirty="0"/>
+            <a:endParaRPr lang="en-US" sz="980" dirty="0"/>
           </a:p>
           <a:p>
             <a:pPr algn="ctr" indent="0" marL="0">
@@ -6632,7 +6773,7 @@
               <a:buNone/>
             </a:pPr>
             <a:r>
-              <a:rPr lang="en-US" sz="870" dirty="0">
+              <a:rPr lang="en-US" sz="980" dirty="0">
                 <a:solidFill>
                   <a:srgbClr val="5B6879"/>
                 </a:solidFill>
@@ -6642,7 +6783,7 @@
               </a:rPr>
               <a:t>持续性仍需季度验证</a:t>
             </a:r>
-            <a:endParaRPr lang="en-US" sz="870" dirty="0"/>
+            <a:endParaRPr lang="en-US" sz="980" dirty="0"/>
           </a:p>
         </p:txBody>
       </p:sp>
@@ -6664,14 +6805,17 @@
           <a:ln/>
         </p:spPr>
         <p:txBody>
-          <a:bodyPr wrap="square" rtlCol="0" anchor="ctr"/>
+          <a:bodyPr wrap="square" lIns="0" tIns="0" rIns="0" bIns="0" rtlCol="0" anchor="t"/>
           <a:lstStyle/>
           <a:p>
             <a:pPr algn="ctr" indent="0" marL="0">
-              <a:buNone/>
-            </a:pPr>
-            <a:r>
-              <a:rPr lang="en-US" sz="1470" b="1" dirty="0">
+              <a:lnSpc>
+                <a:spcPct val="125000"/>
+              </a:lnSpc>
+              <a:buNone/>
+            </a:pPr>
+            <a:r>
+              <a:rPr lang="en-US" sz="1650" b="1" dirty="0">
                 <a:solidFill>
                   <a:srgbClr val="B63A06"/>
                 </a:solidFill>
@@ -6681,7 +6825,7 @@
               </a:rPr>
               <a:t>方向已经改善，但利润含金量不能只看同比增速</a:t>
             </a:r>
-            <a:endParaRPr lang="en-US" sz="1470" dirty="0"/>
+            <a:endParaRPr lang="en-US" sz="1650" dirty="0"/>
           </a:p>
         </p:txBody>
       </p:sp>
@@ -6735,14 +6879,17 @@
           <a:ln/>
         </p:spPr>
         <p:txBody>
-          <a:bodyPr wrap="square" rtlCol="0" anchor="ctr"/>
+          <a:bodyPr wrap="square" lIns="0" tIns="0" rIns="0" bIns="0" rtlCol="0" anchor="t"/>
           <a:lstStyle/>
           <a:p>
             <a:pPr indent="0" marL="0">
-              <a:buNone/>
-            </a:pPr>
-            <a:r>
-              <a:rPr lang="en-US" sz="730" b="1" spc="200" kern="0" dirty="0">
+              <a:lnSpc>
+                <a:spcPct val="125000"/>
+              </a:lnSpc>
+              <a:buNone/>
+            </a:pPr>
+            <a:r>
+              <a:rPr lang="en-US" sz="830" b="1" spc="200" kern="0" dirty="0">
                 <a:solidFill>
                   <a:srgbClr val="B63A06"/>
                 </a:solidFill>
@@ -6752,7 +6899,7 @@
               </a:rPr>
               <a:t>GEOGRAPHIC MIX</a:t>
             </a:r>
-            <a:endParaRPr lang="en-US" sz="730" dirty="0"/>
+            <a:endParaRPr lang="en-US" sz="830" dirty="0"/>
           </a:p>
         </p:txBody>
       </p:sp>
@@ -6774,7 +6921,7 @@
           <a:ln/>
         </p:spPr>
         <p:txBody>
-          <a:bodyPr wrap="square" rtlCol="0" anchor="ctr"/>
+          <a:bodyPr wrap="square" lIns="0" tIns="0" rIns="0" bIns="0" rtlCol="0" anchor="t"/>
           <a:lstStyle/>
           <a:p>
             <a:pPr indent="0" marL="0">
@@ -6784,7 +6931,7 @@
               <a:buNone/>
             </a:pPr>
             <a:r>
-              <a:rPr lang="en-US" sz="2270" b="1" dirty="0">
+              <a:rPr lang="en-US" sz="2550" b="1" dirty="0">
                 <a:solidFill>
                   <a:srgbClr val="132238"/>
                 </a:solidFill>
@@ -6794,7 +6941,7 @@
               </a:rPr>
               <a:t>海外收入占比不高，却贡献更厚的毛利</a:t>
             </a:r>
-            <a:endParaRPr lang="en-US" sz="2270" dirty="0"/>
+            <a:endParaRPr lang="en-US" sz="2550" dirty="0"/>
           </a:p>
         </p:txBody>
       </p:sp>
@@ -6855,14 +7002,17 @@
           <a:ln/>
         </p:spPr>
         <p:txBody>
-          <a:bodyPr wrap="square" rtlCol="0" anchor="ctr"/>
+          <a:bodyPr wrap="square" lIns="0" tIns="0" rIns="0" bIns="0" rtlCol="0" anchor="t"/>
           <a:lstStyle/>
           <a:p>
             <a:pPr indent="0" marL="0">
-              <a:buNone/>
-            </a:pPr>
-            <a:r>
-              <a:rPr lang="en-US" sz="1200" b="1" dirty="0">
+              <a:lnSpc>
+                <a:spcPct val="125000"/>
+              </a:lnSpc>
+              <a:buNone/>
+            </a:pPr>
+            <a:r>
+              <a:rPr lang="en-US" sz="1350" b="1" dirty="0">
                 <a:solidFill>
                   <a:srgbClr val="B63A06"/>
                 </a:solidFill>
@@ -6872,7 +7022,7 @@
               </a:rPr>
               <a:t>境外</a:t>
             </a:r>
-            <a:endParaRPr lang="en-US" sz="1200" dirty="0"/>
+            <a:endParaRPr lang="en-US" sz="1350" dirty="0"/>
           </a:p>
         </p:txBody>
       </p:sp>
@@ -6894,14 +7044,17 @@
           <a:ln/>
         </p:spPr>
         <p:txBody>
-          <a:bodyPr wrap="square" rtlCol="0" anchor="ctr"/>
+          <a:bodyPr wrap="square" lIns="0" tIns="0" rIns="0" bIns="0" rtlCol="0" anchor="t"/>
           <a:lstStyle/>
           <a:p>
             <a:pPr indent="0" marL="0">
-              <a:buNone/>
-            </a:pPr>
-            <a:r>
-              <a:rPr lang="en-US" sz="3870" b="1" dirty="0">
+              <a:lnSpc>
+                <a:spcPct val="125000"/>
+              </a:lnSpc>
+              <a:buNone/>
+            </a:pPr>
+            <a:r>
+              <a:rPr lang="en-US" sz="4350" b="1" dirty="0">
                 <a:solidFill>
                   <a:srgbClr val="B63A06"/>
                 </a:solidFill>
@@ -6911,7 +7064,7 @@
               </a:rPr>
               <a:t>14.63亿</a:t>
             </a:r>
-            <a:endParaRPr lang="en-US" sz="3870" dirty="0"/>
+            <a:endParaRPr lang="en-US" sz="4350" dirty="0"/>
           </a:p>
         </p:txBody>
       </p:sp>
@@ -6933,7 +7086,7 @@
           <a:ln/>
         </p:spPr>
         <p:txBody>
-          <a:bodyPr wrap="square" rtlCol="0" anchor="ctr"/>
+          <a:bodyPr wrap="square" lIns="0" tIns="0" rIns="0" bIns="0" rtlCol="0" anchor="t"/>
           <a:lstStyle/>
           <a:p>
             <a:pPr indent="0" marL="0">
@@ -6943,7 +7096,7 @@
               <a:buNone/>
             </a:pPr>
             <a:r>
-              <a:rPr lang="en-US" sz="1130" dirty="0">
+              <a:rPr lang="en-US" sz="1280" dirty="0">
                 <a:solidFill>
                   <a:srgbClr val="5B6879"/>
                 </a:solidFill>
@@ -6953,7 +7106,7 @@
               </a:rPr>
               <a:t>德国Cloos带来的海外业务具有更高毛利率。</a:t>
             </a:r>
-            <a:endParaRPr lang="en-US" sz="1130" dirty="0"/>
+            <a:endParaRPr lang="en-US" sz="1280" dirty="0"/>
           </a:p>
           <a:p>
             <a:pPr indent="0" marL="0">
@@ -6963,7 +7116,7 @@
               <a:buNone/>
             </a:pPr>
             <a:r>
-              <a:rPr lang="en-US" sz="1130" dirty="0">
+              <a:rPr lang="en-US" sz="1280" dirty="0">
                 <a:solidFill>
                   <a:srgbClr val="5B6879"/>
                 </a:solidFill>
@@ -6973,7 +7126,7 @@
               </a:rPr>
               <a:t>海外改善会直接抬升综合盈利能力，但同时保留商誉和经营波动风险。</a:t>
             </a:r>
-            <a:endParaRPr lang="en-US" sz="1130" dirty="0"/>
+            <a:endParaRPr lang="en-US" sz="1280" dirty="0"/>
           </a:p>
         </p:txBody>
       </p:sp>
@@ -6995,14 +7148,17 @@
           <a:ln/>
         </p:spPr>
         <p:txBody>
-          <a:bodyPr wrap="square" rtlCol="0" anchor="ctr"/>
+          <a:bodyPr wrap="square" lIns="0" tIns="0" rIns="0" bIns="0" rtlCol="0" anchor="t"/>
           <a:lstStyle/>
           <a:p>
             <a:pPr indent="0" marL="0">
-              <a:buNone/>
-            </a:pPr>
-            <a:r>
-              <a:rPr lang="en-US" sz="1470" b="1" dirty="0">
+              <a:lnSpc>
+                <a:spcPct val="125000"/>
+              </a:lnSpc>
+              <a:buNone/>
+            </a:pPr>
+            <a:r>
+              <a:rPr lang="en-US" sz="1650" b="1" dirty="0">
                 <a:solidFill>
                   <a:srgbClr val="09192C"/>
                 </a:solidFill>
@@ -7012,7 +7168,7 @@
               </a:rPr>
               <a:t>结构比规模更重要</a:t>
             </a:r>
-            <a:endParaRPr lang="en-US" sz="1470" dirty="0"/>
+            <a:endParaRPr lang="en-US" sz="1650" dirty="0"/>
           </a:p>
         </p:txBody>
       </p:sp>
@@ -7066,14 +7222,17 @@
           <a:ln/>
         </p:spPr>
         <p:txBody>
-          <a:bodyPr wrap="square" rtlCol="0" anchor="ctr"/>
+          <a:bodyPr wrap="square" lIns="0" tIns="0" rIns="0" bIns="0" rtlCol="0" anchor="t"/>
           <a:lstStyle/>
           <a:p>
             <a:pPr indent="0" marL="0">
-              <a:buNone/>
-            </a:pPr>
-            <a:r>
-              <a:rPr lang="en-US" sz="730" b="1" spc="200" kern="0" dirty="0">
+              <a:lnSpc>
+                <a:spcPct val="125000"/>
+              </a:lnSpc>
+              <a:buNone/>
+            </a:pPr>
+            <a:r>
+              <a:rPr lang="en-US" sz="830" b="1" spc="200" kern="0" dirty="0">
                 <a:solidFill>
                   <a:srgbClr val="B63A06"/>
                 </a:solidFill>
@@ -7083,7 +7242,7 @@
               </a:rPr>
               <a:t>BALANCE SHEET RESET</a:t>
             </a:r>
-            <a:endParaRPr lang="en-US" sz="730" dirty="0"/>
+            <a:endParaRPr lang="en-US" sz="830" dirty="0"/>
           </a:p>
         </p:txBody>
       </p:sp>
@@ -7105,7 +7264,7 @@
           <a:ln/>
         </p:spPr>
         <p:txBody>
-          <a:bodyPr wrap="square" rtlCol="0" anchor="ctr"/>
+          <a:bodyPr wrap="square" lIns="0" tIns="0" rIns="0" bIns="0" rtlCol="0" anchor="t"/>
           <a:lstStyle/>
           <a:p>
             <a:pPr indent="0" marL="0">
@@ -7115,7 +7274,7 @@
               <a:buNone/>
             </a:pPr>
             <a:r>
-              <a:rPr lang="en-US" sz="2270" b="1" dirty="0">
+              <a:rPr lang="en-US" sz="2550" b="1" dirty="0">
                 <a:solidFill>
                   <a:srgbClr val="132238"/>
                 </a:solidFill>
@@ -7125,7 +7284,7 @@
               </a:rPr>
               <a:t>H股募资把杠杆拉回更可控区间</a:t>
             </a:r>
-            <a:endParaRPr lang="en-US" sz="2270" dirty="0"/>
+            <a:endParaRPr lang="en-US" sz="2550" dirty="0"/>
           </a:p>
         </p:txBody>
       </p:sp>
@@ -7187,14 +7346,17 @@
           <a:ln/>
         </p:spPr>
         <p:txBody>
-          <a:bodyPr wrap="square" rtlCol="0" anchor="ctr"/>
+          <a:bodyPr wrap="square" lIns="0" tIns="0" rIns="0" bIns="0" rtlCol="0" anchor="t"/>
           <a:lstStyle/>
           <a:p>
             <a:pPr algn="ctr" indent="0" marL="0">
-              <a:buNone/>
-            </a:pPr>
-            <a:r>
-              <a:rPr lang="en-US" sz="2800" b="1" dirty="0">
+              <a:lnSpc>
+                <a:spcPct val="125000"/>
+              </a:lnSpc>
+              <a:buNone/>
+            </a:pPr>
+            <a:r>
+              <a:rPr lang="en-US" sz="3150" b="1" dirty="0">
                 <a:solidFill>
                   <a:srgbClr val="FFFFFF"/>
                 </a:solidFill>
@@ -7204,7 +7366,7 @@
               </a:rPr>
               <a:t>14.12亿港元</a:t>
             </a:r>
-            <a:endParaRPr lang="en-US" sz="2800" dirty="0"/>
+            <a:endParaRPr lang="en-US" sz="3150" dirty="0"/>
           </a:p>
         </p:txBody>
       </p:sp>
@@ -7228,14 +7390,17 @@
           <a:ln/>
         </p:spPr>
         <p:txBody>
-          <a:bodyPr wrap="square" rtlCol="0" anchor="ctr"/>
+          <a:bodyPr wrap="square" lIns="0" tIns="0" rIns="0" bIns="0" rtlCol="0" anchor="t"/>
           <a:lstStyle/>
           <a:p>
             <a:pPr algn="ctr" indent="0" marL="0">
-              <a:buNone/>
-            </a:pPr>
-            <a:r>
-              <a:rPr lang="en-US" sz="1130" b="1" dirty="0">
+              <a:lnSpc>
+                <a:spcPct val="125000"/>
+              </a:lnSpc>
+              <a:buNone/>
+            </a:pPr>
+            <a:r>
+              <a:rPr lang="en-US" sz="1280" b="1" dirty="0">
                 <a:solidFill>
                   <a:srgbClr val="FFFFFF"/>
                 </a:solidFill>
@@ -7245,7 +7410,7 @@
               </a:rPr>
               <a:t>2026年3月H股净募资</a:t>
             </a:r>
-            <a:endParaRPr lang="en-US" sz="1130" dirty="0"/>
+            <a:endParaRPr lang="en-US" sz="1280" dirty="0"/>
           </a:p>
         </p:txBody>
       </p:sp>
@@ -7281,7 +7446,7 @@
         </p:nvSpPr>
         <p:spPr>
           <a:xfrm>
-            <a:off x="7857896" y="4857659"/>
+            <a:off x="7857896" y="5467198"/>
             <a:ext cx="3238439" cy="1066739"/>
           </a:xfrm>
           <a:prstGeom prst="rect">
@@ -7291,7 +7456,7 @@
           <a:ln/>
         </p:spPr>
         <p:txBody>
-          <a:bodyPr wrap="square" rtlCol="0" anchor="ctr"/>
+          <a:bodyPr wrap="square" lIns="0" tIns="0" rIns="0" bIns="0" rtlCol="0" anchor="t"/>
           <a:lstStyle/>
           <a:p>
             <a:pPr indent="0" marL="0">
@@ -7301,7 +7466,7 @@
               <a:buNone/>
             </a:pPr>
             <a:r>
-              <a:rPr lang="en-US" sz="1130" dirty="0">
+              <a:rPr lang="en-US" sz="1280" dirty="0">
                 <a:solidFill>
                   <a:srgbClr val="5B6879"/>
                 </a:solidFill>
@@ -7311,7 +7476,7 @@
               </a:rPr>
               <a:t>2026H1资产负债率降至68.2%，货币资金升至10.89亿元。财务费用随借款规模下降。</a:t>
             </a:r>
-            <a:endParaRPr lang="en-US" sz="1130" dirty="0"/>
+            <a:endParaRPr lang="en-US" sz="1280" dirty="0"/>
           </a:p>
         </p:txBody>
       </p:sp>
@@ -7365,14 +7530,17 @@
           <a:ln/>
         </p:spPr>
         <p:txBody>
-          <a:bodyPr wrap="square" rtlCol="0" anchor="ctr"/>
+          <a:bodyPr wrap="square" lIns="0" tIns="0" rIns="0" bIns="0" rtlCol="0" anchor="t"/>
           <a:lstStyle/>
           <a:p>
             <a:pPr indent="0" marL="0">
-              <a:buNone/>
-            </a:pPr>
-            <a:r>
-              <a:rPr lang="en-US" sz="730" b="1" spc="200" kern="0" dirty="0">
+              <a:lnSpc>
+                <a:spcPct val="125000"/>
+              </a:lnSpc>
+              <a:buNone/>
+            </a:pPr>
+            <a:r>
+              <a:rPr lang="en-US" sz="830" b="1" spc="200" kern="0" dirty="0">
                 <a:solidFill>
                   <a:srgbClr val="B63A06"/>
                 </a:solidFill>
@@ -7382,7 +7550,7 @@
               </a:rPr>
               <a:t>CUSTOMER CONCENTRATION</a:t>
             </a:r>
-            <a:endParaRPr lang="en-US" sz="730" dirty="0"/>
+            <a:endParaRPr lang="en-US" sz="830" dirty="0"/>
           </a:p>
         </p:txBody>
       </p:sp>
@@ -7404,7 +7572,7 @@
           <a:ln/>
         </p:spPr>
         <p:txBody>
-          <a:bodyPr wrap="square" rtlCol="0" anchor="ctr"/>
+          <a:bodyPr wrap="square" lIns="0" tIns="0" rIns="0" bIns="0" rtlCol="0" anchor="t"/>
           <a:lstStyle/>
           <a:p>
             <a:pPr indent="0" marL="0">
@@ -7414,7 +7582,7 @@
               <a:buNone/>
             </a:pPr>
             <a:r>
-              <a:rPr lang="en-US" sz="2270" b="1" dirty="0">
+              <a:rPr lang="en-US" sz="2550" b="1" dirty="0">
                 <a:solidFill>
                   <a:srgbClr val="132238"/>
                 </a:solidFill>
@@ -7424,7 +7592,7 @@
               </a:rPr>
               <a:t>大客户带来规模，也放大订单波动</a:t>
             </a:r>
-            <a:endParaRPr lang="en-US" sz="2270" dirty="0"/>
+            <a:endParaRPr lang="en-US" sz="2550" dirty="0"/>
           </a:p>
         </p:txBody>
       </p:sp>
@@ -7462,14 +7630,17 @@
           <a:ln/>
         </p:spPr>
         <p:txBody>
-          <a:bodyPr wrap="square" rtlCol="0" anchor="ctr"/>
+          <a:bodyPr wrap="square" lIns="0" tIns="0" rIns="0" bIns="0" rtlCol="0" anchor="t"/>
           <a:lstStyle/>
           <a:p>
             <a:pPr algn="r" indent="0" marL="0">
-              <a:buNone/>
-            </a:pPr>
-            <a:r>
-              <a:rPr lang="en-US" sz="3870" b="1" dirty="0">
+              <a:lnSpc>
+                <a:spcPct val="125000"/>
+              </a:lnSpc>
+              <a:buNone/>
+            </a:pPr>
+            <a:r>
+              <a:rPr lang="en-US" sz="4350" b="1" dirty="0">
                 <a:solidFill>
                   <a:srgbClr val="B63A06"/>
                 </a:solidFill>
@@ -7479,7 +7650,7 @@
               </a:rPr>
               <a:t>37.2%</a:t>
             </a:r>
-            <a:endParaRPr lang="en-US" sz="3870" dirty="0"/>
+            <a:endParaRPr lang="en-US" sz="4350" dirty="0"/>
           </a:p>
         </p:txBody>
       </p:sp>
@@ -7501,7 +7672,7 @@
           <a:ln/>
         </p:spPr>
         <p:txBody>
-          <a:bodyPr wrap="square" rtlCol="0" anchor="ctr"/>
+          <a:bodyPr wrap="square" lIns="0" tIns="0" rIns="0" bIns="0" rtlCol="0" anchor="t"/>
           <a:lstStyle/>
           <a:p>
             <a:pPr algn="r" indent="0" marL="0">
@@ -7511,7 +7682,7 @@
               <a:buNone/>
             </a:pPr>
             <a:r>
-              <a:rPr lang="en-US" sz="870" dirty="0">
+              <a:rPr lang="en-US" sz="980" dirty="0">
                 <a:solidFill>
                   <a:srgbClr val="5B6879"/>
                 </a:solidFill>
@@ -7521,7 +7692,7 @@
               </a:rPr>
               <a:t>2025年前三季度</a:t>
             </a:r>
-            <a:endParaRPr lang="en-US" sz="870" dirty="0"/>
+            <a:endParaRPr lang="en-US" sz="980" dirty="0"/>
           </a:p>
           <a:p>
             <a:pPr algn="r" indent="0" marL="0">
@@ -7531,7 +7702,7 @@
               <a:buNone/>
             </a:pPr>
             <a:r>
-              <a:rPr lang="en-US" sz="870" dirty="0">
+              <a:rPr lang="en-US" sz="980" dirty="0">
                 <a:solidFill>
                   <a:srgbClr val="5B6879"/>
                 </a:solidFill>
@@ -7541,7 +7712,7 @@
               </a:rPr>
               <a:t>前五大客户占比</a:t>
             </a:r>
-            <a:endParaRPr lang="en-US" sz="870" dirty="0"/>
+            <a:endParaRPr lang="en-US" sz="980" dirty="0"/>
           </a:p>
         </p:txBody>
       </p:sp>
@@ -7586,7 +7757,7 @@
           <a:ln/>
         </p:spPr>
         <p:txBody>
-          <a:bodyPr wrap="square" rtlCol="0" anchor="ctr"/>
+          <a:bodyPr wrap="square" lIns="0" tIns="0" rIns="0" bIns="0" rtlCol="0" anchor="t"/>
           <a:lstStyle/>
           <a:p>
             <a:pPr algn="r" indent="0" marL="0">
@@ -7596,7 +7767,7 @@
               <a:buNone/>
             </a:pPr>
             <a:r>
-              <a:rPr lang="en-US" sz="1130" dirty="0">
+              <a:rPr lang="en-US" sz="1280" dirty="0">
                 <a:solidFill>
                   <a:srgbClr val="5B6879"/>
                 </a:solidFill>
@@ -7606,7 +7777,7 @@
               </a:rPr>
               <a:t>新能源龙头扩产可以快速放量；客户资本开支变化也会更快传导到收入和回款。</a:t>
             </a:r>
-            <a:endParaRPr lang="en-US" sz="1130" dirty="0"/>
+            <a:endParaRPr lang="en-US" sz="1280" dirty="0"/>
           </a:p>
         </p:txBody>
       </p:sp>
@@ -7707,14 +7878,17 @@
           <a:ln/>
         </p:spPr>
         <p:txBody>
-          <a:bodyPr wrap="square" rtlCol="0" anchor="ctr"/>
+          <a:bodyPr wrap="square" lIns="0" tIns="0" rIns="0" bIns="0" rtlCol="0" anchor="t"/>
           <a:lstStyle/>
           <a:p>
             <a:pPr indent="0" marL="0">
-              <a:buNone/>
-            </a:pPr>
-            <a:r>
-              <a:rPr lang="en-US" sz="730" b="1" spc="200" kern="0" dirty="0">
+              <a:lnSpc>
+                <a:spcPct val="125000"/>
+              </a:lnSpc>
+              <a:buNone/>
+            </a:pPr>
+            <a:r>
+              <a:rPr lang="en-US" sz="830" b="1" spc="200" kern="0" dirty="0">
                 <a:solidFill>
                   <a:srgbClr val="B63A06"/>
                 </a:solidFill>
@@ -7724,7 +7898,7 @@
               </a:rPr>
               <a:t>M&amp;A PRODUCT SPECTRUM</a:t>
             </a:r>
-            <a:endParaRPr lang="en-US" sz="730" dirty="0"/>
+            <a:endParaRPr lang="en-US" sz="830" dirty="0"/>
           </a:p>
         </p:txBody>
       </p:sp>
@@ -7746,7 +7920,7 @@
           <a:ln/>
         </p:spPr>
         <p:txBody>
-          <a:bodyPr wrap="square" rtlCol="0" anchor="ctr"/>
+          <a:bodyPr wrap="square" lIns="0" tIns="0" rIns="0" bIns="0" rtlCol="0" anchor="t"/>
           <a:lstStyle/>
           <a:p>
             <a:pPr indent="0" marL="0">
@@ -7756,7 +7930,7 @@
               <a:buNone/>
             </a:pPr>
             <a:r>
-              <a:rPr lang="en-US" sz="2270" b="1" dirty="0">
+              <a:rPr lang="en-US" sz="2550" b="1" dirty="0">
                 <a:solidFill>
                   <a:srgbClr val="132238"/>
                 </a:solidFill>
@@ -7766,7 +7940,7 @@
               </a:rPr>
               <a:t>酷卓把产品边界推向协作与人形</a:t>
             </a:r>
-            <a:endParaRPr lang="en-US" sz="2270" dirty="0"/>
+            <a:endParaRPr lang="en-US" sz="2550" dirty="0"/>
           </a:p>
         </p:txBody>
       </p:sp>
@@ -7788,7 +7962,7 @@
           <a:ln/>
         </p:spPr>
         <p:txBody>
-          <a:bodyPr wrap="square" rtlCol="0" anchor="ctr"/>
+          <a:bodyPr wrap="square" lIns="0" tIns="0" rIns="0" bIns="0" rtlCol="0" anchor="t"/>
           <a:lstStyle/>
           <a:p>
             <a:pPr indent="0" marL="0">
@@ -7798,7 +7972,7 @@
               <a:buNone/>
             </a:pPr>
             <a:r>
-              <a:rPr lang="en-US" sz="1130" dirty="0">
+              <a:rPr lang="en-US" sz="1280" dirty="0">
                 <a:solidFill>
                   <a:srgbClr val="5B6879"/>
                 </a:solidFill>
@@ -7808,7 +7982,7 @@
               </a:rPr>
               <a:t>拟以4.87亿元收购酷卓100%股权。标的拥有协作机器人、复合移动机器人和两代人形机器人，但仍处投入期。</a:t>
             </a:r>
-            <a:endParaRPr lang="en-US" sz="1130" dirty="0"/>
+            <a:endParaRPr lang="en-US" sz="1280" dirty="0"/>
           </a:p>
         </p:txBody>
       </p:sp>
@@ -7854,14 +8028,17 @@
           <a:ln/>
         </p:spPr>
         <p:txBody>
-          <a:bodyPr wrap="square" rtlCol="0" anchor="ctr"/>
+          <a:bodyPr wrap="square" lIns="0" tIns="0" rIns="0" bIns="0" rtlCol="0" anchor="ctr"/>
           <a:lstStyle/>
           <a:p>
             <a:pPr indent="0" marL="0">
-              <a:buNone/>
-            </a:pPr>
-            <a:r>
-              <a:rPr lang="en-US" sz="1200" b="1" dirty="0">
+              <a:lnSpc>
+                <a:spcPct val="125000"/>
+              </a:lnSpc>
+              <a:buNone/>
+            </a:pPr>
+            <a:r>
+              <a:rPr lang="en-US" sz="1350" b="1" dirty="0">
                 <a:solidFill>
                   <a:srgbClr val="FFFFFF"/>
                 </a:solidFill>
@@ -7871,7 +8048,7 @@
               </a:rPr>
               <a:t>工业机器人</a:t>
             </a:r>
-            <a:endParaRPr lang="en-US" sz="1200" dirty="0"/>
+            <a:endParaRPr lang="en-US" sz="1350" dirty="0"/>
           </a:p>
         </p:txBody>
       </p:sp>
@@ -7917,14 +8094,17 @@
           <a:ln/>
         </p:spPr>
         <p:txBody>
-          <a:bodyPr wrap="square" rtlCol="0" anchor="ctr"/>
+          <a:bodyPr wrap="square" lIns="0" tIns="0" rIns="0" bIns="0" rtlCol="0" anchor="ctr"/>
           <a:lstStyle/>
           <a:p>
             <a:pPr indent="0" marL="0">
-              <a:buNone/>
-            </a:pPr>
-            <a:r>
-              <a:rPr lang="en-US" sz="1200" b="1" dirty="0">
+              <a:lnSpc>
+                <a:spcPct val="125000"/>
+              </a:lnSpc>
+              <a:buNone/>
+            </a:pPr>
+            <a:r>
+              <a:rPr lang="en-US" sz="1350" b="1" dirty="0">
                 <a:solidFill>
                   <a:srgbClr val="FFFFFF"/>
                 </a:solidFill>
@@ -7934,7 +8114,7 @@
               </a:rPr>
               <a:t>协作机器人</a:t>
             </a:r>
-            <a:endParaRPr lang="en-US" sz="1200" dirty="0"/>
+            <a:endParaRPr lang="en-US" sz="1350" dirty="0"/>
           </a:p>
         </p:txBody>
       </p:sp>
@@ -7980,14 +8160,17 @@
           <a:ln/>
         </p:spPr>
         <p:txBody>
-          <a:bodyPr wrap="square" rtlCol="0" anchor="ctr"/>
+          <a:bodyPr wrap="square" lIns="0" tIns="0" rIns="0" bIns="0" rtlCol="0" anchor="ctr"/>
           <a:lstStyle/>
           <a:p>
             <a:pPr indent="0" marL="0">
-              <a:buNone/>
-            </a:pPr>
-            <a:r>
-              <a:rPr lang="en-US" sz="1200" b="1" dirty="0">
+              <a:lnSpc>
+                <a:spcPct val="125000"/>
+              </a:lnSpc>
+              <a:buNone/>
+            </a:pPr>
+            <a:r>
+              <a:rPr lang="en-US" sz="1350" b="1" dirty="0">
                 <a:solidFill>
                   <a:srgbClr val="FFFFFF"/>
                 </a:solidFill>
@@ -7997,7 +8180,7 @@
               </a:rPr>
               <a:t>具身智能</a:t>
             </a:r>
-            <a:endParaRPr lang="en-US" sz="1200" dirty="0"/>
+            <a:endParaRPr lang="en-US" sz="1350" dirty="0"/>
           </a:p>
         </p:txBody>
       </p:sp>
@@ -8019,14 +8202,17 @@
           <a:ln/>
         </p:spPr>
         <p:txBody>
-          <a:bodyPr wrap="square" rtlCol="0" anchor="ctr"/>
+          <a:bodyPr wrap="square" lIns="0" tIns="0" rIns="0" bIns="0" rtlCol="0" anchor="t"/>
           <a:lstStyle/>
           <a:p>
             <a:pPr indent="0" marL="0">
-              <a:buNone/>
-            </a:pPr>
-            <a:r>
-              <a:rPr lang="en-US" sz="1130" b="1" dirty="0">
+              <a:lnSpc>
+                <a:spcPct val="125000"/>
+              </a:lnSpc>
+              <a:buNone/>
+            </a:pPr>
+            <a:r>
+              <a:rPr lang="en-US" sz="1280" b="1" dirty="0">
                 <a:solidFill>
                   <a:srgbClr val="B63A06"/>
                 </a:solidFill>
@@ -8036,7 +8222,7 @@
               </a:rPr>
               <a:t>2025年收入5017万元，净亏损5300万元</a:t>
             </a:r>
-            <a:endParaRPr lang="en-US" sz="1130" dirty="0"/>
+            <a:endParaRPr lang="en-US" sz="1280" dirty="0"/>
           </a:p>
         </p:txBody>
       </p:sp>
@@ -8090,14 +8276,17 @@
           <a:ln/>
         </p:spPr>
         <p:txBody>
-          <a:bodyPr wrap="square" rtlCol="0" anchor="ctr"/>
+          <a:bodyPr wrap="square" lIns="0" tIns="0" rIns="0" bIns="0" rtlCol="0" anchor="t"/>
           <a:lstStyle/>
           <a:p>
             <a:pPr indent="0" marL="0">
-              <a:buNone/>
-            </a:pPr>
-            <a:r>
-              <a:rPr lang="en-US" sz="730" b="1" spc="200" kern="0" dirty="0">
+              <a:lnSpc>
+                <a:spcPct val="125000"/>
+              </a:lnSpc>
+              <a:buNone/>
+            </a:pPr>
+            <a:r>
+              <a:rPr lang="en-US" sz="830" b="1" spc="200" kern="0" dirty="0">
                 <a:solidFill>
                   <a:srgbClr val="B63A06"/>
                 </a:solidFill>
@@ -8107,7 +8296,7 @@
               </a:rPr>
               <a:t>COMMERCIAL LOOP</a:t>
             </a:r>
-            <a:endParaRPr lang="en-US" sz="730" dirty="0"/>
+            <a:endParaRPr lang="en-US" sz="830" dirty="0"/>
           </a:p>
         </p:txBody>
       </p:sp>
@@ -8129,7 +8318,7 @@
           <a:ln/>
         </p:spPr>
         <p:txBody>
-          <a:bodyPr wrap="square" rtlCol="0" anchor="ctr"/>
+          <a:bodyPr wrap="square" lIns="0" tIns="0" rIns="0" bIns="0" rtlCol="0" anchor="t"/>
           <a:lstStyle/>
           <a:p>
             <a:pPr indent="0" marL="0">
@@ -8139,7 +8328,7 @@
               <a:buNone/>
             </a:pPr>
             <a:r>
-              <a:rPr lang="en-US" sz="2270" b="1" dirty="0">
+              <a:rPr lang="en-US" sz="2550" b="1" dirty="0">
                 <a:solidFill>
                   <a:srgbClr val="132238"/>
                 </a:solidFill>
@@ -8149,7 +8338,7 @@
               </a:rPr>
               <a:t>人形机器人需要完成四次验证</a:t>
             </a:r>
-            <a:endParaRPr lang="en-US" sz="2270" dirty="0"/>
+            <a:endParaRPr lang="en-US" sz="2550" dirty="0"/>
           </a:p>
         </p:txBody>
       </p:sp>
@@ -8395,7 +8584,7 @@
           <a:ln/>
         </p:spPr>
         <p:txBody>
-          <a:bodyPr wrap="square" rtlCol="0" anchor="ctr"/>
+          <a:bodyPr wrap="square" lIns="0" tIns="0" rIns="0" bIns="0" rtlCol="0" anchor="ctr"/>
           <a:lstStyle/>
           <a:p>
             <a:pPr algn="ctr" indent="0" marL="0">
@@ -8405,7 +8594,7 @@
               <a:buNone/>
             </a:pPr>
             <a:r>
-              <a:rPr lang="en-US" sz="1870" b="1" dirty="0">
+              <a:rPr lang="en-US" sz="2100" b="1" dirty="0">
                 <a:solidFill>
                   <a:srgbClr val="FFFFFF"/>
                 </a:solidFill>
@@ -8415,7 +8604,7 @@
               </a:rPr>
               <a:t>工业场景</a:t>
             </a:r>
-            <a:endParaRPr lang="en-US" sz="1870" dirty="0"/>
+            <a:endParaRPr lang="en-US" sz="2100" dirty="0"/>
           </a:p>
           <a:p>
             <a:pPr algn="ctr" indent="0" marL="0">
@@ -8425,7 +8614,7 @@
               <a:buNone/>
             </a:pPr>
             <a:r>
-              <a:rPr lang="en-US" sz="1870" b="1" dirty="0">
+              <a:rPr lang="en-US" sz="2100" b="1" dirty="0">
                 <a:solidFill>
                   <a:srgbClr val="FFFFFF"/>
                 </a:solidFill>
@@ -8435,7 +8624,7 @@
               </a:rPr>
               <a:t>闭环验证</a:t>
             </a:r>
-            <a:endParaRPr lang="en-US" sz="1870" dirty="0"/>
+            <a:endParaRPr lang="en-US" sz="2100" dirty="0"/>
           </a:p>
         </p:txBody>
       </p:sp>
@@ -8457,14 +8646,17 @@
           <a:ln/>
         </p:spPr>
         <p:txBody>
-          <a:bodyPr wrap="square" rtlCol="0" anchor="ctr"/>
+          <a:bodyPr wrap="square" lIns="0" tIns="0" rIns="0" bIns="0" rtlCol="0" anchor="t"/>
           <a:lstStyle/>
           <a:p>
             <a:pPr algn="ctr" indent="0" marL="0">
-              <a:buNone/>
-            </a:pPr>
-            <a:r>
-              <a:rPr lang="en-US" sz="1330" b="1" dirty="0">
+              <a:lnSpc>
+                <a:spcPct val="125000"/>
+              </a:lnSpc>
+              <a:buNone/>
+            </a:pPr>
+            <a:r>
+              <a:rPr lang="en-US" sz="1500" b="1" dirty="0">
                 <a:solidFill>
                   <a:srgbClr val="09192C"/>
                 </a:solidFill>
@@ -8474,7 +8666,7 @@
               </a:rPr>
               <a:t>技术底座</a:t>
             </a:r>
-            <a:endParaRPr lang="en-US" sz="1330" dirty="0"/>
+            <a:endParaRPr lang="en-US" sz="1500" dirty="0"/>
           </a:p>
         </p:txBody>
       </p:sp>
@@ -8496,14 +8688,17 @@
           <a:ln/>
         </p:spPr>
         <p:txBody>
-          <a:bodyPr wrap="square" rtlCol="0" anchor="ctr"/>
+          <a:bodyPr wrap="square" lIns="0" tIns="0" rIns="0" bIns="0" rtlCol="0" anchor="t"/>
           <a:lstStyle/>
           <a:p>
             <a:pPr algn="ctr" indent="0" marL="0">
-              <a:buNone/>
-            </a:pPr>
-            <a:r>
-              <a:rPr lang="en-US" sz="1330" b="1" dirty="0">
+              <a:lnSpc>
+                <a:spcPct val="125000"/>
+              </a:lnSpc>
+              <a:buNone/>
+            </a:pPr>
+            <a:r>
+              <a:rPr lang="en-US" sz="1500" b="1" dirty="0">
                 <a:solidFill>
                   <a:srgbClr val="B63A06"/>
                 </a:solidFill>
@@ -8513,7 +8708,7 @@
               </a:rPr>
               <a:t>产品订单</a:t>
             </a:r>
-            <a:endParaRPr lang="en-US" sz="1330" dirty="0"/>
+            <a:endParaRPr lang="en-US" sz="1500" dirty="0"/>
           </a:p>
         </p:txBody>
       </p:sp>
@@ -8535,14 +8730,17 @@
           <a:ln/>
         </p:spPr>
         <p:txBody>
-          <a:bodyPr wrap="square" rtlCol="0" anchor="ctr"/>
+          <a:bodyPr wrap="square" lIns="0" tIns="0" rIns="0" bIns="0" rtlCol="0" anchor="t"/>
           <a:lstStyle/>
           <a:p>
             <a:pPr algn="ctr" indent="0" marL="0">
-              <a:buNone/>
-            </a:pPr>
-            <a:r>
-              <a:rPr lang="en-US" sz="1330" b="1" dirty="0">
+              <a:lnSpc>
+                <a:spcPct val="125000"/>
+              </a:lnSpc>
+              <a:buNone/>
+            </a:pPr>
+            <a:r>
+              <a:rPr lang="en-US" sz="1500" b="1" dirty="0">
                 <a:solidFill>
                   <a:srgbClr val="3B6F91"/>
                 </a:solidFill>
@@ -8552,7 +8750,7 @@
               </a:rPr>
               <a:t>客户复购</a:t>
             </a:r>
-            <a:endParaRPr lang="en-US" sz="1330" dirty="0"/>
+            <a:endParaRPr lang="en-US" sz="1500" dirty="0"/>
           </a:p>
         </p:txBody>
       </p:sp>
@@ -8574,14 +8772,17 @@
           <a:ln/>
         </p:spPr>
         <p:txBody>
-          <a:bodyPr wrap="square" rtlCol="0" anchor="ctr"/>
+          <a:bodyPr wrap="square" lIns="0" tIns="0" rIns="0" bIns="0" rtlCol="0" anchor="t"/>
           <a:lstStyle/>
           <a:p>
             <a:pPr algn="ctr" indent="0" marL="0">
-              <a:buNone/>
-            </a:pPr>
-            <a:r>
-              <a:rPr lang="en-US" sz="1330" b="1" dirty="0">
+              <a:lnSpc>
+                <a:spcPct val="125000"/>
+              </a:lnSpc>
+              <a:buNone/>
+            </a:pPr>
+            <a:r>
+              <a:rPr lang="en-US" sz="1500" b="1" dirty="0">
                 <a:solidFill>
                   <a:srgbClr val="3B6F91"/>
                 </a:solidFill>
@@ -8591,7 +8792,7 @@
               </a:rPr>
               <a:t>规模盈利</a:t>
             </a:r>
-            <a:endParaRPr lang="en-US" sz="1330" dirty="0"/>
+            <a:endParaRPr lang="en-US" sz="1500" dirty="0"/>
           </a:p>
         </p:txBody>
       </p:sp>
@@ -8613,7 +8814,7 @@
           <a:ln/>
         </p:spPr>
         <p:txBody>
-          <a:bodyPr wrap="square" rtlCol="0" anchor="ctr"/>
+          <a:bodyPr wrap="square" lIns="0" tIns="0" rIns="0" bIns="0" rtlCol="0" anchor="t"/>
           <a:lstStyle/>
           <a:p>
             <a:pPr algn="r" indent="0" marL="0">
@@ -8623,7 +8824,7 @@
               <a:buNone/>
             </a:pPr>
             <a:r>
-              <a:rPr lang="en-US" sz="870" dirty="0">
+              <a:rPr lang="en-US" sz="980" dirty="0">
                 <a:solidFill>
                   <a:srgbClr val="5B6879"/>
                 </a:solidFill>
@@ -8633,7 +8834,7 @@
               </a:rPr>
               <a:t>已有产品与首批订单并不等于商业模式已经成立</a:t>
             </a:r>
-            <a:endParaRPr lang="en-US" sz="870" dirty="0"/>
+            <a:endParaRPr lang="en-US" sz="980" dirty="0"/>
           </a:p>
         </p:txBody>
       </p:sp>
@@ -8687,14 +8888,17 @@
           <a:ln/>
         </p:spPr>
         <p:txBody>
-          <a:bodyPr wrap="square" rtlCol="0" anchor="ctr"/>
+          <a:bodyPr wrap="square" lIns="0" tIns="0" rIns="0" bIns="0" rtlCol="0" anchor="t"/>
           <a:lstStyle/>
           <a:p>
             <a:pPr indent="0" marL="0">
-              <a:buNone/>
-            </a:pPr>
-            <a:r>
-              <a:rPr lang="en-US" sz="730" b="1" spc="200" kern="0" dirty="0">
+              <a:lnSpc>
+                <a:spcPct val="125000"/>
+              </a:lnSpc>
+              <a:buNone/>
+            </a:pPr>
+            <a:r>
+              <a:rPr lang="en-US" sz="830" b="1" spc="200" kern="0" dirty="0">
                 <a:solidFill>
                   <a:srgbClr val="B63A06"/>
                 </a:solidFill>
@@ -8704,7 +8908,7 @@
               </a:rPr>
               <a:t>INCENTIVE FLOOR</a:t>
             </a:r>
-            <a:endParaRPr lang="en-US" sz="730" dirty="0"/>
+            <a:endParaRPr lang="en-US" sz="830" dirty="0"/>
           </a:p>
         </p:txBody>
       </p:sp>
@@ -8726,7 +8930,7 @@
           <a:ln/>
         </p:spPr>
         <p:txBody>
-          <a:bodyPr wrap="square" rtlCol="0" anchor="ctr"/>
+          <a:bodyPr wrap="square" lIns="0" tIns="0" rIns="0" bIns="0" rtlCol="0" anchor="t"/>
           <a:lstStyle/>
           <a:p>
             <a:pPr indent="0" marL="0">
@@ -8736,7 +8940,7 @@
               <a:buNone/>
             </a:pPr>
             <a:r>
-              <a:rPr lang="en-US" sz="2270" b="1" dirty="0">
+              <a:rPr lang="en-US" sz="2550" b="1" dirty="0">
                 <a:solidFill>
                   <a:srgbClr val="132238"/>
                 </a:solidFill>
@@ -8746,7 +8950,7 @@
               </a:rPr>
               <a:t>股权激励给出利润修复的最低台阶</a:t>
             </a:r>
-            <a:endParaRPr lang="en-US" sz="2270" dirty="0"/>
+            <a:endParaRPr lang="en-US" sz="2550" dirty="0"/>
           </a:p>
         </p:txBody>
       </p:sp>
@@ -8792,14 +8996,17 @@
           <a:ln/>
         </p:spPr>
         <p:txBody>
-          <a:bodyPr wrap="square" rtlCol="0" anchor="ctr"/>
+          <a:bodyPr wrap="square" lIns="0" tIns="0" rIns="0" bIns="0" rtlCol="0" anchor="ctr"/>
           <a:lstStyle/>
           <a:p>
             <a:pPr algn="ctr" indent="0" marL="0">
-              <a:buNone/>
-            </a:pPr>
-            <a:r>
-              <a:rPr lang="en-US" sz="1200" b="1" dirty="0">
+              <a:lnSpc>
+                <a:spcPct val="125000"/>
+              </a:lnSpc>
+              <a:buNone/>
+            </a:pPr>
+            <a:r>
+              <a:rPr lang="en-US" sz="1350" b="1" dirty="0">
                 <a:solidFill>
                   <a:srgbClr val="FFFFFF"/>
                 </a:solidFill>
@@ -8809,7 +9016,7 @@
               </a:rPr>
               <a:t>2024基期  收入40.09亿元</a:t>
             </a:r>
-            <a:endParaRPr lang="en-US" sz="1200" dirty="0"/>
+            <a:endParaRPr lang="en-US" sz="1350" dirty="0"/>
           </a:p>
         </p:txBody>
       </p:sp>
@@ -8855,14 +9062,17 @@
           <a:ln/>
         </p:spPr>
         <p:txBody>
-          <a:bodyPr wrap="square" rtlCol="0" anchor="ctr"/>
+          <a:bodyPr wrap="square" lIns="0" tIns="0" rIns="0" bIns="0" rtlCol="0" anchor="ctr"/>
           <a:lstStyle/>
           <a:p>
             <a:pPr algn="ctr" indent="0" marL="0">
-              <a:buNone/>
-            </a:pPr>
-            <a:r>
-              <a:rPr lang="en-US" sz="1200" b="1" dirty="0">
+              <a:lnSpc>
+                <a:spcPct val="125000"/>
+              </a:lnSpc>
+              <a:buNone/>
+            </a:pPr>
+            <a:r>
+              <a:rPr lang="en-US" sz="1350" b="1" dirty="0">
                 <a:solidFill>
                   <a:srgbClr val="FFFFFF"/>
                 </a:solidFill>
@@ -8872,7 +9082,7 @@
               </a:rPr>
               <a:t>2025第一期  收入增长21.93%</a:t>
             </a:r>
-            <a:endParaRPr lang="en-US" sz="1200" dirty="0"/>
+            <a:endParaRPr lang="en-US" sz="1350" dirty="0"/>
           </a:p>
         </p:txBody>
       </p:sp>
@@ -8918,14 +9128,17 @@
           <a:ln/>
         </p:spPr>
         <p:txBody>
-          <a:bodyPr wrap="square" rtlCol="0" anchor="ctr"/>
+          <a:bodyPr wrap="square" lIns="0" tIns="0" rIns="0" bIns="0" rtlCol="0" anchor="ctr"/>
           <a:lstStyle/>
           <a:p>
             <a:pPr algn="ctr" indent="0" marL="0">
-              <a:buNone/>
-            </a:pPr>
-            <a:r>
-              <a:rPr lang="en-US" sz="1200" b="1" dirty="0">
+              <a:lnSpc>
+                <a:spcPct val="125000"/>
+              </a:lnSpc>
+              <a:buNone/>
+            </a:pPr>
+            <a:r>
+              <a:rPr lang="en-US" sz="1350" b="1" dirty="0">
                 <a:solidFill>
                   <a:srgbClr val="FFFFFF"/>
                 </a:solidFill>
@@ -8935,7 +9148,7 @@
               </a:rPr>
               <a:t>2026两年累计净利润  2.2亿元</a:t>
             </a:r>
-            <a:endParaRPr lang="en-US" sz="1200" dirty="0"/>
+            <a:endParaRPr lang="en-US" sz="1350" dirty="0"/>
           </a:p>
         </p:txBody>
       </p:sp>
@@ -8981,14 +9194,17 @@
           <a:ln/>
         </p:spPr>
         <p:txBody>
-          <a:bodyPr wrap="square" rtlCol="0" anchor="ctr"/>
+          <a:bodyPr wrap="square" lIns="0" tIns="0" rIns="0" bIns="0" rtlCol="0" anchor="ctr"/>
           <a:lstStyle/>
           <a:p>
             <a:pPr algn="ctr" indent="0" marL="0">
-              <a:buNone/>
-            </a:pPr>
-            <a:r>
-              <a:rPr lang="en-US" sz="1200" b="1" dirty="0">
+              <a:lnSpc>
+                <a:spcPct val="125000"/>
+              </a:lnSpc>
+              <a:buNone/>
+            </a:pPr>
+            <a:r>
+              <a:rPr lang="en-US" sz="1350" b="1" dirty="0">
                 <a:solidFill>
                   <a:srgbClr val="FFFFFF"/>
                 </a:solidFill>
@@ -8998,7 +9214,7 @@
               </a:rPr>
               <a:t>2027三年累计净利润  3.6亿元</a:t>
             </a:r>
-            <a:endParaRPr lang="en-US" sz="1200" dirty="0"/>
+            <a:endParaRPr lang="en-US" sz="1350" dirty="0"/>
           </a:p>
         </p:txBody>
       </p:sp>
@@ -9020,7 +9236,7 @@
           <a:ln/>
         </p:spPr>
         <p:txBody>
-          <a:bodyPr wrap="square" rtlCol="0" anchor="ctr"/>
+          <a:bodyPr wrap="square" lIns="0" tIns="0" rIns="0" bIns="0" rtlCol="0" anchor="t"/>
           <a:lstStyle/>
           <a:p>
             <a:pPr indent="0" marL="0">
@@ -9030,7 +9246,7 @@
               <a:buNone/>
             </a:pPr>
             <a:r>
-              <a:rPr lang="en-US" sz="1130" dirty="0">
+              <a:rPr lang="en-US" sz="1280" dirty="0">
                 <a:solidFill>
                   <a:srgbClr val="5B6879"/>
                 </a:solidFill>
@@ -9040,7 +9256,7 @@
               </a:rPr>
               <a:t>第一期收入目标已经完成。后两期真正约束的是累计利润，而不是单纯扩大收入。</a:t>
             </a:r>
-            <a:endParaRPr lang="en-US" sz="1130" dirty="0"/>
+            <a:endParaRPr lang="en-US" sz="1280" dirty="0"/>
           </a:p>
         </p:txBody>
       </p:sp>
@@ -9085,14 +9301,17 @@
           <a:ln/>
         </p:spPr>
         <p:txBody>
-          <a:bodyPr wrap="square" rtlCol="0" anchor="ctr"/>
+          <a:bodyPr wrap="square" lIns="0" tIns="0" rIns="0" bIns="0" rtlCol="0" anchor="t"/>
           <a:lstStyle/>
           <a:p>
             <a:pPr indent="0" marL="0">
-              <a:buNone/>
-            </a:pPr>
-            <a:r>
-              <a:rPr lang="en-US" sz="1400" b="1" dirty="0">
+              <a:lnSpc>
+                <a:spcPct val="125000"/>
+              </a:lnSpc>
+              <a:buNone/>
+            </a:pPr>
+            <a:r>
+              <a:rPr lang="en-US" sz="1580" b="1" dirty="0">
                 <a:solidFill>
                   <a:srgbClr val="B63A06"/>
                 </a:solidFill>
@@ -9102,7 +9321,7 @@
               </a:rPr>
               <a:t>考核线不是估值上限</a:t>
             </a:r>
-            <a:endParaRPr lang="en-US" sz="1400" dirty="0"/>
+            <a:endParaRPr lang="en-US" sz="1580" dirty="0"/>
           </a:p>
         </p:txBody>
       </p:sp>
@@ -9156,14 +9375,17 @@
           <a:ln/>
         </p:spPr>
         <p:txBody>
-          <a:bodyPr wrap="square" rtlCol="0" anchor="ctr"/>
+          <a:bodyPr wrap="square" lIns="0" tIns="0" rIns="0" bIns="0" rtlCol="0" anchor="t"/>
           <a:lstStyle/>
           <a:p>
             <a:pPr indent="0" marL="0">
-              <a:buNone/>
-            </a:pPr>
-            <a:r>
-              <a:rPr lang="en-US" sz="730" b="1" spc="200" kern="0" dirty="0">
+              <a:lnSpc>
+                <a:spcPct val="125000"/>
+              </a:lnSpc>
+              <a:buNone/>
+            </a:pPr>
+            <a:r>
+              <a:rPr lang="en-US" sz="830" b="1" spc="200" kern="0" dirty="0">
                 <a:solidFill>
                   <a:srgbClr val="B63A06"/>
                 </a:solidFill>
@@ -9173,7 +9395,7 @@
               </a:rPr>
               <a:t>EARNINGS FORECAST</a:t>
             </a:r>
-            <a:endParaRPr lang="en-US" sz="730" dirty="0"/>
+            <a:endParaRPr lang="en-US" sz="830" dirty="0"/>
           </a:p>
         </p:txBody>
       </p:sp>
@@ -9195,7 +9417,7 @@
           <a:ln/>
         </p:spPr>
         <p:txBody>
-          <a:bodyPr wrap="square" rtlCol="0" anchor="ctr"/>
+          <a:bodyPr wrap="square" lIns="0" tIns="0" rIns="0" bIns="0" rtlCol="0" anchor="t"/>
           <a:lstStyle/>
           <a:p>
             <a:pPr indent="0" marL="0">
@@ -9205,7 +9427,7 @@
               <a:buNone/>
             </a:pPr>
             <a:r>
-              <a:rPr lang="en-US" sz="2270" b="1" dirty="0">
+              <a:rPr lang="en-US" sz="2550" b="1" dirty="0">
                 <a:solidFill>
                   <a:srgbClr val="132238"/>
                 </a:solidFill>
@@ -9215,7 +9437,7 @@
               </a:rPr>
               <a:t>一致预期要求利润连续四年抬升</a:t>
             </a:r>
-            <a:endParaRPr lang="en-US" sz="2270" dirty="0"/>
+            <a:endParaRPr lang="en-US" sz="2550" dirty="0"/>
           </a:p>
         </p:txBody>
       </p:sp>
@@ -9253,14 +9475,17 @@
           <a:ln/>
         </p:spPr>
         <p:txBody>
-          <a:bodyPr wrap="square" rtlCol="0" anchor="ctr"/>
+          <a:bodyPr wrap="square" lIns="0" tIns="0" rIns="0" bIns="0" rtlCol="0" anchor="t"/>
           <a:lstStyle/>
           <a:p>
             <a:pPr algn="r" indent="0" marL="0">
-              <a:buNone/>
-            </a:pPr>
-            <a:r>
-              <a:rPr lang="en-US" sz="3870" b="1" dirty="0">
+              <a:lnSpc>
+                <a:spcPct val="125000"/>
+              </a:lnSpc>
+              <a:buNone/>
+            </a:pPr>
+            <a:r>
+              <a:rPr lang="en-US" sz="4350" b="1" dirty="0">
                 <a:solidFill>
                   <a:srgbClr val="B63A06"/>
                 </a:solidFill>
@@ -9270,7 +9495,7 @@
               </a:rPr>
               <a:t>4.8%</a:t>
             </a:r>
-            <a:endParaRPr lang="en-US" sz="3870" dirty="0"/>
+            <a:endParaRPr lang="en-US" sz="4350" dirty="0"/>
           </a:p>
         </p:txBody>
       </p:sp>
@@ -9292,7 +9517,7 @@
           <a:ln/>
         </p:spPr>
         <p:txBody>
-          <a:bodyPr wrap="square" rtlCol="0" anchor="ctr"/>
+          <a:bodyPr wrap="square" lIns="0" tIns="0" rIns="0" bIns="0" rtlCol="0" anchor="t"/>
           <a:lstStyle/>
           <a:p>
             <a:pPr algn="r" indent="0" marL="0">
@@ -9302,7 +9527,7 @@
               <a:buNone/>
             </a:pPr>
             <a:r>
-              <a:rPr lang="en-US" sz="870" dirty="0">
+              <a:rPr lang="en-US" sz="980" dirty="0">
                 <a:solidFill>
                   <a:srgbClr val="5B6879"/>
                 </a:solidFill>
@@ -9312,7 +9537,7 @@
               </a:rPr>
               <a:t>2028E隐含净利率</a:t>
             </a:r>
-            <a:endParaRPr lang="en-US" sz="870" dirty="0"/>
+            <a:endParaRPr lang="en-US" sz="980" dirty="0"/>
           </a:p>
         </p:txBody>
       </p:sp>
@@ -9354,14 +9579,17 @@
           <a:ln/>
         </p:spPr>
         <p:txBody>
-          <a:bodyPr wrap="square" rtlCol="0" anchor="ctr"/>
+          <a:bodyPr wrap="square" lIns="0" tIns="0" rIns="0" bIns="0" rtlCol="0" anchor="ctr"/>
           <a:lstStyle/>
           <a:p>
             <a:pPr indent="0" marL="0">
-              <a:buNone/>
-            </a:pPr>
-            <a:r>
-              <a:rPr lang="en-US" sz="1000" dirty="0">
+              <a:lnSpc>
+                <a:spcPct val="125000"/>
+              </a:lnSpc>
+              <a:buNone/>
+            </a:pPr>
+            <a:r>
+              <a:rPr lang="en-US" sz="1130" dirty="0">
                 <a:solidFill>
                   <a:srgbClr val="132238"/>
                 </a:solidFill>
@@ -9371,7 +9599,7 @@
               </a:rPr>
               <a:t>毛利率维持31%以上</a:t>
             </a:r>
-            <a:endParaRPr lang="en-US" sz="1000" dirty="0"/>
+            <a:endParaRPr lang="en-US" sz="1130" dirty="0"/>
           </a:p>
         </p:txBody>
       </p:sp>
@@ -9413,14 +9641,17 @@
           <a:ln/>
         </p:spPr>
         <p:txBody>
-          <a:bodyPr wrap="square" rtlCol="0" anchor="ctr"/>
+          <a:bodyPr wrap="square" lIns="0" tIns="0" rIns="0" bIns="0" rtlCol="0" anchor="ctr"/>
           <a:lstStyle/>
           <a:p>
             <a:pPr indent="0" marL="0">
-              <a:buNone/>
-            </a:pPr>
-            <a:r>
-              <a:rPr lang="en-US" sz="1000" dirty="0">
+              <a:lnSpc>
+                <a:spcPct val="125000"/>
+              </a:lnSpc>
+              <a:buNone/>
+            </a:pPr>
+            <a:r>
+              <a:rPr lang="en-US" sz="1130" dirty="0">
                 <a:solidFill>
                   <a:srgbClr val="132238"/>
                 </a:solidFill>
@@ -9430,7 +9661,7 @@
               </a:rPr>
               <a:t>费用率继续下降</a:t>
             </a:r>
-            <a:endParaRPr lang="en-US" sz="1000" dirty="0"/>
+            <a:endParaRPr lang="en-US" sz="1130" dirty="0"/>
           </a:p>
         </p:txBody>
       </p:sp>
@@ -9472,14 +9703,17 @@
           <a:ln/>
         </p:spPr>
         <p:txBody>
-          <a:bodyPr wrap="square" rtlCol="0" anchor="ctr"/>
+          <a:bodyPr wrap="square" lIns="0" tIns="0" rIns="0" bIns="0" rtlCol="0" anchor="ctr"/>
           <a:lstStyle/>
           <a:p>
             <a:pPr indent="0" marL="0">
-              <a:buNone/>
-            </a:pPr>
-            <a:r>
-              <a:rPr lang="en-US" sz="1000" dirty="0">
+              <a:lnSpc>
+                <a:spcPct val="125000"/>
+              </a:lnSpc>
+              <a:buNone/>
+            </a:pPr>
+            <a:r>
+              <a:rPr lang="en-US" sz="1130" dirty="0">
                 <a:solidFill>
                   <a:srgbClr val="132238"/>
                 </a:solidFill>
@@ -9489,7 +9723,7 @@
               </a:rPr>
               <a:t>不再发生大额减值</a:t>
             </a:r>
-            <a:endParaRPr lang="en-US" sz="1000" dirty="0"/>
+            <a:endParaRPr lang="en-US" sz="1130" dirty="0"/>
           </a:p>
         </p:txBody>
       </p:sp>
@@ -9543,14 +9777,17 @@
           <a:ln/>
         </p:spPr>
         <p:txBody>
-          <a:bodyPr wrap="square" rtlCol="0" anchor="ctr"/>
+          <a:bodyPr wrap="square" lIns="0" tIns="0" rIns="0" bIns="0" rtlCol="0" anchor="t"/>
           <a:lstStyle/>
           <a:p>
             <a:pPr indent="0" marL="0">
-              <a:buNone/>
-            </a:pPr>
-            <a:r>
-              <a:rPr lang="en-US" sz="730" b="1" spc="200" kern="0" dirty="0">
+              <a:lnSpc>
+                <a:spcPct val="125000"/>
+              </a:lnSpc>
+              <a:buNone/>
+            </a:pPr>
+            <a:r>
+              <a:rPr lang="en-US" sz="830" b="1" spc="200" kern="0" dirty="0">
                 <a:solidFill>
                   <a:srgbClr val="B63A06"/>
                 </a:solidFill>
@@ -9560,7 +9797,7 @@
               </a:rPr>
               <a:t>INVESTMENT THESIS</a:t>
             </a:r>
-            <a:endParaRPr lang="en-US" sz="730" dirty="0"/>
+            <a:endParaRPr lang="en-US" sz="830" dirty="0"/>
           </a:p>
         </p:txBody>
       </p:sp>
@@ -9582,7 +9819,7 @@
           <a:ln/>
         </p:spPr>
         <p:txBody>
-          <a:bodyPr wrap="square" rtlCol="0" anchor="ctr"/>
+          <a:bodyPr wrap="square" lIns="0" tIns="0" rIns="0" bIns="0" rtlCol="0" anchor="t"/>
           <a:lstStyle/>
           <a:p>
             <a:pPr indent="0" marL="0">
@@ -9592,7 +9829,7 @@
               <a:buNone/>
             </a:pPr>
             <a:r>
-              <a:rPr lang="en-US" sz="3200" b="1" dirty="0">
+              <a:rPr lang="en-US" sz="3600" b="1" dirty="0">
                 <a:solidFill>
                   <a:srgbClr val="132238"/>
                 </a:solidFill>
@@ -9602,7 +9839,7 @@
               </a:rPr>
               <a:t>规模已经证明，</a:t>
             </a:r>
-            <a:endParaRPr lang="en-US" sz="3200" dirty="0"/>
+            <a:endParaRPr lang="en-US" sz="3600" dirty="0"/>
           </a:p>
           <a:p>
             <a:pPr indent="0" marL="0">
@@ -9612,7 +9849,7 @@
               <a:buNone/>
             </a:pPr>
             <a:r>
-              <a:rPr lang="en-US" sz="3200" b="1" dirty="0">
+              <a:rPr lang="en-US" sz="3600" b="1" dirty="0">
                 <a:solidFill>
                   <a:srgbClr val="132238"/>
                 </a:solidFill>
@@ -9622,7 +9859,7 @@
               </a:rPr>
               <a:t>利润和估值仍在等待证据</a:t>
             </a:r>
-            <a:endParaRPr lang="en-US" sz="3200" dirty="0"/>
+            <a:endParaRPr lang="en-US" sz="3600" dirty="0"/>
           </a:p>
         </p:txBody>
       </p:sp>
@@ -9690,14 +9927,17 @@
           <a:ln/>
         </p:spPr>
         <p:txBody>
-          <a:bodyPr wrap="square" rtlCol="0" anchor="ctr"/>
+          <a:bodyPr wrap="square" lIns="0" tIns="0" rIns="0" bIns="0" rtlCol="0" anchor="t"/>
           <a:lstStyle/>
           <a:p>
             <a:pPr indent="0" marL="0">
-              <a:buNone/>
-            </a:pPr>
-            <a:r>
-              <a:rPr lang="en-US" sz="1600" b="1" dirty="0">
+              <a:lnSpc>
+                <a:spcPct val="125000"/>
+              </a:lnSpc>
+              <a:buNone/>
+            </a:pPr>
+            <a:r>
+              <a:rPr lang="en-US" sz="1800" b="1" dirty="0">
                 <a:solidFill>
                   <a:srgbClr val="09192C"/>
                 </a:solidFill>
@@ -9705,9 +9945,9 @@
                 <a:ea typeface="Microsoft YaHei" pitchFamily="34" charset="-122"/>
                 <a:cs typeface="Microsoft YaHei" pitchFamily="34" charset="-120"/>
               </a:rPr>
-              <a:t>01</a:t>
-            </a:r>
-            <a:endParaRPr lang="en-US" sz="1600" dirty="0"/>
+              <a:t>1</a:t>
+            </a:r>
+            <a:endParaRPr lang="en-US" sz="1800" dirty="0"/>
           </a:p>
         </p:txBody>
       </p:sp>
@@ -9729,14 +9969,17 @@
           <a:ln/>
         </p:spPr>
         <p:txBody>
-          <a:bodyPr wrap="square" rtlCol="0" anchor="ctr"/>
+          <a:bodyPr wrap="square" lIns="0" tIns="0" rIns="0" bIns="0" rtlCol="0" anchor="t"/>
           <a:lstStyle/>
           <a:p>
             <a:pPr indent="0" marL="0">
-              <a:buNone/>
-            </a:pPr>
-            <a:r>
-              <a:rPr lang="en-US" sz="1600" b="1" dirty="0">
+              <a:lnSpc>
+                <a:spcPct val="125000"/>
+              </a:lnSpc>
+              <a:buNone/>
+            </a:pPr>
+            <a:r>
+              <a:rPr lang="en-US" sz="1800" b="1" dirty="0">
                 <a:solidFill>
                   <a:srgbClr val="132238"/>
                 </a:solidFill>
@@ -9746,7 +9989,7 @@
               </a:rPr>
               <a:t>规模领先</a:t>
             </a:r>
-            <a:endParaRPr lang="en-US" sz="1600" dirty="0"/>
+            <a:endParaRPr lang="en-US" sz="1800" dirty="0"/>
           </a:p>
         </p:txBody>
       </p:sp>
@@ -9768,7 +10011,7 @@
           <a:ln/>
         </p:spPr>
         <p:txBody>
-          <a:bodyPr wrap="square" rtlCol="0" anchor="ctr"/>
+          <a:bodyPr wrap="square" lIns="0" tIns="0" rIns="0" bIns="0" rtlCol="0" anchor="t"/>
           <a:lstStyle/>
           <a:p>
             <a:pPr indent="0" marL="0">
@@ -9778,7 +10021,7 @@
               <a:buNone/>
             </a:pPr>
             <a:r>
-              <a:rPr lang="en-US" sz="1070" dirty="0">
+              <a:rPr lang="en-US" sz="1200" dirty="0">
                 <a:solidFill>
                   <a:srgbClr val="5B6879"/>
                 </a:solidFill>
@@ -9788,7 +10031,7 @@
               </a:rPr>
               <a:t>2025年中国市场份额10.6%，连续八年位居国产品牌第一。</a:t>
             </a:r>
-            <a:endParaRPr lang="en-US" sz="1070" dirty="0"/>
+            <a:endParaRPr lang="en-US" sz="1200" dirty="0"/>
           </a:p>
         </p:txBody>
       </p:sp>
@@ -9833,14 +10076,17 @@
           <a:ln/>
         </p:spPr>
         <p:txBody>
-          <a:bodyPr wrap="square" rtlCol="0" anchor="ctr"/>
+          <a:bodyPr wrap="square" lIns="0" tIns="0" rIns="0" bIns="0" rtlCol="0" anchor="t"/>
           <a:lstStyle/>
           <a:p>
             <a:pPr indent="0" marL="0">
-              <a:buNone/>
-            </a:pPr>
-            <a:r>
-              <a:rPr lang="en-US" sz="1600" b="1" dirty="0">
+              <a:lnSpc>
+                <a:spcPct val="125000"/>
+              </a:lnSpc>
+              <a:buNone/>
+            </a:pPr>
+            <a:r>
+              <a:rPr lang="en-US" sz="1800" b="1" dirty="0">
                 <a:solidFill>
                   <a:srgbClr val="B63A06"/>
                 </a:solidFill>
@@ -9848,9 +10094,9 @@
                 <a:ea typeface="Microsoft YaHei" pitchFamily="34" charset="-122"/>
                 <a:cs typeface="Microsoft YaHei" pitchFamily="34" charset="-120"/>
               </a:rPr>
-              <a:t>02</a:t>
-            </a:r>
-            <a:endParaRPr lang="en-US" sz="1600" dirty="0"/>
+              <a:t>2</a:t>
+            </a:r>
+            <a:endParaRPr lang="en-US" sz="1800" dirty="0"/>
           </a:p>
         </p:txBody>
       </p:sp>
@@ -9872,14 +10118,17 @@
           <a:ln/>
         </p:spPr>
         <p:txBody>
-          <a:bodyPr wrap="square" rtlCol="0" anchor="ctr"/>
+          <a:bodyPr wrap="square" lIns="0" tIns="0" rIns="0" bIns="0" rtlCol="0" anchor="t"/>
           <a:lstStyle/>
           <a:p>
             <a:pPr indent="0" marL="0">
-              <a:buNone/>
-            </a:pPr>
-            <a:r>
-              <a:rPr lang="en-US" sz="1600" b="1" dirty="0">
+              <a:lnSpc>
+                <a:spcPct val="125000"/>
+              </a:lnSpc>
+              <a:buNone/>
+            </a:pPr>
+            <a:r>
+              <a:rPr lang="en-US" sz="1800" b="1" dirty="0">
                 <a:solidFill>
                   <a:srgbClr val="132238"/>
                 </a:solidFill>
@@ -9889,7 +10138,7 @@
               </a:rPr>
               <a:t>利润修复</a:t>
             </a:r>
-            <a:endParaRPr lang="en-US" sz="1600" dirty="0"/>
+            <a:endParaRPr lang="en-US" sz="1800" dirty="0"/>
           </a:p>
         </p:txBody>
       </p:sp>
@@ -9911,7 +10160,7 @@
           <a:ln/>
         </p:spPr>
         <p:txBody>
-          <a:bodyPr wrap="square" rtlCol="0" anchor="ctr"/>
+          <a:bodyPr wrap="square" lIns="0" tIns="0" rIns="0" bIns="0" rtlCol="0" anchor="t"/>
           <a:lstStyle/>
           <a:p>
             <a:pPr indent="0" marL="0">
@@ -9921,7 +10170,7 @@
               <a:buNone/>
             </a:pPr>
             <a:r>
-              <a:rPr lang="en-US" sz="1070" dirty="0">
+              <a:rPr lang="en-US" sz="1200" dirty="0">
                 <a:solidFill>
                   <a:srgbClr val="5B6879"/>
                 </a:solidFill>
@@ -9931,7 +10180,7 @@
               </a:rPr>
               <a:t>2026H1扣非净利润0.70亿元，主业净利率仍约2.7%。</a:t>
             </a:r>
-            <a:endParaRPr lang="en-US" sz="1070" dirty="0"/>
+            <a:endParaRPr lang="en-US" sz="1200" dirty="0"/>
           </a:p>
         </p:txBody>
       </p:sp>
@@ -9976,14 +10225,17 @@
           <a:ln/>
         </p:spPr>
         <p:txBody>
-          <a:bodyPr wrap="square" rtlCol="0" anchor="ctr"/>
+          <a:bodyPr wrap="square" lIns="0" tIns="0" rIns="0" bIns="0" rtlCol="0" anchor="t"/>
           <a:lstStyle/>
           <a:p>
             <a:pPr indent="0" marL="0">
-              <a:buNone/>
-            </a:pPr>
-            <a:r>
-              <a:rPr lang="en-US" sz="1600" b="1" dirty="0">
+              <a:lnSpc>
+                <a:spcPct val="125000"/>
+              </a:lnSpc>
+              <a:buNone/>
+            </a:pPr>
+            <a:r>
+              <a:rPr lang="en-US" sz="1800" b="1" dirty="0">
                 <a:solidFill>
                   <a:srgbClr val="3B6F91"/>
                 </a:solidFill>
@@ -9991,9 +10243,9 @@
                 <a:ea typeface="Microsoft YaHei" pitchFamily="34" charset="-122"/>
                 <a:cs typeface="Microsoft YaHei" pitchFamily="34" charset="-120"/>
               </a:rPr>
-              <a:t>03</a:t>
-            </a:r>
-            <a:endParaRPr lang="en-US" sz="1600" dirty="0"/>
+              <a:t>3</a:t>
+            </a:r>
+            <a:endParaRPr lang="en-US" sz="1800" dirty="0"/>
           </a:p>
         </p:txBody>
       </p:sp>
@@ -10015,14 +10267,17 @@
           <a:ln/>
         </p:spPr>
         <p:txBody>
-          <a:bodyPr wrap="square" rtlCol="0" anchor="ctr"/>
+          <a:bodyPr wrap="square" lIns="0" tIns="0" rIns="0" bIns="0" rtlCol="0" anchor="t"/>
           <a:lstStyle/>
           <a:p>
             <a:pPr indent="0" marL="0">
-              <a:buNone/>
-            </a:pPr>
-            <a:r>
-              <a:rPr lang="en-US" sz="1600" b="1" dirty="0">
+              <a:lnSpc>
+                <a:spcPct val="125000"/>
+              </a:lnSpc>
+              <a:buNone/>
+            </a:pPr>
+            <a:r>
+              <a:rPr lang="en-US" sz="1800" b="1" dirty="0">
                 <a:solidFill>
                   <a:srgbClr val="132238"/>
                 </a:solidFill>
@@ -10032,7 +10287,7 @@
               </a:rPr>
               <a:t>估值前置</a:t>
             </a:r>
-            <a:endParaRPr lang="en-US" sz="1600" dirty="0"/>
+            <a:endParaRPr lang="en-US" sz="1800" dirty="0"/>
           </a:p>
         </p:txBody>
       </p:sp>
@@ -10054,7 +10309,7 @@
           <a:ln/>
         </p:spPr>
         <p:txBody>
-          <a:bodyPr wrap="square" rtlCol="0" anchor="ctr"/>
+          <a:bodyPr wrap="square" lIns="0" tIns="0" rIns="0" bIns="0" rtlCol="0" anchor="t"/>
           <a:lstStyle/>
           <a:p>
             <a:pPr indent="0" marL="0">
@@ -10064,7 +10319,7 @@
               <a:buNone/>
             </a:pPr>
             <a:r>
-              <a:rPr lang="en-US" sz="1070" dirty="0">
+              <a:rPr lang="en-US" sz="1200" dirty="0">
                 <a:solidFill>
                   <a:srgbClr val="5B6879"/>
                 </a:solidFill>
@@ -10074,7 +10329,7 @@
               </a:rPr>
               <a:t>按一致预期计算，2026年动态PE约137倍。</a:t>
             </a:r>
-            <a:endParaRPr lang="en-US" sz="1070" dirty="0"/>
+            <a:endParaRPr lang="en-US" sz="1200" dirty="0"/>
           </a:p>
         </p:txBody>
       </p:sp>
@@ -10128,14 +10383,17 @@
           <a:ln/>
         </p:spPr>
         <p:txBody>
-          <a:bodyPr wrap="square" rtlCol="0" anchor="ctr"/>
+          <a:bodyPr wrap="square" lIns="0" tIns="0" rIns="0" bIns="0" rtlCol="0" anchor="t"/>
           <a:lstStyle/>
           <a:p>
             <a:pPr indent="0" marL="0">
-              <a:buNone/>
-            </a:pPr>
-            <a:r>
-              <a:rPr lang="en-US" sz="730" b="1" spc="200" kern="0" dirty="0">
+              <a:lnSpc>
+                <a:spcPct val="125000"/>
+              </a:lnSpc>
+              <a:buNone/>
+            </a:pPr>
+            <a:r>
+              <a:rPr lang="en-US" sz="830" b="1" spc="200" kern="0" dirty="0">
                 <a:solidFill>
                   <a:srgbClr val="F26322"/>
                 </a:solidFill>
@@ -10145,7 +10403,7 @@
               </a:rPr>
               <a:t>VALUATION PROOF TOWER</a:t>
             </a:r>
-            <a:endParaRPr lang="en-US" sz="730" dirty="0"/>
+            <a:endParaRPr lang="en-US" sz="830" dirty="0"/>
           </a:p>
         </p:txBody>
       </p:sp>
@@ -10167,7 +10425,7 @@
           <a:ln/>
         </p:spPr>
         <p:txBody>
-          <a:bodyPr wrap="square" rtlCol="0" anchor="ctr"/>
+          <a:bodyPr wrap="square" lIns="0" tIns="0" rIns="0" bIns="0" rtlCol="0" anchor="t"/>
           <a:lstStyle/>
           <a:p>
             <a:pPr indent="0" marL="0">
@@ -10177,7 +10435,7 @@
               <a:buNone/>
             </a:pPr>
             <a:r>
-              <a:rPr lang="en-US" sz="2270" b="1" dirty="0">
+              <a:rPr lang="en-US" sz="2550" b="1" dirty="0">
                 <a:solidFill>
                   <a:srgbClr val="FFFFFF"/>
                 </a:solidFill>
@@ -10187,7 +10445,7 @@
               </a:rPr>
               <a:t>294亿元市值需要四层证据同时成立</a:t>
             </a:r>
-            <a:endParaRPr lang="en-US" sz="2270" dirty="0"/>
+            <a:endParaRPr lang="en-US" sz="2550" dirty="0"/>
           </a:p>
         </p:txBody>
       </p:sp>
@@ -10252,14 +10510,17 @@
           <a:ln/>
         </p:spPr>
         <p:txBody>
-          <a:bodyPr wrap="square" rtlCol="0" anchor="ctr"/>
+          <a:bodyPr wrap="square" lIns="0" tIns="0" rIns="0" bIns="0" rtlCol="0" anchor="t"/>
           <a:lstStyle/>
           <a:p>
             <a:pPr algn="ctr" indent="0" marL="0">
-              <a:buNone/>
-            </a:pPr>
-            <a:r>
-              <a:rPr lang="en-US" sz="1200" b="1" dirty="0">
+              <a:lnSpc>
+                <a:spcPct val="125000"/>
+              </a:lnSpc>
+              <a:buNone/>
+            </a:pPr>
+            <a:r>
+              <a:rPr lang="en-US" sz="1350" b="1" dirty="0">
                 <a:solidFill>
                   <a:srgbClr val="09192C"/>
                 </a:solidFill>
@@ -10269,7 +10530,7 @@
               </a:rPr>
               <a:t>工业机器人主业与财务修复</a:t>
             </a:r>
-            <a:endParaRPr lang="en-US" sz="1200" dirty="0"/>
+            <a:endParaRPr lang="en-US" sz="1350" dirty="0"/>
           </a:p>
         </p:txBody>
       </p:sp>
@@ -10334,14 +10595,17 @@
           <a:ln/>
         </p:spPr>
         <p:txBody>
-          <a:bodyPr wrap="square" rtlCol="0" anchor="ctr"/>
+          <a:bodyPr wrap="square" lIns="0" tIns="0" rIns="0" bIns="0" rtlCol="0" anchor="t"/>
           <a:lstStyle/>
           <a:p>
             <a:pPr algn="ctr" indent="0" marL="0">
-              <a:buNone/>
-            </a:pPr>
-            <a:r>
-              <a:rPr lang="en-US" sz="1200" b="1" dirty="0">
+              <a:lnSpc>
+                <a:spcPct val="125000"/>
+              </a:lnSpc>
+              <a:buNone/>
+            </a:pPr>
+            <a:r>
+              <a:rPr lang="en-US" sz="1350" b="1" dirty="0">
                 <a:solidFill>
                   <a:srgbClr val="FFFFFF"/>
                 </a:solidFill>
@@ -10351,7 +10615,7 @@
               </a:rPr>
               <a:t>人形机器人规模订单</a:t>
             </a:r>
-            <a:endParaRPr lang="en-US" sz="1200" dirty="0"/>
+            <a:endParaRPr lang="en-US" sz="1350" dirty="0"/>
           </a:p>
         </p:txBody>
       </p:sp>
@@ -10416,14 +10680,17 @@
           <a:ln/>
         </p:spPr>
         <p:txBody>
-          <a:bodyPr wrap="square" rtlCol="0" anchor="ctr"/>
+          <a:bodyPr wrap="square" lIns="0" tIns="0" rIns="0" bIns="0" rtlCol="0" anchor="t"/>
           <a:lstStyle/>
           <a:p>
             <a:pPr algn="ctr" indent="0" marL="0">
-              <a:buNone/>
-            </a:pPr>
-            <a:r>
-              <a:rPr lang="en-US" sz="1200" b="1" dirty="0">
+              <a:lnSpc>
+                <a:spcPct val="125000"/>
+              </a:lnSpc>
+              <a:buNone/>
+            </a:pPr>
+            <a:r>
+              <a:rPr lang="en-US" sz="1350" b="1" dirty="0">
                 <a:solidFill>
                   <a:srgbClr val="FFFFFF"/>
                 </a:solidFill>
@@ -10433,7 +10700,7 @@
               </a:rPr>
               <a:t>净利率8%至10%</a:t>
             </a:r>
-            <a:endParaRPr lang="en-US" sz="1200" dirty="0"/>
+            <a:endParaRPr lang="en-US" sz="1350" dirty="0"/>
           </a:p>
         </p:txBody>
       </p:sp>
@@ -10495,14 +10762,17 @@
           <a:ln/>
         </p:spPr>
         <p:txBody>
-          <a:bodyPr wrap="square" rtlCol="0" anchor="ctr"/>
+          <a:bodyPr wrap="square" lIns="0" tIns="0" rIns="0" bIns="0" rtlCol="0" anchor="t"/>
           <a:lstStyle/>
           <a:p>
             <a:pPr algn="ctr" indent="0" marL="0">
-              <a:buNone/>
-            </a:pPr>
-            <a:r>
-              <a:rPr lang="en-US" sz="1130" b="1" dirty="0">
+              <a:lnSpc>
+                <a:spcPct val="125000"/>
+              </a:lnSpc>
+              <a:buNone/>
+            </a:pPr>
+            <a:r>
+              <a:rPr lang="en-US" sz="1280" b="1" dirty="0">
                 <a:solidFill>
                   <a:srgbClr val="FFFFFF"/>
                 </a:solidFill>
@@ -10512,7 +10782,7 @@
               </a:rPr>
               <a:t>约10亿利润</a:t>
             </a:r>
-            <a:endParaRPr lang="en-US" sz="1130" dirty="0"/>
+            <a:endParaRPr lang="en-US" sz="1280" dirty="0"/>
           </a:p>
         </p:txBody>
       </p:sp>
@@ -10559,14 +10829,17 @@
           <a:ln/>
         </p:spPr>
         <p:txBody>
-          <a:bodyPr wrap="square" rtlCol="0" anchor="ctr"/>
+          <a:bodyPr wrap="square" lIns="0" tIns="0" rIns="0" bIns="0" rtlCol="0" anchor="t"/>
           <a:lstStyle/>
           <a:p>
             <a:pPr indent="0" marL="0">
-              <a:buNone/>
-            </a:pPr>
-            <a:r>
-              <a:rPr lang="en-US" sz="1070" b="1" dirty="0">
+              <a:lnSpc>
+                <a:spcPct val="125000"/>
+              </a:lnSpc>
+              <a:buNone/>
+            </a:pPr>
+            <a:r>
+              <a:rPr lang="en-US" sz="1200" b="1" dirty="0">
                 <a:solidFill>
                   <a:srgbClr val="F26322"/>
                 </a:solidFill>
@@ -10576,7 +10849,7 @@
               </a:rPr>
               <a:t>已验证</a:t>
             </a:r>
-            <a:endParaRPr lang="en-US" sz="1070" dirty="0"/>
+            <a:endParaRPr lang="en-US" sz="1200" dirty="0"/>
           </a:p>
         </p:txBody>
       </p:sp>
@@ -10598,7 +10871,7 @@
           <a:ln/>
         </p:spPr>
         <p:txBody>
-          <a:bodyPr wrap="square" rtlCol="0" anchor="ctr"/>
+          <a:bodyPr wrap="square" lIns="0" tIns="0" rIns="0" bIns="0" rtlCol="0" anchor="t"/>
           <a:lstStyle/>
           <a:p>
             <a:pPr indent="0" marL="0">
@@ -10608,7 +10881,7 @@
               <a:buNone/>
             </a:pPr>
             <a:r>
-              <a:rPr lang="en-US" sz="1130" dirty="0">
+              <a:rPr lang="en-US" sz="1280" dirty="0">
                 <a:solidFill>
                   <a:srgbClr val="C7D1D9"/>
                 </a:solidFill>
@@ -10618,7 +10891,7 @@
               </a:rPr>
               <a:t>出货第一</a:t>
             </a:r>
-            <a:endParaRPr lang="en-US" sz="1130" dirty="0"/>
+            <a:endParaRPr lang="en-US" sz="1280" dirty="0"/>
           </a:p>
           <a:p>
             <a:pPr indent="0" marL="0">
@@ -10628,7 +10901,7 @@
               <a:buNone/>
             </a:pPr>
             <a:r>
-              <a:rPr lang="en-US" sz="1130" dirty="0">
+              <a:rPr lang="en-US" sz="1280" dirty="0">
                 <a:solidFill>
                   <a:srgbClr val="C7D1D9"/>
                 </a:solidFill>
@@ -10638,7 +10911,7 @@
               </a:rPr>
               <a:t>毛利率回升</a:t>
             </a:r>
-            <a:endParaRPr lang="en-US" sz="1130" dirty="0"/>
+            <a:endParaRPr lang="en-US" sz="1280" dirty="0"/>
           </a:p>
           <a:p>
             <a:pPr indent="0" marL="0">
@@ -10648,7 +10921,7 @@
               <a:buNone/>
             </a:pPr>
             <a:r>
-              <a:rPr lang="en-US" sz="1130" dirty="0">
+              <a:rPr lang="en-US" sz="1280" dirty="0">
                 <a:solidFill>
                   <a:srgbClr val="C7D1D9"/>
                 </a:solidFill>
@@ -10658,7 +10931,7 @@
               </a:rPr>
               <a:t>现金流改善</a:t>
             </a:r>
-            <a:endParaRPr lang="en-US" sz="1130" dirty="0"/>
+            <a:endParaRPr lang="en-US" sz="1280" dirty="0"/>
           </a:p>
           <a:p>
             <a:pPr indent="0" marL="0">
@@ -10668,7 +10941,7 @@
               <a:buNone/>
             </a:pPr>
             <a:r>
-              <a:rPr lang="en-US" sz="1130" dirty="0">
+              <a:rPr lang="en-US" sz="1280" dirty="0">
                 <a:solidFill>
                   <a:srgbClr val="C7D1D9"/>
                 </a:solidFill>
@@ -10678,7 +10951,7 @@
               </a:rPr>
               <a:t>杠杆下降</a:t>
             </a:r>
-            <a:endParaRPr lang="en-US" sz="1130" dirty="0"/>
+            <a:endParaRPr lang="en-US" sz="1280" dirty="0"/>
           </a:p>
         </p:txBody>
       </p:sp>
@@ -10700,14 +10973,17 @@
           <a:ln/>
         </p:spPr>
         <p:txBody>
-          <a:bodyPr wrap="square" rtlCol="0" anchor="ctr"/>
+          <a:bodyPr wrap="square" lIns="0" tIns="0" rIns="0" bIns="0" rtlCol="0" anchor="t"/>
           <a:lstStyle/>
           <a:p>
             <a:pPr indent="0" marL="0">
-              <a:buNone/>
-            </a:pPr>
-            <a:r>
-              <a:rPr lang="en-US" sz="1070" b="1" dirty="0">
+              <a:lnSpc>
+                <a:spcPct val="125000"/>
+              </a:lnSpc>
+              <a:buNone/>
+            </a:pPr>
+            <a:r>
+              <a:rPr lang="en-US" sz="1200" b="1" dirty="0">
                 <a:solidFill>
                   <a:srgbClr val="F26322"/>
                 </a:solidFill>
@@ -10717,7 +10993,7 @@
               </a:rPr>
               <a:t>待验证</a:t>
             </a:r>
-            <a:endParaRPr lang="en-US" sz="1070" dirty="0"/>
+            <a:endParaRPr lang="en-US" sz="1200" dirty="0"/>
           </a:p>
         </p:txBody>
       </p:sp>
@@ -10739,7 +11015,7 @@
           <a:ln/>
         </p:spPr>
         <p:txBody>
-          <a:bodyPr wrap="square" rtlCol="0" anchor="ctr"/>
+          <a:bodyPr wrap="square" lIns="0" tIns="0" rIns="0" bIns="0" rtlCol="0" anchor="t"/>
           <a:lstStyle/>
           <a:p>
             <a:pPr indent="0" marL="0">
@@ -10749,7 +11025,7 @@
               <a:buNone/>
             </a:pPr>
             <a:r>
-              <a:rPr lang="en-US" sz="1130" dirty="0">
+              <a:rPr lang="en-US" sz="1280" dirty="0">
                 <a:solidFill>
                   <a:srgbClr val="C7D1D9"/>
                 </a:solidFill>
@@ -10759,7 +11035,7 @@
               </a:rPr>
               <a:t>利润率正常化</a:t>
             </a:r>
-            <a:endParaRPr lang="en-US" sz="1130" dirty="0"/>
+            <a:endParaRPr lang="en-US" sz="1280" dirty="0"/>
           </a:p>
           <a:p>
             <a:pPr indent="0" marL="0">
@@ -10769,7 +11045,7 @@
               <a:buNone/>
             </a:pPr>
             <a:r>
-              <a:rPr lang="en-US" sz="1130" dirty="0">
+              <a:rPr lang="en-US" sz="1280" dirty="0">
                 <a:solidFill>
                   <a:srgbClr val="C7D1D9"/>
                 </a:solidFill>
@@ -10779,7 +11055,7 @@
               </a:rPr>
               <a:t>人形规模订单</a:t>
             </a:r>
-            <a:endParaRPr lang="en-US" sz="1130" dirty="0"/>
+            <a:endParaRPr lang="en-US" sz="1280" dirty="0"/>
           </a:p>
           <a:p>
             <a:pPr indent="0" marL="0">
@@ -10789,7 +11065,7 @@
               <a:buNone/>
             </a:pPr>
             <a:r>
-              <a:rPr lang="en-US" sz="1130" dirty="0">
+              <a:rPr lang="en-US" sz="1280" dirty="0">
                 <a:solidFill>
                   <a:srgbClr val="C7D1D9"/>
                 </a:solidFill>
@@ -10799,7 +11075,7 @@
               </a:rPr>
               <a:t>Cloos稳定经营</a:t>
             </a:r>
-            <a:endParaRPr lang="en-US" sz="1130" dirty="0"/>
+            <a:endParaRPr lang="en-US" sz="1280" dirty="0"/>
           </a:p>
           <a:p>
             <a:pPr indent="0" marL="0">
@@ -10809,7 +11085,7 @@
               <a:buNone/>
             </a:pPr>
             <a:r>
-              <a:rPr lang="en-US" sz="1130" dirty="0">
+              <a:rPr lang="en-US" sz="1280" dirty="0">
                 <a:solidFill>
                   <a:srgbClr val="C7D1D9"/>
                 </a:solidFill>
@@ -10819,7 +11095,7 @@
               </a:rPr>
               <a:t>估值逐步消化</a:t>
             </a:r>
-            <a:endParaRPr lang="en-US" sz="1130" dirty="0"/>
+            <a:endParaRPr lang="en-US" sz="1280" dirty="0"/>
           </a:p>
         </p:txBody>
       </p:sp>
@@ -10873,14 +11149,17 @@
           <a:ln/>
         </p:spPr>
         <p:txBody>
-          <a:bodyPr wrap="square" rtlCol="0" anchor="ctr"/>
+          <a:bodyPr wrap="square" lIns="0" tIns="0" rIns="0" bIns="0" rtlCol="0" anchor="t"/>
           <a:lstStyle/>
           <a:p>
             <a:pPr indent="0" marL="0">
-              <a:buNone/>
-            </a:pPr>
-            <a:r>
-              <a:rPr lang="en-US" sz="730" b="1" spc="200" kern="0" dirty="0">
+              <a:lnSpc>
+                <a:spcPct val="125000"/>
+              </a:lnSpc>
+              <a:buNone/>
+            </a:pPr>
+            <a:r>
+              <a:rPr lang="en-US" sz="830" b="1" spc="200" kern="0" dirty="0">
                 <a:solidFill>
                   <a:srgbClr val="B63A06"/>
                 </a:solidFill>
@@ -10890,7 +11169,7 @@
               </a:rPr>
               <a:t>SCENARIO FAN</a:t>
             </a:r>
-            <a:endParaRPr lang="en-US" sz="730" dirty="0"/>
+            <a:endParaRPr lang="en-US" sz="830" dirty="0"/>
           </a:p>
         </p:txBody>
       </p:sp>
@@ -10912,7 +11191,7 @@
           <a:ln/>
         </p:spPr>
         <p:txBody>
-          <a:bodyPr wrap="square" rtlCol="0" anchor="ctr"/>
+          <a:bodyPr wrap="square" lIns="0" tIns="0" rIns="0" bIns="0" rtlCol="0" anchor="t"/>
           <a:lstStyle/>
           <a:p>
             <a:pPr indent="0" marL="0">
@@ -10922,7 +11201,7 @@
               <a:buNone/>
             </a:pPr>
             <a:r>
-              <a:rPr lang="en-US" sz="2270" b="1" dirty="0">
+              <a:rPr lang="en-US" sz="2550" b="1" dirty="0">
                 <a:solidFill>
                   <a:srgbClr val="132238"/>
                 </a:solidFill>
@@ -10932,7 +11211,7 @@
               </a:rPr>
               <a:t>估值将沿三条路径消化</a:t>
             </a:r>
-            <a:endParaRPr lang="en-US" sz="2270" dirty="0"/>
+            <a:endParaRPr lang="en-US" sz="2550" dirty="0"/>
           </a:p>
         </p:txBody>
       </p:sp>
@@ -10974,14 +11253,17 @@
           <a:ln/>
         </p:spPr>
         <p:txBody>
-          <a:bodyPr wrap="square" rtlCol="0" anchor="ctr"/>
+          <a:bodyPr wrap="square" lIns="0" tIns="0" rIns="0" bIns="0" rtlCol="0" anchor="ctr"/>
           <a:lstStyle/>
           <a:p>
             <a:pPr algn="ctr" indent="0" marL="0">
-              <a:buNone/>
-            </a:pPr>
-            <a:r>
-              <a:rPr lang="en-US" sz="1200" b="1" dirty="0">
+              <a:lnSpc>
+                <a:spcPct val="125000"/>
+              </a:lnSpc>
+              <a:buNone/>
+            </a:pPr>
+            <a:r>
+              <a:rPr lang="en-US" sz="1350" b="1" dirty="0">
                 <a:solidFill>
                   <a:srgbClr val="FFFFFF"/>
                 </a:solidFill>
@@ -10991,7 +11273,7 @@
               </a:rPr>
               <a:t>当前</a:t>
             </a:r>
-            <a:endParaRPr lang="en-US" sz="1200" dirty="0"/>
+            <a:endParaRPr lang="en-US" sz="1350" dirty="0"/>
           </a:p>
         </p:txBody>
       </p:sp>
@@ -11148,14 +11430,17 @@
           <a:ln/>
         </p:spPr>
         <p:txBody>
-          <a:bodyPr wrap="square" rtlCol="0" anchor="ctr"/>
+          <a:bodyPr wrap="square" lIns="0" tIns="0" rIns="0" bIns="0" rtlCol="0" anchor="t"/>
           <a:lstStyle/>
           <a:p>
             <a:pPr algn="ctr" indent="0" marL="0">
-              <a:buNone/>
-            </a:pPr>
-            <a:r>
-              <a:rPr lang="en-US" sz="2530" b="1" dirty="0">
+              <a:lnSpc>
+                <a:spcPct val="125000"/>
+              </a:lnSpc>
+              <a:buNone/>
+            </a:pPr>
+            <a:r>
+              <a:rPr lang="en-US" sz="2850" b="1" dirty="0">
                 <a:solidFill>
                   <a:srgbClr val="3B6F91"/>
                 </a:solidFill>
@@ -11165,7 +11450,7 @@
               </a:rPr>
               <a:t>25%</a:t>
             </a:r>
-            <a:endParaRPr lang="en-US" sz="2530" dirty="0"/>
+            <a:endParaRPr lang="en-US" sz="2850" dirty="0"/>
           </a:p>
         </p:txBody>
       </p:sp>
@@ -11187,7 +11472,7 @@
           <a:ln/>
         </p:spPr>
         <p:txBody>
-          <a:bodyPr wrap="square" rtlCol="0" anchor="ctr"/>
+          <a:bodyPr wrap="square" lIns="0" tIns="0" rIns="0" bIns="0" rtlCol="0" anchor="t"/>
           <a:lstStyle/>
           <a:p>
             <a:pPr algn="ctr" indent="0" marL="0">
@@ -11197,7 +11482,7 @@
               <a:buNone/>
             </a:pPr>
             <a:r>
-              <a:rPr lang="en-US" sz="1270" b="1" dirty="0">
+              <a:rPr lang="en-US" sz="1430" b="1" dirty="0">
                 <a:solidFill>
                   <a:srgbClr val="132238"/>
                 </a:solidFill>
@@ -11207,7 +11492,7 @@
               </a:rPr>
               <a:t>乐观</a:t>
             </a:r>
-            <a:endParaRPr lang="en-US" sz="1270" dirty="0"/>
+            <a:endParaRPr lang="en-US" sz="1430" dirty="0"/>
           </a:p>
           <a:p>
             <a:pPr algn="ctr" indent="0" marL="0">
@@ -11217,7 +11502,7 @@
               <a:buNone/>
             </a:pPr>
             <a:r>
-              <a:rPr lang="en-US" sz="1270" b="1" dirty="0">
+              <a:rPr lang="en-US" sz="1430" b="1" dirty="0">
                 <a:solidFill>
                   <a:srgbClr val="132238"/>
                 </a:solidFill>
@@ -11227,7 +11512,7 @@
               </a:rPr>
               <a:t>60倍PE锚</a:t>
             </a:r>
-            <a:endParaRPr lang="en-US" sz="1270" dirty="0"/>
+            <a:endParaRPr lang="en-US" sz="1430" dirty="0"/>
           </a:p>
         </p:txBody>
       </p:sp>
@@ -11249,14 +11534,17 @@
           <a:ln/>
         </p:spPr>
         <p:txBody>
-          <a:bodyPr wrap="square" rtlCol="0" anchor="ctr"/>
+          <a:bodyPr wrap="square" lIns="0" tIns="0" rIns="0" bIns="0" rtlCol="0" anchor="t"/>
           <a:lstStyle/>
           <a:p>
             <a:pPr algn="ctr" indent="0" marL="0">
-              <a:buNone/>
-            </a:pPr>
-            <a:r>
-              <a:rPr lang="en-US" sz="2530" b="1" dirty="0">
+              <a:lnSpc>
+                <a:spcPct val="125000"/>
+              </a:lnSpc>
+              <a:buNone/>
+            </a:pPr>
+            <a:r>
+              <a:rPr lang="en-US" sz="2850" b="1" dirty="0">
                 <a:solidFill>
                   <a:srgbClr val="B63A06"/>
                 </a:solidFill>
@@ -11266,7 +11554,7 @@
               </a:rPr>
               <a:t>50%</a:t>
             </a:r>
-            <a:endParaRPr lang="en-US" sz="2530" dirty="0"/>
+            <a:endParaRPr lang="en-US" sz="2850" dirty="0"/>
           </a:p>
         </p:txBody>
       </p:sp>
@@ -11288,7 +11576,7 @@
           <a:ln/>
         </p:spPr>
         <p:txBody>
-          <a:bodyPr wrap="square" rtlCol="0" anchor="ctr"/>
+          <a:bodyPr wrap="square" lIns="0" tIns="0" rIns="0" bIns="0" rtlCol="0" anchor="t"/>
           <a:lstStyle/>
           <a:p>
             <a:pPr algn="ctr" indent="0" marL="0">
@@ -11298,7 +11586,7 @@
               <a:buNone/>
             </a:pPr>
             <a:r>
-              <a:rPr lang="en-US" sz="1270" b="1" dirty="0">
+              <a:rPr lang="en-US" sz="1430" b="1" dirty="0">
                 <a:solidFill>
                   <a:srgbClr val="132238"/>
                 </a:solidFill>
@@ -11308,7 +11596,7 @@
               </a:rPr>
               <a:t>中性</a:t>
             </a:r>
-            <a:endParaRPr lang="en-US" sz="1270" dirty="0"/>
+            <a:endParaRPr lang="en-US" sz="1430" dirty="0"/>
           </a:p>
           <a:p>
             <a:pPr algn="ctr" indent="0" marL="0">
@@ -11318,7 +11606,7 @@
               <a:buNone/>
             </a:pPr>
             <a:r>
-              <a:rPr lang="en-US" sz="1270" b="1" dirty="0">
+              <a:rPr lang="en-US" sz="1430" b="1" dirty="0">
                 <a:solidFill>
                   <a:srgbClr val="132238"/>
                 </a:solidFill>
@@ -11328,7 +11616,7 @@
               </a:rPr>
               <a:t>145至175亿元</a:t>
             </a:r>
-            <a:endParaRPr lang="en-US" sz="1270" dirty="0"/>
+            <a:endParaRPr lang="en-US" sz="1430" dirty="0"/>
           </a:p>
         </p:txBody>
       </p:sp>
@@ -11350,14 +11638,17 @@
           <a:ln/>
         </p:spPr>
         <p:txBody>
-          <a:bodyPr wrap="square" rtlCol="0" anchor="ctr"/>
+          <a:bodyPr wrap="square" lIns="0" tIns="0" rIns="0" bIns="0" rtlCol="0" anchor="t"/>
           <a:lstStyle/>
           <a:p>
             <a:pPr algn="ctr" indent="0" marL="0">
-              <a:buNone/>
-            </a:pPr>
-            <a:r>
-              <a:rPr lang="en-US" sz="2530" b="1" dirty="0">
+              <a:lnSpc>
+                <a:spcPct val="125000"/>
+              </a:lnSpc>
+              <a:buNone/>
+            </a:pPr>
+            <a:r>
+              <a:rPr lang="en-US" sz="2850" b="1" dirty="0">
                 <a:solidFill>
                   <a:srgbClr val="09192C"/>
                 </a:solidFill>
@@ -11367,7 +11658,7 @@
               </a:rPr>
               <a:t>25%</a:t>
             </a:r>
-            <a:endParaRPr lang="en-US" sz="2530" dirty="0"/>
+            <a:endParaRPr lang="en-US" sz="2850" dirty="0"/>
           </a:p>
         </p:txBody>
       </p:sp>
@@ -11389,7 +11680,7 @@
           <a:ln/>
         </p:spPr>
         <p:txBody>
-          <a:bodyPr wrap="square" rtlCol="0" anchor="ctr"/>
+          <a:bodyPr wrap="square" lIns="0" tIns="0" rIns="0" bIns="0" rtlCol="0" anchor="t"/>
           <a:lstStyle/>
           <a:p>
             <a:pPr algn="ctr" indent="0" marL="0">
@@ -11399,7 +11690,7 @@
               <a:buNone/>
             </a:pPr>
             <a:r>
-              <a:rPr lang="en-US" sz="1270" b="1" dirty="0">
+              <a:rPr lang="en-US" sz="1430" b="1" dirty="0">
                 <a:solidFill>
                   <a:srgbClr val="132238"/>
                 </a:solidFill>
@@ -11409,7 +11700,7 @@
               </a:rPr>
               <a:t>悲观</a:t>
             </a:r>
-            <a:endParaRPr lang="en-US" sz="1270" dirty="0"/>
+            <a:endParaRPr lang="en-US" sz="1430" dirty="0"/>
           </a:p>
           <a:p>
             <a:pPr algn="ctr" indent="0" marL="0">
@@ -11419,7 +11710,7 @@
               <a:buNone/>
             </a:pPr>
             <a:r>
-              <a:rPr lang="en-US" sz="1270" b="1" dirty="0">
+              <a:rPr lang="en-US" sz="1430" b="1" dirty="0">
                 <a:solidFill>
                   <a:srgbClr val="132238"/>
                 </a:solidFill>
@@ -11429,7 +11720,7 @@
               </a:rPr>
               <a:t>80亿元以下</a:t>
             </a:r>
-            <a:endParaRPr lang="en-US" sz="1270" dirty="0"/>
+            <a:endParaRPr lang="en-US" sz="1430" dirty="0"/>
           </a:p>
         </p:txBody>
       </p:sp>
@@ -11451,7 +11742,7 @@
           <a:ln/>
         </p:spPr>
         <p:txBody>
-          <a:bodyPr wrap="square" rtlCol="0" anchor="ctr"/>
+          <a:bodyPr wrap="square" lIns="0" tIns="0" rIns="0" bIns="0" rtlCol="0" anchor="t"/>
           <a:lstStyle/>
           <a:p>
             <a:pPr algn="ctr" indent="0" marL="0">
@@ -11461,7 +11752,7 @@
               <a:buNone/>
             </a:pPr>
             <a:r>
-              <a:rPr lang="en-US" sz="870" dirty="0">
+              <a:rPr lang="en-US" sz="980" dirty="0">
                 <a:solidFill>
                   <a:srgbClr val="5B6879"/>
                 </a:solidFill>
@@ -11471,7 +11762,7 @@
               </a:rPr>
               <a:t>概率与估值来自报告情景假设，不是承诺或预测保证</a:t>
             </a:r>
-            <a:endParaRPr lang="en-US" sz="870" dirty="0"/>
+            <a:endParaRPr lang="en-US" sz="980" dirty="0"/>
           </a:p>
         </p:txBody>
       </p:sp>
@@ -11525,14 +11816,17 @@
           <a:ln/>
         </p:spPr>
         <p:txBody>
-          <a:bodyPr wrap="square" rtlCol="0" anchor="ctr"/>
+          <a:bodyPr wrap="square" lIns="0" tIns="0" rIns="0" bIns="0" rtlCol="0" anchor="t"/>
           <a:lstStyle/>
           <a:p>
             <a:pPr indent="0" marL="0">
-              <a:buNone/>
-            </a:pPr>
-            <a:r>
-              <a:rPr lang="en-US" sz="730" b="1" spc="200" kern="0" dirty="0">
+              <a:lnSpc>
+                <a:spcPct val="125000"/>
+              </a:lnSpc>
+              <a:buNone/>
+            </a:pPr>
+            <a:r>
+              <a:rPr lang="en-US" sz="830" b="1" spc="200" kern="0" dirty="0">
                 <a:solidFill>
                   <a:srgbClr val="B63A06"/>
                 </a:solidFill>
@@ -11542,7 +11836,7 @@
               </a:rPr>
               <a:t>RISK TRANSMISSION</a:t>
             </a:r>
-            <a:endParaRPr lang="en-US" sz="730" dirty="0"/>
+            <a:endParaRPr lang="en-US" sz="830" dirty="0"/>
           </a:p>
         </p:txBody>
       </p:sp>
@@ -11564,7 +11858,7 @@
           <a:ln/>
         </p:spPr>
         <p:txBody>
-          <a:bodyPr wrap="square" rtlCol="0" anchor="ctr"/>
+          <a:bodyPr wrap="square" lIns="0" tIns="0" rIns="0" bIns="0" rtlCol="0" anchor="t"/>
           <a:lstStyle/>
           <a:p>
             <a:pPr indent="0" marL="0">
@@ -11574,7 +11868,7 @@
               <a:buNone/>
             </a:pPr>
             <a:r>
-              <a:rPr lang="en-US" sz="2270" b="1" dirty="0">
+              <a:rPr lang="en-US" sz="2550" b="1" dirty="0">
                 <a:solidFill>
                   <a:srgbClr val="132238"/>
                 </a:solidFill>
@@ -11584,7 +11878,7 @@
               </a:rPr>
               <a:t>四类风险最终汇聚为估值回撤</a:t>
             </a:r>
-            <a:endParaRPr lang="en-US" sz="2270" dirty="0"/>
+            <a:endParaRPr lang="en-US" sz="2550" dirty="0"/>
           </a:p>
         </p:txBody>
       </p:sp>
@@ -11800,14 +12094,17 @@
           <a:ln/>
         </p:spPr>
         <p:txBody>
-          <a:bodyPr wrap="square" rtlCol="0" anchor="ctr"/>
+          <a:bodyPr wrap="square" lIns="0" tIns="0" rIns="0" bIns="0" rtlCol="0" anchor="ctr"/>
           <a:lstStyle/>
           <a:p>
             <a:pPr algn="ctr" indent="0" marL="0">
-              <a:buNone/>
-            </a:pPr>
-            <a:r>
-              <a:rPr lang="en-US" sz="1800" b="1" dirty="0">
+              <a:lnSpc>
+                <a:spcPct val="125000"/>
+              </a:lnSpc>
+              <a:buNone/>
+            </a:pPr>
+            <a:r>
+              <a:rPr lang="en-US" sz="2030" b="1" dirty="0">
                 <a:solidFill>
                   <a:srgbClr val="FFFFFF"/>
                 </a:solidFill>
@@ -11817,7 +12114,7 @@
               </a:rPr>
               <a:t>估值快速收缩</a:t>
             </a:r>
-            <a:endParaRPr lang="en-US" sz="1800" dirty="0"/>
+            <a:endParaRPr lang="en-US" sz="2030" dirty="0"/>
           </a:p>
         </p:txBody>
       </p:sp>
@@ -11830,18 +12127,15 @@
         <p:spPr>
           <a:xfrm>
             <a:off x="666689" y="4000409"/>
-            <a:ext cx="0" cy="1809689"/>
-          </a:xfrm>
-          <a:prstGeom prst="line">
-            <a:avLst/>
-          </a:prstGeom>
-          <a:noFill/>
-          <a:ln w="57150">
-            <a:solidFill>
-              <a:srgbClr val="F26322"/>
-            </a:solidFill>
-            <a:prstDash val="solid"/>
-          </a:ln>
+            <a:ext cx="57150" cy="1809689"/>
+          </a:xfrm>
+          <a:prstGeom prst="rect">
+            <a:avLst/>
+          </a:prstGeom>
+          <a:solidFill>
+            <a:srgbClr val="F26322"/>
+          </a:solidFill>
+          <a:ln/>
         </p:spPr>
       </p:sp>
       <p:sp>
@@ -11852,7 +12146,7 @@
         </p:nvSpPr>
         <p:spPr>
           <a:xfrm>
-            <a:off x="666689" y="4209989"/>
+            <a:off x="876270" y="4209989"/>
             <a:ext cx="2095439" cy="400050"/>
           </a:xfrm>
           <a:prstGeom prst="rect">
@@ -11862,14 +12156,17 @@
           <a:ln/>
         </p:spPr>
         <p:txBody>
-          <a:bodyPr wrap="square" rtlCol="0" anchor="ctr"/>
+          <a:bodyPr wrap="square" lIns="0" tIns="0" rIns="0" bIns="0" rtlCol="0" anchor="t"/>
           <a:lstStyle/>
           <a:p>
             <a:pPr indent="0" marL="0">
-              <a:buNone/>
-            </a:pPr>
-            <a:r>
-              <a:rPr lang="en-US" sz="1470" b="1" dirty="0">
+              <a:lnSpc>
+                <a:spcPct val="125000"/>
+              </a:lnSpc>
+              <a:buNone/>
+            </a:pPr>
+            <a:r>
+              <a:rPr lang="en-US" sz="1650" b="1" dirty="0">
                 <a:solidFill>
                   <a:srgbClr val="132238"/>
                 </a:solidFill>
@@ -11879,7 +12176,7 @@
               </a:rPr>
               <a:t>价格战</a:t>
             </a:r>
-            <a:endParaRPr lang="en-US" sz="1470" dirty="0"/>
+            <a:endParaRPr lang="en-US" sz="1650" dirty="0"/>
           </a:p>
         </p:txBody>
       </p:sp>
@@ -11891,7 +12188,7 @@
         </p:nvSpPr>
         <p:spPr>
           <a:xfrm>
-            <a:off x="666689" y="4810018"/>
+            <a:off x="876270" y="4810018"/>
             <a:ext cx="2095439" cy="780989"/>
           </a:xfrm>
           <a:prstGeom prst="rect">
@@ -11901,7 +12198,7 @@
           <a:ln/>
         </p:spPr>
         <p:txBody>
-          <a:bodyPr wrap="square" rtlCol="0" anchor="ctr"/>
+          <a:bodyPr wrap="square" lIns="0" tIns="0" rIns="0" bIns="0" rtlCol="0" anchor="t"/>
           <a:lstStyle/>
           <a:p>
             <a:pPr indent="0" marL="0">
@@ -11911,7 +12208,7 @@
               <a:buNone/>
             </a:pPr>
             <a:r>
-              <a:rPr lang="en-US" sz="1000" dirty="0">
+              <a:rPr lang="en-US" sz="1130" dirty="0">
                 <a:solidFill>
                   <a:srgbClr val="5B6879"/>
                 </a:solidFill>
@@ -11921,7 +12218,7 @@
               </a:rPr>
               <a:t>机器人均价继续下探</a:t>
             </a:r>
-            <a:endParaRPr lang="en-US" sz="1000" dirty="0"/>
+            <a:endParaRPr lang="en-US" sz="1130" dirty="0"/>
           </a:p>
           <a:p>
             <a:pPr indent="0" marL="0">
@@ -11931,7 +12228,7 @@
               <a:buNone/>
             </a:pPr>
             <a:r>
-              <a:rPr lang="en-US" sz="1000" dirty="0">
+              <a:rPr lang="en-US" sz="1130" dirty="0">
                 <a:solidFill>
                   <a:srgbClr val="5B6879"/>
                 </a:solidFill>
@@ -11941,7 +12238,7 @@
               </a:rPr>
               <a:t>毛利率再次承压</a:t>
             </a:r>
-            <a:endParaRPr lang="en-US" sz="1000" dirty="0"/>
+            <a:endParaRPr lang="en-US" sz="1130" dirty="0"/>
           </a:p>
         </p:txBody>
       </p:sp>
@@ -11954,18 +12251,15 @@
         <p:spPr>
           <a:xfrm>
             <a:off x="3428909" y="4000409"/>
-            <a:ext cx="0" cy="1809689"/>
-          </a:xfrm>
-          <a:prstGeom prst="line">
-            <a:avLst/>
-          </a:prstGeom>
-          <a:noFill/>
-          <a:ln w="57150">
-            <a:solidFill>
-              <a:srgbClr val="3B6F91"/>
-            </a:solidFill>
-            <a:prstDash val="solid"/>
-          </a:ln>
+            <a:ext cx="57150" cy="1809689"/>
+          </a:xfrm>
+          <a:prstGeom prst="rect">
+            <a:avLst/>
+          </a:prstGeom>
+          <a:solidFill>
+            <a:srgbClr val="3B6F91"/>
+          </a:solidFill>
+          <a:ln/>
         </p:spPr>
       </p:sp>
       <p:sp>
@@ -11976,7 +12270,7 @@
         </p:nvSpPr>
         <p:spPr>
           <a:xfrm>
-            <a:off x="3428909" y="4209989"/>
+            <a:off x="3638489" y="4209989"/>
             <a:ext cx="2095439" cy="400050"/>
           </a:xfrm>
           <a:prstGeom prst="rect">
@@ -11986,14 +12280,17 @@
           <a:ln/>
         </p:spPr>
         <p:txBody>
-          <a:bodyPr wrap="square" rtlCol="0" anchor="ctr"/>
+          <a:bodyPr wrap="square" lIns="0" tIns="0" rIns="0" bIns="0" rtlCol="0" anchor="t"/>
           <a:lstStyle/>
           <a:p>
             <a:pPr indent="0" marL="0">
-              <a:buNone/>
-            </a:pPr>
-            <a:r>
-              <a:rPr lang="en-US" sz="1470" b="1" dirty="0">
+              <a:lnSpc>
+                <a:spcPct val="125000"/>
+              </a:lnSpc>
+              <a:buNone/>
+            </a:pPr>
+            <a:r>
+              <a:rPr lang="en-US" sz="1650" b="1" dirty="0">
                 <a:solidFill>
                   <a:srgbClr val="132238"/>
                 </a:solidFill>
@@ -12003,7 +12300,7 @@
               </a:rPr>
               <a:t>Cloos减值</a:t>
             </a:r>
-            <a:endParaRPr lang="en-US" sz="1470" dirty="0"/>
+            <a:endParaRPr lang="en-US" sz="1650" dirty="0"/>
           </a:p>
         </p:txBody>
       </p:sp>
@@ -12015,7 +12312,7 @@
         </p:nvSpPr>
         <p:spPr>
           <a:xfrm>
-            <a:off x="3428909" y="4810018"/>
+            <a:off x="3638489" y="4810018"/>
             <a:ext cx="2095439" cy="780989"/>
           </a:xfrm>
           <a:prstGeom prst="rect">
@@ -12025,7 +12322,7 @@
           <a:ln/>
         </p:spPr>
         <p:txBody>
-          <a:bodyPr wrap="square" rtlCol="0" anchor="ctr"/>
+          <a:bodyPr wrap="square" lIns="0" tIns="0" rIns="0" bIns="0" rtlCol="0" anchor="t"/>
           <a:lstStyle/>
           <a:p>
             <a:pPr indent="0" marL="0">
@@ -12035,7 +12332,7 @@
               <a:buNone/>
             </a:pPr>
             <a:r>
-              <a:rPr lang="en-US" sz="1000" dirty="0">
+              <a:rPr lang="en-US" sz="1130" dirty="0">
                 <a:solidFill>
                   <a:srgbClr val="5B6879"/>
                 </a:solidFill>
@@ -12045,7 +12342,7 @@
               </a:rPr>
               <a:t>海外经营不及预期</a:t>
             </a:r>
-            <a:endParaRPr lang="en-US" sz="1000" dirty="0"/>
+            <a:endParaRPr lang="en-US" sz="1130" dirty="0"/>
           </a:p>
           <a:p>
             <a:pPr indent="0" marL="0">
@@ -12055,7 +12352,7 @@
               <a:buNone/>
             </a:pPr>
             <a:r>
-              <a:rPr lang="en-US" sz="1000" dirty="0">
+              <a:rPr lang="en-US" sz="1130" dirty="0">
                 <a:solidFill>
                   <a:srgbClr val="5B6879"/>
                 </a:solidFill>
@@ -12065,7 +12362,7 @@
               </a:rPr>
               <a:t>商誉余额9.75亿元</a:t>
             </a:r>
-            <a:endParaRPr lang="en-US" sz="1000" dirty="0"/>
+            <a:endParaRPr lang="en-US" sz="1130" dirty="0"/>
           </a:p>
         </p:txBody>
       </p:sp>
@@ -12078,18 +12375,15 @@
         <p:spPr>
           <a:xfrm>
             <a:off x="6286317" y="4000409"/>
-            <a:ext cx="0" cy="1809689"/>
-          </a:xfrm>
-          <a:prstGeom prst="line">
-            <a:avLst/>
-          </a:prstGeom>
-          <a:noFill/>
-          <a:ln w="57150">
-            <a:solidFill>
-              <a:srgbClr val="8CA6B8"/>
-            </a:solidFill>
-            <a:prstDash val="solid"/>
-          </a:ln>
+            <a:ext cx="57150" cy="1809689"/>
+          </a:xfrm>
+          <a:prstGeom prst="rect">
+            <a:avLst/>
+          </a:prstGeom>
+          <a:solidFill>
+            <a:srgbClr val="8CA6B8"/>
+          </a:solidFill>
+          <a:ln/>
         </p:spPr>
       </p:sp>
       <p:sp>
@@ -12100,7 +12394,7 @@
         </p:nvSpPr>
         <p:spPr>
           <a:xfrm>
-            <a:off x="6286317" y="4209989"/>
+            <a:off x="6495898" y="4209989"/>
             <a:ext cx="2095439" cy="400050"/>
           </a:xfrm>
           <a:prstGeom prst="rect">
@@ -12110,14 +12404,17 @@
           <a:ln/>
         </p:spPr>
         <p:txBody>
-          <a:bodyPr wrap="square" rtlCol="0" anchor="ctr"/>
+          <a:bodyPr wrap="square" lIns="0" tIns="0" rIns="0" bIns="0" rtlCol="0" anchor="t"/>
           <a:lstStyle/>
           <a:p>
             <a:pPr indent="0" marL="0">
-              <a:buNone/>
-            </a:pPr>
-            <a:r>
-              <a:rPr lang="en-US" sz="1470" b="1" dirty="0">
+              <a:lnSpc>
+                <a:spcPct val="125000"/>
+              </a:lnSpc>
+              <a:buNone/>
+            </a:pPr>
+            <a:r>
+              <a:rPr lang="en-US" sz="1650" b="1" dirty="0">
                 <a:solidFill>
                   <a:srgbClr val="132238"/>
                 </a:solidFill>
@@ -12127,7 +12424,7 @@
               </a:rPr>
               <a:t>人形订单</a:t>
             </a:r>
-            <a:endParaRPr lang="en-US" sz="1470" dirty="0"/>
+            <a:endParaRPr lang="en-US" sz="1650" dirty="0"/>
           </a:p>
         </p:txBody>
       </p:sp>
@@ -12139,7 +12436,7 @@
         </p:nvSpPr>
         <p:spPr>
           <a:xfrm>
-            <a:off x="6286317" y="4810018"/>
+            <a:off x="6495898" y="4810018"/>
             <a:ext cx="2095439" cy="780989"/>
           </a:xfrm>
           <a:prstGeom prst="rect">
@@ -12149,7 +12446,7 @@
           <a:ln/>
         </p:spPr>
         <p:txBody>
-          <a:bodyPr wrap="square" rtlCol="0" anchor="ctr"/>
+          <a:bodyPr wrap="square" lIns="0" tIns="0" rIns="0" bIns="0" rtlCol="0" anchor="t"/>
           <a:lstStyle/>
           <a:p>
             <a:pPr indent="0" marL="0">
@@ -12159,7 +12456,7 @@
               <a:buNone/>
             </a:pPr>
             <a:r>
-              <a:rPr lang="en-US" sz="1000" dirty="0">
+              <a:rPr lang="en-US" sz="1130" dirty="0">
                 <a:solidFill>
                   <a:srgbClr val="5B6879"/>
                 </a:solidFill>
@@ -12169,7 +12466,7 @@
               </a:rPr>
               <a:t>商业化和复购不及预期</a:t>
             </a:r>
-            <a:endParaRPr lang="en-US" sz="1000" dirty="0"/>
+            <a:endParaRPr lang="en-US" sz="1130" dirty="0"/>
           </a:p>
           <a:p>
             <a:pPr indent="0" marL="0">
@@ -12179,7 +12476,7 @@
               <a:buNone/>
             </a:pPr>
             <a:r>
-              <a:rPr lang="en-US" sz="1000" dirty="0">
+              <a:rPr lang="en-US" sz="1130" dirty="0">
                 <a:solidFill>
                   <a:srgbClr val="5B6879"/>
                 </a:solidFill>
@@ -12189,7 +12486,7 @@
               </a:rPr>
               <a:t>投入拖累短期利润</a:t>
             </a:r>
-            <a:endParaRPr lang="en-US" sz="1000" dirty="0"/>
+            <a:endParaRPr lang="en-US" sz="1130" dirty="0"/>
           </a:p>
         </p:txBody>
       </p:sp>
@@ -12202,18 +12499,15 @@
         <p:spPr>
           <a:xfrm>
             <a:off x="9048537" y="4000409"/>
-            <a:ext cx="0" cy="1809689"/>
-          </a:xfrm>
-          <a:prstGeom prst="line">
-            <a:avLst/>
-          </a:prstGeom>
-          <a:noFill/>
-          <a:ln w="57150">
-            <a:solidFill>
-              <a:srgbClr val="C7D1D9"/>
-            </a:solidFill>
-            <a:prstDash val="solid"/>
-          </a:ln>
+            <a:ext cx="57150" cy="1809689"/>
+          </a:xfrm>
+          <a:prstGeom prst="rect">
+            <a:avLst/>
+          </a:prstGeom>
+          <a:solidFill>
+            <a:srgbClr val="C7D1D9"/>
+          </a:solidFill>
+          <a:ln/>
         </p:spPr>
       </p:sp>
       <p:sp>
@@ -12224,7 +12518,7 @@
         </p:nvSpPr>
         <p:spPr>
           <a:xfrm>
-            <a:off x="9048537" y="4209989"/>
+            <a:off x="9258026" y="4209989"/>
             <a:ext cx="2095439" cy="400050"/>
           </a:xfrm>
           <a:prstGeom prst="rect">
@@ -12234,14 +12528,17 @@
           <a:ln/>
         </p:spPr>
         <p:txBody>
-          <a:bodyPr wrap="square" rtlCol="0" anchor="ctr"/>
+          <a:bodyPr wrap="square" lIns="0" tIns="0" rIns="0" bIns="0" rtlCol="0" anchor="t"/>
           <a:lstStyle/>
           <a:p>
             <a:pPr indent="0" marL="0">
-              <a:buNone/>
-            </a:pPr>
-            <a:r>
-              <a:rPr lang="en-US" sz="1470" b="1" dirty="0">
+              <a:lnSpc>
+                <a:spcPct val="125000"/>
+              </a:lnSpc>
+              <a:buNone/>
+            </a:pPr>
+            <a:r>
+              <a:rPr lang="en-US" sz="1650" b="1" dirty="0">
                 <a:solidFill>
                   <a:srgbClr val="132238"/>
                 </a:solidFill>
@@ -12251,7 +12548,7 @@
               </a:rPr>
               <a:t>客户集中</a:t>
             </a:r>
-            <a:endParaRPr lang="en-US" sz="1470" dirty="0"/>
+            <a:endParaRPr lang="en-US" sz="1650" dirty="0"/>
           </a:p>
         </p:txBody>
       </p:sp>
@@ -12263,7 +12560,7 @@
         </p:nvSpPr>
         <p:spPr>
           <a:xfrm>
-            <a:off x="9048537" y="4810018"/>
+            <a:off x="9258026" y="4810018"/>
             <a:ext cx="2095439" cy="780989"/>
           </a:xfrm>
           <a:prstGeom prst="rect">
@@ -12273,7 +12570,7 @@
           <a:ln/>
         </p:spPr>
         <p:txBody>
-          <a:bodyPr wrap="square" rtlCol="0" anchor="ctr"/>
+          <a:bodyPr wrap="square" lIns="0" tIns="0" rIns="0" bIns="0" rtlCol="0" anchor="t"/>
           <a:lstStyle/>
           <a:p>
             <a:pPr indent="0" marL="0">
@@ -12283,7 +12580,7 @@
               <a:buNone/>
             </a:pPr>
             <a:r>
-              <a:rPr lang="en-US" sz="1000" dirty="0">
+              <a:rPr lang="en-US" sz="1130" dirty="0">
                 <a:solidFill>
                   <a:srgbClr val="5B6879"/>
                 </a:solidFill>
@@ -12293,7 +12590,7 @@
               </a:rPr>
               <a:t>大客户资本开支变化</a:t>
             </a:r>
-            <a:endParaRPr lang="en-US" sz="1000" dirty="0"/>
+            <a:endParaRPr lang="en-US" sz="1130" dirty="0"/>
           </a:p>
           <a:p>
             <a:pPr indent="0" marL="0">
@@ -12303,7 +12600,7 @@
               <a:buNone/>
             </a:pPr>
             <a:r>
-              <a:rPr lang="en-US" sz="1000" dirty="0">
+              <a:rPr lang="en-US" sz="1130" dirty="0">
                 <a:solidFill>
                   <a:srgbClr val="5B6879"/>
                 </a:solidFill>
@@ -12313,7 +12610,7 @@
               </a:rPr>
               <a:t>收入与回款波动</a:t>
             </a:r>
-            <a:endParaRPr lang="en-US" sz="1000" dirty="0"/>
+            <a:endParaRPr lang="en-US" sz="1130" dirty="0"/>
           </a:p>
         </p:txBody>
       </p:sp>
@@ -12367,14 +12664,17 @@
           <a:ln/>
         </p:spPr>
         <p:txBody>
-          <a:bodyPr wrap="square" rtlCol="0" anchor="ctr"/>
+          <a:bodyPr wrap="square" lIns="0" tIns="0" rIns="0" bIns="0" rtlCol="0" anchor="t"/>
           <a:lstStyle/>
           <a:p>
             <a:pPr indent="0" marL="0">
-              <a:buNone/>
-            </a:pPr>
-            <a:r>
-              <a:rPr lang="en-US" sz="730" b="1" spc="200" kern="0" dirty="0">
+              <a:lnSpc>
+                <a:spcPct val="125000"/>
+              </a:lnSpc>
+              <a:buNone/>
+            </a:pPr>
+            <a:r>
+              <a:rPr lang="en-US" sz="830" b="1" spc="200" kern="0" dirty="0">
                 <a:solidFill>
                   <a:srgbClr val="F26322"/>
                 </a:solidFill>
@@ -12384,7 +12684,7 @@
               </a:rPr>
               <a:t>DECISION FRAME</a:t>
             </a:r>
-            <a:endParaRPr lang="en-US" sz="730" dirty="0"/>
+            <a:endParaRPr lang="en-US" sz="830" dirty="0"/>
           </a:p>
         </p:txBody>
       </p:sp>
@@ -12406,14 +12706,17 @@
           <a:ln/>
         </p:spPr>
         <p:txBody>
-          <a:bodyPr wrap="square" rtlCol="0" anchor="ctr"/>
+          <a:bodyPr wrap="square" lIns="0" tIns="0" rIns="0" bIns="0" rtlCol="0" anchor="t"/>
           <a:lstStyle/>
           <a:p>
             <a:pPr indent="0" marL="0">
-              <a:buNone/>
-            </a:pPr>
-            <a:r>
-              <a:rPr lang="en-US" sz="3330" b="1" dirty="0">
+              <a:lnSpc>
+                <a:spcPct val="125000"/>
+              </a:lnSpc>
+              <a:buNone/>
+            </a:pPr>
+            <a:r>
+              <a:rPr lang="en-US" sz="3750" b="1" dirty="0">
                 <a:solidFill>
                   <a:srgbClr val="FFFFFF"/>
                 </a:solidFill>
@@ -12423,7 +12726,7 @@
               </a:rPr>
               <a:t>产业地位已经确立</a:t>
             </a:r>
-            <a:endParaRPr lang="en-US" sz="3330" dirty="0"/>
+            <a:endParaRPr lang="en-US" sz="3750" dirty="0"/>
           </a:p>
         </p:txBody>
       </p:sp>
@@ -12445,14 +12748,17 @@
           <a:ln/>
         </p:spPr>
         <p:txBody>
-          <a:bodyPr wrap="square" rtlCol="0" anchor="ctr"/>
+          <a:bodyPr wrap="square" lIns="0" tIns="0" rIns="0" bIns="0" rtlCol="0" anchor="t"/>
           <a:lstStyle/>
           <a:p>
             <a:pPr indent="0" marL="0">
-              <a:buNone/>
-            </a:pPr>
-            <a:r>
-              <a:rPr lang="en-US" sz="2130" dirty="0">
+              <a:lnSpc>
+                <a:spcPct val="125000"/>
+              </a:lnSpc>
+              <a:buNone/>
+            </a:pPr>
+            <a:r>
+              <a:rPr lang="en-US" sz="2400" dirty="0">
                 <a:solidFill>
                   <a:srgbClr val="C7D1D9"/>
                 </a:solidFill>
@@ -12462,7 +12768,7 @@
               </a:rPr>
               <a:t>盈利能力仍在验证，价格决定安全边际</a:t>
             </a:r>
-            <a:endParaRPr lang="en-US" sz="2130" dirty="0"/>
+            <a:endParaRPr lang="en-US" sz="2400" dirty="0"/>
           </a:p>
         </p:txBody>
       </p:sp>
@@ -12507,14 +12813,17 @@
           <a:ln/>
         </p:spPr>
         <p:txBody>
-          <a:bodyPr wrap="square" rtlCol="0" anchor="ctr"/>
+          <a:bodyPr wrap="square" lIns="0" tIns="0" rIns="0" bIns="0" rtlCol="0" anchor="t"/>
           <a:lstStyle/>
           <a:p>
             <a:pPr indent="0" marL="0">
-              <a:buNone/>
-            </a:pPr>
-            <a:r>
-              <a:rPr lang="en-US" sz="1330" b="1" dirty="0">
+              <a:lnSpc>
+                <a:spcPct val="125000"/>
+              </a:lnSpc>
+              <a:buNone/>
+            </a:pPr>
+            <a:r>
+              <a:rPr lang="en-US" sz="1500" b="1" dirty="0">
                 <a:solidFill>
                   <a:srgbClr val="F26322"/>
                 </a:solidFill>
@@ -12524,7 +12833,7 @@
               </a:rPr>
               <a:t>01</a:t>
             </a:r>
-            <a:endParaRPr lang="en-US" sz="1330" dirty="0"/>
+            <a:endParaRPr lang="en-US" sz="1500" dirty="0"/>
           </a:p>
         </p:txBody>
       </p:sp>
@@ -12546,14 +12855,17 @@
           <a:ln/>
         </p:spPr>
         <p:txBody>
-          <a:bodyPr wrap="square" rtlCol="0" anchor="ctr"/>
+          <a:bodyPr wrap="square" lIns="0" tIns="0" rIns="0" bIns="0" rtlCol="0" anchor="t"/>
           <a:lstStyle/>
           <a:p>
             <a:pPr indent="0" marL="0">
-              <a:buNone/>
-            </a:pPr>
-            <a:r>
-              <a:rPr lang="en-US" sz="1530" b="1" dirty="0">
+              <a:lnSpc>
+                <a:spcPct val="125000"/>
+              </a:lnSpc>
+              <a:buNone/>
+            </a:pPr>
+            <a:r>
+              <a:rPr lang="en-US" sz="1730" b="1" dirty="0">
                 <a:solidFill>
                   <a:srgbClr val="FFFFFF"/>
                 </a:solidFill>
@@ -12563,7 +12875,7 @@
               </a:rPr>
               <a:t>扣非净利率</a:t>
             </a:r>
-            <a:endParaRPr lang="en-US" sz="1530" dirty="0"/>
+            <a:endParaRPr lang="en-US" sz="1730" dirty="0"/>
           </a:p>
         </p:txBody>
       </p:sp>
@@ -12585,7 +12897,7 @@
           <a:ln/>
         </p:spPr>
         <p:txBody>
-          <a:bodyPr wrap="square" rtlCol="0" anchor="ctr"/>
+          <a:bodyPr wrap="square" lIns="0" tIns="0" rIns="0" bIns="0" rtlCol="0" anchor="t"/>
           <a:lstStyle/>
           <a:p>
             <a:pPr indent="0" marL="0">
@@ -12595,7 +12907,7 @@
               <a:buNone/>
             </a:pPr>
             <a:r>
-              <a:rPr lang="en-US" sz="1000" dirty="0">
+              <a:rPr lang="en-US" sz="1130" dirty="0">
                 <a:solidFill>
                   <a:srgbClr val="AEBBC8"/>
                 </a:solidFill>
@@ -12605,7 +12917,7 @@
               </a:rPr>
               <a:t>连续季度改善，证明主业盈利可持续</a:t>
             </a:r>
-            <a:endParaRPr lang="en-US" sz="1000" dirty="0"/>
+            <a:endParaRPr lang="en-US" sz="1130" dirty="0"/>
           </a:p>
         </p:txBody>
       </p:sp>
@@ -12627,14 +12939,17 @@
           <a:ln/>
         </p:spPr>
         <p:txBody>
-          <a:bodyPr wrap="square" rtlCol="0" anchor="ctr"/>
+          <a:bodyPr wrap="square" lIns="0" tIns="0" rIns="0" bIns="0" rtlCol="0" anchor="t"/>
           <a:lstStyle/>
           <a:p>
             <a:pPr indent="0" marL="0">
-              <a:buNone/>
-            </a:pPr>
-            <a:r>
-              <a:rPr lang="en-US" sz="1330" b="1" dirty="0">
+              <a:lnSpc>
+                <a:spcPct val="125000"/>
+              </a:lnSpc>
+              <a:buNone/>
+            </a:pPr>
+            <a:r>
+              <a:rPr lang="en-US" sz="1500" b="1" dirty="0">
                 <a:solidFill>
                   <a:srgbClr val="F26322"/>
                 </a:solidFill>
@@ -12644,7 +12959,7 @@
               </a:rPr>
               <a:t>02</a:t>
             </a:r>
-            <a:endParaRPr lang="en-US" sz="1330" dirty="0"/>
+            <a:endParaRPr lang="en-US" sz="1500" dirty="0"/>
           </a:p>
         </p:txBody>
       </p:sp>
@@ -12666,14 +12981,17 @@
           <a:ln/>
         </p:spPr>
         <p:txBody>
-          <a:bodyPr wrap="square" rtlCol="0" anchor="ctr"/>
+          <a:bodyPr wrap="square" lIns="0" tIns="0" rIns="0" bIns="0" rtlCol="0" anchor="t"/>
           <a:lstStyle/>
           <a:p>
             <a:pPr indent="0" marL="0">
-              <a:buNone/>
-            </a:pPr>
-            <a:r>
-              <a:rPr lang="en-US" sz="1530" b="1" dirty="0">
+              <a:lnSpc>
+                <a:spcPct val="125000"/>
+              </a:lnSpc>
+              <a:buNone/>
+            </a:pPr>
+            <a:r>
+              <a:rPr lang="en-US" sz="1730" b="1" dirty="0">
                 <a:solidFill>
                   <a:srgbClr val="FFFFFF"/>
                 </a:solidFill>
@@ -12683,7 +13001,7 @@
               </a:rPr>
               <a:t>人形订单</a:t>
             </a:r>
-            <a:endParaRPr lang="en-US" sz="1530" dirty="0"/>
+            <a:endParaRPr lang="en-US" sz="1730" dirty="0"/>
           </a:p>
         </p:txBody>
       </p:sp>
@@ -12705,7 +13023,7 @@
           <a:ln/>
         </p:spPr>
         <p:txBody>
-          <a:bodyPr wrap="square" rtlCol="0" anchor="ctr"/>
+          <a:bodyPr wrap="square" lIns="0" tIns="0" rIns="0" bIns="0" rtlCol="0" anchor="t"/>
           <a:lstStyle/>
           <a:p>
             <a:pPr indent="0" marL="0">
@@ -12715,7 +13033,7 @@
               <a:buNone/>
             </a:pPr>
             <a:r>
-              <a:rPr lang="en-US" sz="1000" dirty="0">
+              <a:rPr lang="en-US" sz="1130" dirty="0">
                 <a:solidFill>
                   <a:srgbClr val="AEBBC8"/>
                 </a:solidFill>
@@ -12725,7 +13043,7 @@
               </a:rPr>
               <a:t>从首批订单走向复购和规模交付</a:t>
             </a:r>
-            <a:endParaRPr lang="en-US" sz="1000" dirty="0"/>
+            <a:endParaRPr lang="en-US" sz="1130" dirty="0"/>
           </a:p>
         </p:txBody>
       </p:sp>
@@ -12747,14 +13065,17 @@
           <a:ln/>
         </p:spPr>
         <p:txBody>
-          <a:bodyPr wrap="square" rtlCol="0" anchor="ctr"/>
+          <a:bodyPr wrap="square" lIns="0" tIns="0" rIns="0" bIns="0" rtlCol="0" anchor="t"/>
           <a:lstStyle/>
           <a:p>
             <a:pPr indent="0" marL="0">
-              <a:buNone/>
-            </a:pPr>
-            <a:r>
-              <a:rPr lang="en-US" sz="1330" b="1" dirty="0">
+              <a:lnSpc>
+                <a:spcPct val="125000"/>
+              </a:lnSpc>
+              <a:buNone/>
+            </a:pPr>
+            <a:r>
+              <a:rPr lang="en-US" sz="1500" b="1" dirty="0">
                 <a:solidFill>
                   <a:srgbClr val="F26322"/>
                 </a:solidFill>
@@ -12764,7 +13085,7 @@
               </a:rPr>
               <a:t>03</a:t>
             </a:r>
-            <a:endParaRPr lang="en-US" sz="1330" dirty="0"/>
+            <a:endParaRPr lang="en-US" sz="1500" dirty="0"/>
           </a:p>
         </p:txBody>
       </p:sp>
@@ -12786,14 +13107,17 @@
           <a:ln/>
         </p:spPr>
         <p:txBody>
-          <a:bodyPr wrap="square" rtlCol="0" anchor="ctr"/>
+          <a:bodyPr wrap="square" lIns="0" tIns="0" rIns="0" bIns="0" rtlCol="0" anchor="t"/>
           <a:lstStyle/>
           <a:p>
             <a:pPr indent="0" marL="0">
-              <a:buNone/>
-            </a:pPr>
-            <a:r>
-              <a:rPr lang="en-US" sz="1530" b="1" dirty="0">
+              <a:lnSpc>
+                <a:spcPct val="125000"/>
+              </a:lnSpc>
+              <a:buNone/>
+            </a:pPr>
+            <a:r>
+              <a:rPr lang="en-US" sz="1730" b="1" dirty="0">
                 <a:solidFill>
                   <a:srgbClr val="FFFFFF"/>
                 </a:solidFill>
@@ -12803,7 +13127,7 @@
               </a:rPr>
               <a:t>Cloos经营</a:t>
             </a:r>
-            <a:endParaRPr lang="en-US" sz="1530" dirty="0"/>
+            <a:endParaRPr lang="en-US" sz="1730" dirty="0"/>
           </a:p>
         </p:txBody>
       </p:sp>
@@ -12825,7 +13149,7 @@
           <a:ln/>
         </p:spPr>
         <p:txBody>
-          <a:bodyPr wrap="square" rtlCol="0" anchor="ctr"/>
+          <a:bodyPr wrap="square" lIns="0" tIns="0" rIns="0" bIns="0" rtlCol="0" anchor="t"/>
           <a:lstStyle/>
           <a:p>
             <a:pPr indent="0" marL="0">
@@ -12835,7 +13159,7 @@
               <a:buNone/>
             </a:pPr>
             <a:r>
-              <a:rPr lang="en-US" sz="1000" dirty="0">
+              <a:rPr lang="en-US" sz="1130" dirty="0">
                 <a:solidFill>
                   <a:srgbClr val="AEBBC8"/>
                 </a:solidFill>
@@ -12845,7 +13169,7 @@
               </a:rPr>
               <a:t>海外毛利贡献与商誉风险同时验证</a:t>
             </a:r>
-            <a:endParaRPr lang="en-US" sz="1000" dirty="0"/>
+            <a:endParaRPr lang="en-US" sz="1130" dirty="0"/>
           </a:p>
         </p:txBody>
       </p:sp>
@@ -12867,7 +13191,7 @@
           <a:ln/>
         </p:spPr>
         <p:txBody>
-          <a:bodyPr wrap="square" rtlCol="0" anchor="ctr"/>
+          <a:bodyPr wrap="square" lIns="0" tIns="0" rIns="0" bIns="0" rtlCol="0" anchor="t"/>
           <a:lstStyle/>
           <a:p>
             <a:pPr indent="0" marL="0">
@@ -12877,7 +13201,7 @@
               <a:buNone/>
             </a:pPr>
             <a:r>
-              <a:rPr lang="en-US" sz="870" dirty="0">
+              <a:rPr lang="en-US" sz="980" dirty="0">
                 <a:solidFill>
                   <a:srgbClr val="AEBBC8"/>
                 </a:solidFill>
@@ -12887,7 +13211,7 @@
               </a:rPr>
               <a:t>仅供一般信息参考，不构成投资建议。证券市场有风险，投资者应独立判断。</a:t>
             </a:r>
-            <a:endParaRPr lang="en-US" sz="870" dirty="0"/>
+            <a:endParaRPr lang="en-US" sz="980" dirty="0"/>
           </a:p>
         </p:txBody>
       </p:sp>
@@ -12941,14 +13265,17 @@
           <a:ln/>
         </p:spPr>
         <p:txBody>
-          <a:bodyPr wrap="square" rtlCol="0" anchor="ctr"/>
+          <a:bodyPr wrap="square" lIns="0" tIns="0" rIns="0" bIns="0" rtlCol="0" anchor="t"/>
           <a:lstStyle/>
           <a:p>
             <a:pPr indent="0" marL="0">
-              <a:buNone/>
-            </a:pPr>
-            <a:r>
-              <a:rPr lang="en-US" sz="730" b="1" spc="200" kern="0" dirty="0">
+              <a:lnSpc>
+                <a:spcPct val="125000"/>
+              </a:lnSpc>
+              <a:buNone/>
+            </a:pPr>
+            <a:r>
+              <a:rPr lang="en-US" sz="830" b="1" spc="200" kern="0" dirty="0">
                 <a:solidFill>
                   <a:srgbClr val="F26322"/>
                 </a:solidFill>
@@ -12958,7 +13285,7 @@
               </a:rPr>
               <a:t>THE CENTRAL TENSION</a:t>
             </a:r>
-            <a:endParaRPr lang="en-US" sz="730" dirty="0"/>
+            <a:endParaRPr lang="en-US" sz="830" dirty="0"/>
           </a:p>
         </p:txBody>
       </p:sp>
@@ -12980,7 +13307,7 @@
           <a:ln/>
         </p:spPr>
         <p:txBody>
-          <a:bodyPr wrap="square" rtlCol="0" anchor="ctr"/>
+          <a:bodyPr wrap="square" lIns="0" tIns="0" rIns="0" bIns="0" rtlCol="0" anchor="t"/>
           <a:lstStyle/>
           <a:p>
             <a:pPr indent="0" marL="0">
@@ -12990,7 +13317,7 @@
               <a:buNone/>
             </a:pPr>
             <a:r>
-              <a:rPr lang="en-US" sz="2270" b="1" dirty="0">
+              <a:rPr lang="en-US" sz="2550" b="1" dirty="0">
                 <a:solidFill>
                   <a:srgbClr val="FFFFFF"/>
                 </a:solidFill>
@@ -13000,7 +13327,7 @@
               </a:rPr>
               <a:t>产业位置与盈利能力尚未处在同一高度</a:t>
             </a:r>
-            <a:endParaRPr lang="en-US" sz="2270" dirty="0"/>
+            <a:endParaRPr lang="en-US" sz="2550" dirty="0"/>
           </a:p>
         </p:txBody>
       </p:sp>
@@ -13111,7 +13438,7 @@
           <a:ln/>
         </p:spPr>
         <p:txBody>
-          <a:bodyPr wrap="square" rtlCol="0" anchor="ctr"/>
+          <a:bodyPr wrap="square" lIns="0" tIns="0" rIns="0" bIns="0" rtlCol="0" anchor="t"/>
           <a:lstStyle/>
           <a:p>
             <a:pPr indent="0" marL="0">
@@ -13121,7 +13448,7 @@
               <a:buNone/>
             </a:pPr>
             <a:r>
-              <a:rPr lang="en-US" sz="3870" b="1" dirty="0">
+              <a:rPr lang="en-US" sz="4350" b="1" dirty="0">
                 <a:solidFill>
                   <a:srgbClr val="F26322"/>
                 </a:solidFill>
@@ -13131,7 +13458,7 @@
               </a:rPr>
               <a:t>10.6%</a:t>
             </a:r>
-            <a:endParaRPr lang="en-US" sz="3870" dirty="0"/>
+            <a:endParaRPr lang="en-US" sz="4350" dirty="0"/>
           </a:p>
         </p:txBody>
       </p:sp>
@@ -13144,16 +13471,16 @@
         <p:spPr>
           <a:xfrm>
             <a:off x="1181039" y="3447928"/>
-            <a:ext cx="3238439" cy="685800"/>
-          </a:xfrm>
-          <a:prstGeom prst="rect">
-            <a:avLst/>
-          </a:prstGeom>
-          <a:noFill/>
-          <a:ln/>
-        </p:spPr>
-        <p:txBody>
-          <a:bodyPr wrap="square" rtlCol="0" anchor="ctr"/>
+            <a:ext cx="1714500" cy="685800"/>
+          </a:xfrm>
+          <a:prstGeom prst="rect">
+            <a:avLst/>
+          </a:prstGeom>
+          <a:noFill/>
+          <a:ln/>
+        </p:spPr>
+        <p:txBody>
+          <a:bodyPr wrap="square" lIns="0" tIns="0" rIns="0" bIns="0" rtlCol="0" anchor="t"/>
           <a:lstStyle/>
           <a:p>
             <a:pPr indent="0" marL="0">
@@ -13163,7 +13490,7 @@
               <a:buNone/>
             </a:pPr>
             <a:r>
-              <a:rPr lang="en-US" sz="1130" dirty="0">
+              <a:rPr lang="en-US" sz="1280" dirty="0">
                 <a:solidFill>
                   <a:srgbClr val="C7D1D9"/>
                 </a:solidFill>
@@ -13173,7 +13500,7 @@
               </a:rPr>
               <a:t>中国市场份额</a:t>
             </a:r>
-            <a:endParaRPr lang="en-US" sz="1130" dirty="0"/>
+            <a:endParaRPr lang="en-US" sz="1280" dirty="0"/>
           </a:p>
           <a:p>
             <a:pPr indent="0" marL="0">
@@ -13183,7 +13510,7 @@
               <a:buNone/>
             </a:pPr>
             <a:r>
-              <a:rPr lang="en-US" sz="1130" dirty="0">
+              <a:rPr lang="en-US" sz="1280" dirty="0">
                 <a:solidFill>
                   <a:srgbClr val="C7D1D9"/>
                 </a:solidFill>
@@ -13193,7 +13520,7 @@
               </a:rPr>
               <a:t>出货量口径已经登顶</a:t>
             </a:r>
-            <a:endParaRPr lang="en-US" sz="1130" dirty="0"/>
+            <a:endParaRPr lang="en-US" sz="1280" dirty="0"/>
           </a:p>
         </p:txBody>
       </p:sp>
@@ -13215,14 +13542,17 @@
           <a:ln/>
         </p:spPr>
         <p:txBody>
-          <a:bodyPr wrap="square" rtlCol="0" anchor="ctr"/>
+          <a:bodyPr wrap="square" lIns="0" tIns="0" rIns="0" bIns="0" rtlCol="0" anchor="t"/>
           <a:lstStyle/>
           <a:p>
             <a:pPr indent="0" marL="0">
-              <a:buNone/>
-            </a:pPr>
-            <a:r>
-              <a:rPr lang="en-US" sz="3870" b="1" dirty="0">
+              <a:lnSpc>
+                <a:spcPct val="125000"/>
+              </a:lnSpc>
+              <a:buNone/>
+            </a:pPr>
+            <a:r>
+              <a:rPr lang="en-US" sz="4350" b="1" dirty="0">
                 <a:solidFill>
                   <a:srgbClr val="FFFFFF"/>
                 </a:solidFill>
@@ -13232,7 +13562,7 @@
               </a:rPr>
               <a:t>约137×</a:t>
             </a:r>
-            <a:endParaRPr lang="en-US" sz="3870" dirty="0"/>
+            <a:endParaRPr lang="en-US" sz="4350" dirty="0"/>
           </a:p>
         </p:txBody>
       </p:sp>
@@ -13244,7 +13574,7 @@
         </p:nvSpPr>
         <p:spPr>
           <a:xfrm>
-            <a:off x="7753198" y="4000409"/>
+            <a:off x="7753198" y="4952848"/>
             <a:ext cx="3143159" cy="685800"/>
           </a:xfrm>
           <a:prstGeom prst="rect">
@@ -13254,7 +13584,7 @@
           <a:ln/>
         </p:spPr>
         <p:txBody>
-          <a:bodyPr wrap="square" rtlCol="0" anchor="ctr"/>
+          <a:bodyPr wrap="square" lIns="0" tIns="0" rIns="0" bIns="0" rtlCol="0" anchor="t"/>
           <a:lstStyle/>
           <a:p>
             <a:pPr indent="0" marL="0">
@@ -13264,7 +13594,7 @@
               <a:buNone/>
             </a:pPr>
             <a:r>
-              <a:rPr lang="en-US" sz="1130" dirty="0">
+              <a:rPr lang="en-US" sz="1280" dirty="0">
                 <a:solidFill>
                   <a:srgbClr val="C7D1D9"/>
                 </a:solidFill>
@@ -13274,7 +13604,7 @@
               </a:rPr>
               <a:t>2026E一致预期PE</a:t>
             </a:r>
-            <a:endParaRPr lang="en-US" sz="1130" dirty="0"/>
+            <a:endParaRPr lang="en-US" sz="1280" dirty="0"/>
           </a:p>
           <a:p>
             <a:pPr indent="0" marL="0">
@@ -13284,7 +13614,7 @@
               <a:buNone/>
             </a:pPr>
             <a:r>
-              <a:rPr lang="en-US" sz="1130" dirty="0">
+              <a:rPr lang="en-US" sz="1280" dirty="0">
                 <a:solidFill>
                   <a:srgbClr val="C7D1D9"/>
                 </a:solidFill>
@@ -13294,7 +13624,7 @@
               </a:rPr>
               <a:t>需要未来利润兑现</a:t>
             </a:r>
-            <a:endParaRPr lang="en-US" sz="1130" dirty="0"/>
+            <a:endParaRPr lang="en-US" sz="1280" dirty="0"/>
           </a:p>
         </p:txBody>
       </p:sp>
@@ -13316,14 +13646,17 @@
           <a:ln/>
         </p:spPr>
         <p:txBody>
-          <a:bodyPr wrap="square" rtlCol="0" anchor="ctr"/>
+          <a:bodyPr wrap="square" lIns="0" tIns="0" rIns="0" bIns="0" rtlCol="0" anchor="t"/>
           <a:lstStyle/>
           <a:p>
             <a:pPr algn="ctr" indent="0" marL="0">
-              <a:buNone/>
-            </a:pPr>
-            <a:r>
-              <a:rPr lang="en-US" sz="1200" b="1" dirty="0">
+              <a:lnSpc>
+                <a:spcPct val="125000"/>
+              </a:lnSpc>
+              <a:buNone/>
+            </a:pPr>
+            <a:r>
+              <a:rPr lang="en-US" sz="1350" b="1" dirty="0">
                 <a:solidFill>
                   <a:srgbClr val="F26322"/>
                 </a:solidFill>
@@ -13333,7 +13666,7 @@
               </a:rPr>
               <a:t>价值兑现距离</a:t>
             </a:r>
-            <a:endParaRPr lang="en-US" sz="1200" dirty="0"/>
+            <a:endParaRPr lang="en-US" sz="1350" dirty="0"/>
           </a:p>
         </p:txBody>
       </p:sp>
@@ -13387,14 +13720,17 @@
           <a:ln/>
         </p:spPr>
         <p:txBody>
-          <a:bodyPr wrap="square" rtlCol="0" anchor="ctr"/>
+          <a:bodyPr wrap="square" lIns="0" tIns="0" rIns="0" bIns="0" rtlCol="0" anchor="t"/>
           <a:lstStyle/>
           <a:p>
             <a:pPr indent="0" marL="0">
-              <a:buNone/>
-            </a:pPr>
-            <a:r>
-              <a:rPr lang="en-US" sz="730" b="1" spc="200" kern="0" dirty="0">
+              <a:lnSpc>
+                <a:spcPct val="125000"/>
+              </a:lnSpc>
+              <a:buNone/>
+            </a:pPr>
+            <a:r>
+              <a:rPr lang="en-US" sz="830" b="1" spc="200" kern="0" dirty="0">
                 <a:solidFill>
                   <a:srgbClr val="B63A06"/>
                 </a:solidFill>
@@ -13404,7 +13740,7 @@
               </a:rPr>
               <a:t>DEMAND CURVE</a:t>
             </a:r>
-            <a:endParaRPr lang="en-US" sz="730" dirty="0"/>
+            <a:endParaRPr lang="en-US" sz="830" dirty="0"/>
           </a:p>
         </p:txBody>
       </p:sp>
@@ -13426,7 +13762,7 @@
           <a:ln/>
         </p:spPr>
         <p:txBody>
-          <a:bodyPr wrap="square" rtlCol="0" anchor="ctr"/>
+          <a:bodyPr wrap="square" lIns="0" tIns="0" rIns="0" bIns="0" rtlCol="0" anchor="t"/>
           <a:lstStyle/>
           <a:p>
             <a:pPr indent="0" marL="0">
@@ -13436,7 +13772,7 @@
               <a:buNone/>
             </a:pPr>
             <a:r>
-              <a:rPr lang="en-US" sz="2270" b="1" dirty="0">
+              <a:rPr lang="en-US" sz="2550" b="1" dirty="0">
                 <a:solidFill>
                   <a:srgbClr val="132238"/>
                 </a:solidFill>
@@ -13446,7 +13782,7 @@
               </a:rPr>
               <a:t>全球需求继续扩张，增长重心转向亚洲</a:t>
             </a:r>
-            <a:endParaRPr lang="en-US" sz="2270" dirty="0"/>
+            <a:endParaRPr lang="en-US" sz="2550" dirty="0"/>
           </a:p>
         </p:txBody>
       </p:sp>
@@ -13468,14 +13804,17 @@
           <a:ln/>
         </p:spPr>
         <p:txBody>
-          <a:bodyPr wrap="square" rtlCol="0" anchor="ctr"/>
+          <a:bodyPr wrap="square" lIns="0" tIns="0" rIns="0" bIns="0" rtlCol="0" anchor="t"/>
           <a:lstStyle/>
           <a:p>
             <a:pPr algn="r" indent="0" marL="0">
-              <a:buNone/>
-            </a:pPr>
-            <a:r>
-              <a:rPr lang="en-US" sz="4270" b="1" dirty="0">
+              <a:lnSpc>
+                <a:spcPct val="125000"/>
+              </a:lnSpc>
+              <a:buNone/>
+            </a:pPr>
+            <a:r>
+              <a:rPr lang="en-US" sz="4800" b="1" dirty="0">
                 <a:solidFill>
                   <a:srgbClr val="B63A06"/>
                 </a:solidFill>
@@ -13485,7 +13824,7 @@
               </a:rPr>
               <a:t>70</a:t>
             </a:r>
-            <a:endParaRPr lang="en-US" sz="4270" dirty="0"/>
+            <a:endParaRPr lang="en-US" sz="4800" dirty="0"/>
           </a:p>
         </p:txBody>
       </p:sp>
@@ -13507,7 +13846,7 @@
           <a:ln/>
         </p:spPr>
         <p:txBody>
-          <a:bodyPr wrap="square" rtlCol="0" anchor="ctr"/>
+          <a:bodyPr wrap="square" lIns="0" tIns="0" rIns="0" bIns="0" rtlCol="0" anchor="t"/>
           <a:lstStyle/>
           <a:p>
             <a:pPr algn="r" indent="0" marL="0">
@@ -13517,7 +13856,7 @@
               <a:buNone/>
             </a:pPr>
             <a:r>
-              <a:rPr lang="en-US" sz="870" dirty="0">
+              <a:rPr lang="en-US" sz="980" dirty="0">
                 <a:solidFill>
                   <a:srgbClr val="5B6879"/>
                 </a:solidFill>
@@ -13527,7 +13866,7 @@
               </a:rPr>
               <a:t>2028E全球安装量</a:t>
             </a:r>
-            <a:endParaRPr lang="en-US" sz="870" dirty="0"/>
+            <a:endParaRPr lang="en-US" sz="980" dirty="0"/>
           </a:p>
           <a:p>
             <a:pPr algn="r" indent="0" marL="0">
@@ -13537,7 +13876,7 @@
               <a:buNone/>
             </a:pPr>
             <a:r>
-              <a:rPr lang="en-US" sz="870" dirty="0">
+              <a:rPr lang="en-US" sz="980" dirty="0">
                 <a:solidFill>
                   <a:srgbClr val="5B6879"/>
                 </a:solidFill>
@@ -13547,7 +13886,7 @@
               </a:rPr>
               <a:t>约70万台</a:t>
             </a:r>
-            <a:endParaRPr lang="en-US" sz="870" dirty="0"/>
+            <a:endParaRPr lang="en-US" sz="980" dirty="0"/>
           </a:p>
         </p:txBody>
       </p:sp>
@@ -13607,14 +13946,17 @@
           <a:ln/>
         </p:spPr>
         <p:txBody>
-          <a:bodyPr wrap="square" rtlCol="0" anchor="ctr"/>
+          <a:bodyPr wrap="square" lIns="0" tIns="0" rIns="0" bIns="0" rtlCol="0" anchor="ctr"/>
           <a:lstStyle/>
           <a:p>
             <a:pPr algn="ctr" indent="0" marL="0">
-              <a:buNone/>
-            </a:pPr>
-            <a:r>
-              <a:rPr lang="en-US" sz="1070" b="1" dirty="0">
+              <a:lnSpc>
+                <a:spcPct val="125000"/>
+              </a:lnSpc>
+              <a:buNone/>
+            </a:pPr>
+            <a:r>
+              <a:rPr lang="en-US" sz="1200" b="1" dirty="0">
                 <a:solidFill>
                   <a:srgbClr val="FFFFFF"/>
                 </a:solidFill>
@@ -13624,7 +13966,7 @@
               </a:rPr>
               <a:t>中国、东南亚和印度贡献主要增量，高端汽车与半导体仍决定价值量</a:t>
             </a:r>
-            <a:endParaRPr lang="en-US" sz="1070" dirty="0"/>
+            <a:endParaRPr lang="en-US" sz="1200" dirty="0"/>
           </a:p>
         </p:txBody>
       </p:sp>
@@ -13678,14 +14020,17 @@
           <a:ln/>
         </p:spPr>
         <p:txBody>
-          <a:bodyPr wrap="square" rtlCol="0" anchor="ctr"/>
+          <a:bodyPr wrap="square" lIns="0" tIns="0" rIns="0" bIns="0" rtlCol="0" anchor="t"/>
           <a:lstStyle/>
           <a:p>
             <a:pPr indent="0" marL="0">
-              <a:buNone/>
-            </a:pPr>
-            <a:r>
-              <a:rPr lang="en-US" sz="730" b="1" spc="200" kern="0" dirty="0">
+              <a:lnSpc>
+                <a:spcPct val="125000"/>
+              </a:lnSpc>
+              <a:buNone/>
+            </a:pPr>
+            <a:r>
+              <a:rPr lang="en-US" sz="830" b="1" spc="200" kern="0" dirty="0">
                 <a:solidFill>
                   <a:srgbClr val="B63A06"/>
                 </a:solidFill>
@@ -13695,7 +14040,7 @@
               </a:rPr>
               <a:t>LOCALIZATION INFLECTION</a:t>
             </a:r>
-            <a:endParaRPr lang="en-US" sz="730" dirty="0"/>
+            <a:endParaRPr lang="en-US" sz="830" dirty="0"/>
           </a:p>
         </p:txBody>
       </p:sp>
@@ -13717,7 +14062,7 @@
           <a:ln/>
         </p:spPr>
         <p:txBody>
-          <a:bodyPr wrap="square" rtlCol="0" anchor="ctr"/>
+          <a:bodyPr wrap="square" lIns="0" tIns="0" rIns="0" bIns="0" rtlCol="0" anchor="t"/>
           <a:lstStyle/>
           <a:p>
             <a:pPr indent="0" marL="0">
@@ -13727,7 +14072,7 @@
               <a:buNone/>
             </a:pPr>
             <a:r>
-              <a:rPr lang="en-US" sz="2270" b="1" dirty="0">
+              <a:rPr lang="en-US" sz="2550" b="1" dirty="0">
                 <a:solidFill>
                   <a:srgbClr val="132238"/>
                 </a:solidFill>
@@ -13737,7 +14082,7 @@
               </a:rPr>
               <a:t>国产份额已经越过临界线</a:t>
             </a:r>
-            <a:endParaRPr lang="en-US" sz="2270" dirty="0"/>
+            <a:endParaRPr lang="en-US" sz="2550" dirty="0"/>
           </a:p>
         </p:txBody>
       </p:sp>
@@ -13759,7 +14104,7 @@
           <a:ln/>
         </p:spPr>
         <p:txBody>
-          <a:bodyPr wrap="square" rtlCol="0" anchor="ctr"/>
+          <a:bodyPr wrap="square" lIns="0" tIns="0" rIns="0" bIns="0" rtlCol="0" anchor="t"/>
           <a:lstStyle/>
           <a:p>
             <a:pPr indent="0" marL="0">
@@ -13769,7 +14114,7 @@
               <a:buNone/>
             </a:pPr>
             <a:r>
-              <a:rPr lang="en-US" sz="3870" b="1" dirty="0">
+              <a:rPr lang="en-US" sz="4350" b="1" dirty="0">
                 <a:solidFill>
                   <a:srgbClr val="B63A06"/>
                 </a:solidFill>
@@ -13779,7 +14124,7 @@
               </a:rPr>
               <a:t>57%</a:t>
             </a:r>
-            <a:endParaRPr lang="en-US" sz="3870" dirty="0"/>
+            <a:endParaRPr lang="en-US" sz="4350" dirty="0"/>
           </a:p>
         </p:txBody>
       </p:sp>
@@ -13801,7 +14146,7 @@
           <a:ln/>
         </p:spPr>
         <p:txBody>
-          <a:bodyPr wrap="square" rtlCol="0" anchor="ctr"/>
+          <a:bodyPr wrap="square" lIns="0" tIns="0" rIns="0" bIns="0" rtlCol="0" anchor="t"/>
           <a:lstStyle/>
           <a:p>
             <a:pPr indent="0" marL="0">
@@ -13811,7 +14156,7 @@
               <a:buNone/>
             </a:pPr>
             <a:r>
-              <a:rPr lang="en-US" sz="1130" dirty="0">
+              <a:rPr lang="en-US" sz="1280" dirty="0">
                 <a:solidFill>
                   <a:srgbClr val="5B6879"/>
                 </a:solidFill>
@@ -13821,7 +14166,7 @@
               </a:rPr>
               <a:t>2024年本土厂商销量份额首次超过外资。</a:t>
             </a:r>
-            <a:endParaRPr lang="en-US" sz="1130" dirty="0"/>
+            <a:endParaRPr lang="en-US" sz="1280" dirty="0"/>
           </a:p>
           <a:p>
             <a:pPr indent="0" marL="0">
@@ -13831,7 +14176,7 @@
               <a:buNone/>
             </a:pPr>
             <a:r>
-              <a:rPr lang="en-US" sz="1130" dirty="0">
+              <a:rPr lang="en-US" sz="1280" dirty="0">
                 <a:solidFill>
                   <a:srgbClr val="5B6879"/>
                 </a:solidFill>
@@ -13841,7 +14186,7 @@
               </a:rPr>
               <a:t>量的拐点已经发生，价值量提升仍依赖高端场景突破。</a:t>
             </a:r>
-            <a:endParaRPr lang="en-US" sz="1130" dirty="0"/>
+            <a:endParaRPr lang="en-US" sz="1280" dirty="0"/>
           </a:p>
         </p:txBody>
       </p:sp>
@@ -13910,14 +14255,17 @@
           <a:ln/>
         </p:spPr>
         <p:txBody>
-          <a:bodyPr wrap="square" rtlCol="0" anchor="ctr"/>
+          <a:bodyPr wrap="square" lIns="0" tIns="0" rIns="0" bIns="0" rtlCol="0" anchor="ctr"/>
           <a:lstStyle/>
           <a:p>
             <a:pPr algn="ctr" indent="0" marL="0">
-              <a:buNone/>
-            </a:pPr>
-            <a:r>
-              <a:rPr lang="en-US" sz="1600" b="1" dirty="0">
+              <a:lnSpc>
+                <a:spcPct val="125000"/>
+              </a:lnSpc>
+              <a:buNone/>
+            </a:pPr>
+            <a:r>
+              <a:rPr lang="en-US" sz="1800" b="1" dirty="0">
                 <a:solidFill>
                   <a:srgbClr val="FFFFFF"/>
                 </a:solidFill>
@@ -13927,7 +14275,7 @@
               </a:rPr>
               <a:t>63.5万套</a:t>
             </a:r>
-            <a:endParaRPr lang="en-US" sz="1600" dirty="0"/>
+            <a:endParaRPr lang="en-US" sz="1800" dirty="0"/>
           </a:p>
         </p:txBody>
       </p:sp>
@@ -13949,7 +14297,7 @@
           <a:ln/>
         </p:spPr>
         <p:txBody>
-          <a:bodyPr wrap="square" rtlCol="0" anchor="ctr"/>
+          <a:bodyPr wrap="square" lIns="0" tIns="0" rIns="0" bIns="0" rtlCol="0" anchor="t"/>
           <a:lstStyle/>
           <a:p>
             <a:pPr algn="ctr" indent="0" marL="0">
@@ -13959,7 +14307,7 @@
               <a:buNone/>
             </a:pPr>
             <a:r>
-              <a:rPr lang="en-US" sz="870" dirty="0">
+              <a:rPr lang="en-US" sz="980" dirty="0">
                 <a:solidFill>
                   <a:srgbClr val="5B6879"/>
                 </a:solidFill>
@@ -13969,7 +14317,7 @@
               </a:rPr>
               <a:t>2026年1至7月产量</a:t>
             </a:r>
-            <a:endParaRPr lang="en-US" sz="870" dirty="0"/>
+            <a:endParaRPr lang="en-US" sz="980" dirty="0"/>
           </a:p>
         </p:txBody>
       </p:sp>
@@ -14015,14 +14363,17 @@
           <a:ln/>
         </p:spPr>
         <p:txBody>
-          <a:bodyPr wrap="square" rtlCol="0" anchor="ctr"/>
+          <a:bodyPr wrap="square" lIns="0" tIns="0" rIns="0" bIns="0" rtlCol="0" anchor="ctr"/>
           <a:lstStyle/>
           <a:p>
             <a:pPr algn="ctr" indent="0" marL="0">
-              <a:buNone/>
-            </a:pPr>
-            <a:r>
-              <a:rPr lang="en-US" sz="1600" b="1" dirty="0">
+              <a:lnSpc>
+                <a:spcPct val="125000"/>
+              </a:lnSpc>
+              <a:buNone/>
+            </a:pPr>
+            <a:r>
+              <a:rPr lang="en-US" sz="1800" b="1" dirty="0">
                 <a:solidFill>
                   <a:srgbClr val="FFFFFF"/>
                 </a:solidFill>
@@ -14032,7 +14383,7 @@
               </a:rPr>
               <a:t>+28.5%</a:t>
             </a:r>
-            <a:endParaRPr lang="en-US" sz="1600" dirty="0"/>
+            <a:endParaRPr lang="en-US" sz="1800" dirty="0"/>
           </a:p>
         </p:txBody>
       </p:sp>
@@ -14054,7 +14405,7 @@
           <a:ln/>
         </p:spPr>
         <p:txBody>
-          <a:bodyPr wrap="square" rtlCol="0" anchor="ctr"/>
+          <a:bodyPr wrap="square" lIns="0" tIns="0" rIns="0" bIns="0" rtlCol="0" anchor="t"/>
           <a:lstStyle/>
           <a:p>
             <a:pPr algn="ctr" indent="0" marL="0">
@@ -14064,7 +14415,7 @@
               <a:buNone/>
             </a:pPr>
             <a:r>
-              <a:rPr lang="en-US" sz="870" dirty="0">
+              <a:rPr lang="en-US" sz="980" dirty="0">
                 <a:solidFill>
                   <a:srgbClr val="5B6879"/>
                 </a:solidFill>
@@ -14074,7 +14425,7 @@
               </a:rPr>
               <a:t>同期产量增速</a:t>
             </a:r>
-            <a:endParaRPr lang="en-US" sz="870" dirty="0"/>
+            <a:endParaRPr lang="en-US" sz="980" dirty="0"/>
           </a:p>
         </p:txBody>
       </p:sp>
@@ -14120,14 +14471,17 @@
           <a:ln/>
         </p:spPr>
         <p:txBody>
-          <a:bodyPr wrap="square" rtlCol="0" anchor="ctr"/>
+          <a:bodyPr wrap="square" lIns="0" tIns="0" rIns="0" bIns="0" rtlCol="0" anchor="ctr"/>
           <a:lstStyle/>
           <a:p>
             <a:pPr algn="ctr" indent="0" marL="0">
-              <a:buNone/>
-            </a:pPr>
-            <a:r>
-              <a:rPr lang="en-US" sz="1600" b="1" dirty="0">
+              <a:lnSpc>
+                <a:spcPct val="125000"/>
+              </a:lnSpc>
+              <a:buNone/>
+            </a:pPr>
+            <a:r>
+              <a:rPr lang="en-US" sz="1800" b="1" dirty="0">
                 <a:solidFill>
                   <a:srgbClr val="FFFFFF"/>
                 </a:solidFill>
@@ -14137,7 +14491,7 @@
               </a:rPr>
               <a:t>62.9亿元</a:t>
             </a:r>
-            <a:endParaRPr lang="en-US" sz="1600" dirty="0"/>
+            <a:endParaRPr lang="en-US" sz="1800" dirty="0"/>
           </a:p>
         </p:txBody>
       </p:sp>
@@ -14159,7 +14513,7 @@
           <a:ln/>
         </p:spPr>
         <p:txBody>
-          <a:bodyPr wrap="square" rtlCol="0" anchor="ctr"/>
+          <a:bodyPr wrap="square" lIns="0" tIns="0" rIns="0" bIns="0" rtlCol="0" anchor="t"/>
           <a:lstStyle/>
           <a:p>
             <a:pPr algn="ctr" indent="0" marL="0">
@@ -14169,7 +14523,7 @@
               <a:buNone/>
             </a:pPr>
             <a:r>
-              <a:rPr lang="en-US" sz="870" dirty="0">
+              <a:rPr lang="en-US" sz="980" dirty="0">
                 <a:solidFill>
                   <a:srgbClr val="5B6879"/>
                 </a:solidFill>
@@ -14179,7 +14533,7 @@
               </a:rPr>
               <a:t>2026H1出口额</a:t>
             </a:r>
-            <a:endParaRPr lang="en-US" sz="870" dirty="0"/>
+            <a:endParaRPr lang="en-US" sz="980" dirty="0"/>
           </a:p>
         </p:txBody>
       </p:sp>
@@ -14233,14 +14587,17 @@
           <a:ln/>
         </p:spPr>
         <p:txBody>
-          <a:bodyPr wrap="square" rtlCol="0" anchor="ctr"/>
+          <a:bodyPr wrap="square" lIns="0" tIns="0" rIns="0" bIns="0" rtlCol="0" anchor="t"/>
           <a:lstStyle/>
           <a:p>
             <a:pPr indent="0" marL="0">
-              <a:buNone/>
-            </a:pPr>
-            <a:r>
-              <a:rPr lang="en-US" sz="730" b="1" spc="200" kern="0" dirty="0">
+              <a:lnSpc>
+                <a:spcPct val="125000"/>
+              </a:lnSpc>
+              <a:buNone/>
+            </a:pPr>
+            <a:r>
+              <a:rPr lang="en-US" sz="830" b="1" spc="200" kern="0" dirty="0">
                 <a:solidFill>
                   <a:srgbClr val="B63A06"/>
                 </a:solidFill>
@@ -14250,7 +14607,7 @@
               </a:rPr>
               <a:t>COMPETITIVE FRONTIER</a:t>
             </a:r>
-            <a:endParaRPr lang="en-US" sz="730" dirty="0"/>
+            <a:endParaRPr lang="en-US" sz="830" dirty="0"/>
           </a:p>
         </p:txBody>
       </p:sp>
@@ -14272,7 +14629,7 @@
           <a:ln/>
         </p:spPr>
         <p:txBody>
-          <a:bodyPr wrap="square" rtlCol="0" anchor="ctr"/>
+          <a:bodyPr wrap="square" lIns="0" tIns="0" rIns="0" bIns="0" rtlCol="0" anchor="t"/>
           <a:lstStyle/>
           <a:p>
             <a:pPr indent="0" marL="0">
@@ -14282,7 +14639,7 @@
               <a:buNone/>
             </a:pPr>
             <a:r>
-              <a:rPr lang="en-US" sz="2270" b="1" dirty="0">
+              <a:rPr lang="en-US" sz="2550" b="1" dirty="0">
                 <a:solidFill>
                   <a:srgbClr val="132238"/>
                 </a:solidFill>
@@ -14292,7 +14649,7 @@
               </a:rPr>
               <a:t>国产龙头进入高端场景攻坚区</a:t>
             </a:r>
-            <a:endParaRPr lang="en-US" sz="2270" dirty="0"/>
+            <a:endParaRPr lang="en-US" sz="2550" dirty="0"/>
           </a:p>
         </p:txBody>
       </p:sp>
@@ -14362,7 +14719,7 @@
           <a:ln/>
         </p:spPr>
         <p:txBody>
-          <a:bodyPr wrap="square" rtlCol="0" anchor="ctr"/>
+          <a:bodyPr wrap="square" lIns="0" tIns="0" rIns="0" bIns="0" rtlCol="0" anchor="t"/>
           <a:lstStyle/>
           <a:p>
             <a:pPr indent="0" marL="0">
@@ -14372,7 +14729,7 @@
               <a:buNone/>
             </a:pPr>
             <a:r>
-              <a:rPr lang="en-US" sz="870" dirty="0">
+              <a:rPr lang="en-US" sz="980" dirty="0">
                 <a:solidFill>
                   <a:srgbClr val="5B6879"/>
                 </a:solidFill>
@@ -14382,7 +14739,7 @@
               </a:rPr>
               <a:t>高端工艺与可靠性</a:t>
             </a:r>
-            <a:endParaRPr lang="en-US" sz="870" dirty="0"/>
+            <a:endParaRPr lang="en-US" sz="980" dirty="0"/>
           </a:p>
         </p:txBody>
       </p:sp>
@@ -14404,7 +14761,7 @@
           <a:ln/>
         </p:spPr>
         <p:txBody>
-          <a:bodyPr wrap="square" rtlCol="0" anchor="ctr"/>
+          <a:bodyPr wrap="square" lIns="0" tIns="0" rIns="0" bIns="0" rtlCol="0" anchor="t"/>
           <a:lstStyle/>
           <a:p>
             <a:pPr algn="r" indent="0" marL="0">
@@ -14414,7 +14771,7 @@
               <a:buNone/>
             </a:pPr>
             <a:r>
-              <a:rPr lang="en-US" sz="870" dirty="0">
+              <a:rPr lang="en-US" sz="980" dirty="0">
                 <a:solidFill>
                   <a:srgbClr val="5B6879"/>
                 </a:solidFill>
@@ -14424,7 +14781,7 @@
               </a:rPr>
               <a:t>规模与本土份额</a:t>
             </a:r>
-            <a:endParaRPr lang="en-US" sz="870" dirty="0"/>
+            <a:endParaRPr lang="en-US" sz="980" dirty="0"/>
           </a:p>
         </p:txBody>
       </p:sp>
@@ -14544,14 +14901,17 @@
           <a:ln/>
         </p:spPr>
         <p:txBody>
-          <a:bodyPr wrap="square" rtlCol="0" anchor="ctr"/>
+          <a:bodyPr wrap="square" lIns="0" tIns="0" rIns="0" bIns="0" rtlCol="0" anchor="ctr"/>
           <a:lstStyle/>
           <a:p>
             <a:pPr indent="0" marL="0">
-              <a:buNone/>
-            </a:pPr>
-            <a:r>
-              <a:rPr lang="en-US" sz="1000" b="1" dirty="0">
+              <a:lnSpc>
+                <a:spcPct val="125000"/>
+              </a:lnSpc>
+              <a:buNone/>
+            </a:pPr>
+            <a:r>
+              <a:rPr lang="en-US" sz="1130" b="1" dirty="0">
                 <a:solidFill>
                   <a:srgbClr val="132238"/>
                 </a:solidFill>
@@ -14561,7 +14921,7 @@
               </a:rPr>
               <a:t>四大家族</a:t>
             </a:r>
-            <a:endParaRPr lang="en-US" sz="1000" dirty="0"/>
+            <a:endParaRPr lang="en-US" sz="1130" dirty="0"/>
           </a:p>
         </p:txBody>
       </p:sp>
@@ -14608,14 +14968,17 @@
           <a:ln/>
         </p:spPr>
         <p:txBody>
-          <a:bodyPr wrap="square" rtlCol="0" anchor="ctr"/>
+          <a:bodyPr wrap="square" lIns="0" tIns="0" rIns="0" bIns="0" rtlCol="0" anchor="ctr"/>
           <a:lstStyle/>
           <a:p>
             <a:pPr indent="0" marL="0">
-              <a:buNone/>
-            </a:pPr>
-            <a:r>
-              <a:rPr lang="en-US" sz="1000" b="1" dirty="0">
+              <a:lnSpc>
+                <a:spcPct val="125000"/>
+              </a:lnSpc>
+              <a:buNone/>
+            </a:pPr>
+            <a:r>
+              <a:rPr lang="en-US" sz="1130" b="1" dirty="0">
                 <a:solidFill>
                   <a:srgbClr val="132238"/>
                 </a:solidFill>
@@ -14625,7 +14988,7 @@
               </a:rPr>
               <a:t>埃斯顿</a:t>
             </a:r>
-            <a:endParaRPr lang="en-US" sz="1000" dirty="0"/>
+            <a:endParaRPr lang="en-US" sz="1130" dirty="0"/>
           </a:p>
         </p:txBody>
       </p:sp>
@@ -14672,14 +15035,17 @@
           <a:ln/>
         </p:spPr>
         <p:txBody>
-          <a:bodyPr wrap="square" rtlCol="0" anchor="ctr"/>
+          <a:bodyPr wrap="square" lIns="0" tIns="0" rIns="0" bIns="0" rtlCol="0" anchor="ctr"/>
           <a:lstStyle/>
           <a:p>
             <a:pPr indent="0" marL="0">
-              <a:buNone/>
-            </a:pPr>
-            <a:r>
-              <a:rPr lang="en-US" sz="1000" b="1" dirty="0">
+              <a:lnSpc>
+                <a:spcPct val="125000"/>
+              </a:lnSpc>
+              <a:buNone/>
+            </a:pPr>
+            <a:r>
+              <a:rPr lang="en-US" sz="1130" b="1" dirty="0">
                 <a:solidFill>
                   <a:srgbClr val="132238"/>
                 </a:solidFill>
@@ -14689,7 +15055,7 @@
               </a:rPr>
               <a:t>汇川</a:t>
             </a:r>
-            <a:endParaRPr lang="en-US" sz="1000" dirty="0"/>
+            <a:endParaRPr lang="en-US" sz="1130" dirty="0"/>
           </a:p>
         </p:txBody>
       </p:sp>
@@ -14736,14 +15102,17 @@
           <a:ln/>
         </p:spPr>
         <p:txBody>
-          <a:bodyPr wrap="square" rtlCol="0" anchor="ctr"/>
+          <a:bodyPr wrap="square" lIns="0" tIns="0" rIns="0" bIns="0" rtlCol="0" anchor="ctr"/>
           <a:lstStyle/>
           <a:p>
             <a:pPr indent="0" marL="0">
-              <a:buNone/>
-            </a:pPr>
-            <a:r>
-              <a:rPr lang="en-US" sz="1000" b="1" dirty="0">
+              <a:lnSpc>
+                <a:spcPct val="125000"/>
+              </a:lnSpc>
+              <a:buNone/>
+            </a:pPr>
+            <a:r>
+              <a:rPr lang="en-US" sz="1130" b="1" dirty="0">
                 <a:solidFill>
                   <a:srgbClr val="132238"/>
                 </a:solidFill>
@@ -14753,7 +15122,7 @@
               </a:rPr>
               <a:t>国产第二梯队</a:t>
             </a:r>
-            <a:endParaRPr lang="en-US" sz="1000" dirty="0"/>
+            <a:endParaRPr lang="en-US" sz="1130" dirty="0"/>
           </a:p>
         </p:txBody>
       </p:sp>
@@ -14800,14 +15169,17 @@
           <a:ln/>
         </p:spPr>
         <p:txBody>
-          <a:bodyPr wrap="square" rtlCol="0" anchor="ctr"/>
+          <a:bodyPr wrap="square" lIns="0" tIns="0" rIns="0" bIns="0" rtlCol="0" anchor="ctr"/>
           <a:lstStyle/>
           <a:p>
             <a:pPr indent="0" marL="0">
-              <a:buNone/>
-            </a:pPr>
-            <a:r>
-              <a:rPr lang="en-US" sz="1000" b="1" dirty="0">
+              <a:lnSpc>
+                <a:spcPct val="125000"/>
+              </a:lnSpc>
+              <a:buNone/>
+            </a:pPr>
+            <a:r>
+              <a:rPr lang="en-US" sz="1130" b="1" dirty="0">
                 <a:solidFill>
                   <a:srgbClr val="132238"/>
                 </a:solidFill>
@@ -14817,7 +15189,7 @@
               </a:rPr>
               <a:t>协作与新锐</a:t>
             </a:r>
-            <a:endParaRPr lang="en-US" sz="1000" dirty="0"/>
+            <a:endParaRPr lang="en-US" sz="1130" dirty="0"/>
           </a:p>
         </p:txBody>
       </p:sp>
@@ -14839,14 +15211,17 @@
           <a:ln/>
         </p:spPr>
         <p:txBody>
-          <a:bodyPr wrap="square" rtlCol="0" anchor="ctr"/>
+          <a:bodyPr wrap="square" lIns="0" tIns="0" rIns="0" bIns="0" rtlCol="0" anchor="t"/>
           <a:lstStyle/>
           <a:p>
             <a:pPr algn="r" indent="0" marL="0">
-              <a:buNone/>
-            </a:pPr>
-            <a:r>
-              <a:rPr lang="en-US" sz="1000" b="1" dirty="0">
+              <a:lnSpc>
+                <a:spcPct val="125000"/>
+              </a:lnSpc>
+              <a:buNone/>
+            </a:pPr>
+            <a:r>
+              <a:rPr lang="en-US" sz="1130" b="1" dirty="0">
                 <a:solidFill>
                   <a:srgbClr val="B63A06"/>
                 </a:solidFill>
@@ -14856,7 +15231,7 @@
               </a:rPr>
               <a:t>高端仍由工艺数据库和可靠性定义门槛</a:t>
             </a:r>
-            <a:endParaRPr lang="en-US" sz="1000" dirty="0"/>
+            <a:endParaRPr lang="en-US" sz="1130" dirty="0"/>
           </a:p>
         </p:txBody>
       </p:sp>
@@ -14910,14 +15285,17 @@
           <a:ln/>
         </p:spPr>
         <p:txBody>
-          <a:bodyPr wrap="square" rtlCol="0" anchor="ctr"/>
+          <a:bodyPr wrap="square" lIns="0" tIns="0" rIns="0" bIns="0" rtlCol="0" anchor="t"/>
           <a:lstStyle/>
           <a:p>
             <a:pPr indent="0" marL="0">
-              <a:buNone/>
-            </a:pPr>
-            <a:r>
-              <a:rPr lang="en-US" sz="730" b="1" spc="200" kern="0" dirty="0">
+              <a:lnSpc>
+                <a:spcPct val="125000"/>
+              </a:lnSpc>
+              <a:buNone/>
+            </a:pPr>
+            <a:r>
+              <a:rPr lang="en-US" sz="830" b="1" spc="200" kern="0" dirty="0">
                 <a:solidFill>
                   <a:srgbClr val="F26322"/>
                 </a:solidFill>
@@ -14927,7 +15305,7 @@
               </a:rPr>
               <a:t>SCALE VERSUS VALUE</a:t>
             </a:r>
-            <a:endParaRPr lang="en-US" sz="730" dirty="0"/>
+            <a:endParaRPr lang="en-US" sz="830" dirty="0"/>
           </a:p>
         </p:txBody>
       </p:sp>
@@ -14949,7 +15327,7 @@
           <a:ln/>
         </p:spPr>
         <p:txBody>
-          <a:bodyPr wrap="square" rtlCol="0" anchor="ctr"/>
+          <a:bodyPr wrap="square" lIns="0" tIns="0" rIns="0" bIns="0" rtlCol="0" anchor="t"/>
           <a:lstStyle/>
           <a:p>
             <a:pPr indent="0" marL="0">
@@ -14959,7 +15337,7 @@
               <a:buNone/>
             </a:pPr>
             <a:r>
-              <a:rPr lang="en-US" sz="2270" b="1" dirty="0">
+              <a:rPr lang="en-US" sz="2550" b="1" dirty="0">
                 <a:solidFill>
                   <a:srgbClr val="FFFFFF"/>
                 </a:solidFill>
@@ -14969,7 +15347,7 @@
               </a:rPr>
               <a:t>出货登顶与收入第六可以同时成立</a:t>
             </a:r>
-            <a:endParaRPr lang="en-US" sz="2270" dirty="0"/>
+            <a:endParaRPr lang="en-US" sz="2550" dirty="0"/>
           </a:p>
         </p:txBody>
       </p:sp>
@@ -15022,14 +15400,17 @@
           <a:ln/>
         </p:spPr>
         <p:txBody>
-          <a:bodyPr wrap="square" rtlCol="0" anchor="ctr"/>
+          <a:bodyPr wrap="square" lIns="0" tIns="0" rIns="0" bIns="0" rtlCol="0" anchor="t"/>
           <a:lstStyle/>
           <a:p>
             <a:pPr algn="ctr" indent="0" marL="0">
-              <a:buNone/>
-            </a:pPr>
-            <a:r>
-              <a:rPr lang="en-US" sz="1270" dirty="0">
+              <a:lnSpc>
+                <a:spcPct val="125000"/>
+              </a:lnSpc>
+              <a:buNone/>
+            </a:pPr>
+            <a:r>
+              <a:rPr lang="en-US" sz="1430" dirty="0">
                 <a:solidFill>
                   <a:srgbClr val="C7D1D9"/>
                 </a:solidFill>
@@ -15039,7 +15420,7 @@
               </a:rPr>
               <a:t>中国出货</a:t>
             </a:r>
-            <a:endParaRPr lang="en-US" sz="1270" dirty="0"/>
+            <a:endParaRPr lang="en-US" sz="1430" dirty="0"/>
           </a:p>
         </p:txBody>
       </p:sp>
@@ -15061,14 +15442,17 @@
           <a:ln/>
         </p:spPr>
         <p:txBody>
-          <a:bodyPr wrap="square" rtlCol="0" anchor="ctr"/>
+          <a:bodyPr wrap="square" lIns="0" tIns="0" rIns="0" bIns="0" rtlCol="0" anchor="ctr"/>
           <a:lstStyle/>
           <a:p>
             <a:pPr algn="ctr" indent="0" marL="0">
-              <a:buNone/>
-            </a:pPr>
-            <a:r>
-              <a:rPr lang="en-US" sz="5470" b="1" dirty="0">
+              <a:lnSpc>
+                <a:spcPct val="125000"/>
+              </a:lnSpc>
+              <a:buNone/>
+            </a:pPr>
+            <a:r>
+              <a:rPr lang="en-US" sz="6150" b="1" dirty="0">
                 <a:solidFill>
                   <a:srgbClr val="F26322"/>
                 </a:solidFill>
@@ -15078,7 +15462,7 @@
               </a:rPr>
               <a:t>第 1</a:t>
             </a:r>
-            <a:endParaRPr lang="en-US" sz="5470" dirty="0"/>
+            <a:endParaRPr lang="en-US" sz="6150" dirty="0"/>
           </a:p>
         </p:txBody>
       </p:sp>
@@ -15100,7 +15484,7 @@
           <a:ln/>
         </p:spPr>
         <p:txBody>
-          <a:bodyPr wrap="square" rtlCol="0" anchor="ctr"/>
+          <a:bodyPr wrap="square" lIns="0" tIns="0" rIns="0" bIns="0" rtlCol="0" anchor="t"/>
           <a:lstStyle/>
           <a:p>
             <a:pPr algn="ctr" indent="0" marL="0">
@@ -15110,7 +15494,7 @@
               <a:buNone/>
             </a:pPr>
             <a:r>
-              <a:rPr lang="en-US" sz="870" dirty="0">
+              <a:rPr lang="en-US" sz="980" dirty="0">
                 <a:solidFill>
                   <a:srgbClr val="AEBBC8"/>
                 </a:solidFill>
@@ -15120,7 +15504,7 @@
               </a:rPr>
               <a:t>2025年市场份额10.6%</a:t>
             </a:r>
-            <a:endParaRPr lang="en-US" sz="870" dirty="0"/>
+            <a:endParaRPr lang="en-US" sz="980" dirty="0"/>
           </a:p>
           <a:p>
             <a:pPr algn="ctr" indent="0" marL="0">
@@ -15130,7 +15514,7 @@
               <a:buNone/>
             </a:pPr>
             <a:r>
-              <a:rPr lang="en-US" sz="870" dirty="0">
+              <a:rPr lang="en-US" sz="980" dirty="0">
                 <a:solidFill>
                   <a:srgbClr val="AEBBC8"/>
                 </a:solidFill>
@@ -15140,7 +15524,7 @@
               </a:rPr>
               <a:t>规模优势已经得到验证</a:t>
             </a:r>
-            <a:endParaRPr lang="en-US" sz="870" dirty="0"/>
+            <a:endParaRPr lang="en-US" sz="980" dirty="0"/>
           </a:p>
         </p:txBody>
       </p:sp>
@@ -15193,14 +15577,17 @@
           <a:ln/>
         </p:spPr>
         <p:txBody>
-          <a:bodyPr wrap="square" rtlCol="0" anchor="ctr"/>
+          <a:bodyPr wrap="square" lIns="0" tIns="0" rIns="0" bIns="0" rtlCol="0" anchor="t"/>
           <a:lstStyle/>
           <a:p>
             <a:pPr algn="ctr" indent="0" marL="0">
-              <a:buNone/>
-            </a:pPr>
-            <a:r>
-              <a:rPr lang="en-US" sz="1270" dirty="0">
+              <a:lnSpc>
+                <a:spcPct val="125000"/>
+              </a:lnSpc>
+              <a:buNone/>
+            </a:pPr>
+            <a:r>
+              <a:rPr lang="en-US" sz="1430" dirty="0">
                 <a:solidFill>
                   <a:srgbClr val="C7D1D9"/>
                 </a:solidFill>
@@ -15210,7 +15597,7 @@
               </a:rPr>
               <a:t>全球收入</a:t>
             </a:r>
-            <a:endParaRPr lang="en-US" sz="1270" dirty="0"/>
+            <a:endParaRPr lang="en-US" sz="1430" dirty="0"/>
           </a:p>
         </p:txBody>
       </p:sp>
@@ -15232,14 +15619,17 @@
           <a:ln/>
         </p:spPr>
         <p:txBody>
-          <a:bodyPr wrap="square" rtlCol="0" anchor="ctr"/>
+          <a:bodyPr wrap="square" lIns="0" tIns="0" rIns="0" bIns="0" rtlCol="0" anchor="ctr"/>
           <a:lstStyle/>
           <a:p>
             <a:pPr algn="ctr" indent="0" marL="0">
-              <a:buNone/>
-            </a:pPr>
-            <a:r>
-              <a:rPr lang="en-US" sz="4800" b="1" dirty="0">
+              <a:lnSpc>
+                <a:spcPct val="125000"/>
+              </a:lnSpc>
+              <a:buNone/>
+            </a:pPr>
+            <a:r>
+              <a:rPr lang="en-US" sz="5400" b="1" dirty="0">
                 <a:solidFill>
                   <a:srgbClr val="FFFFFF"/>
                 </a:solidFill>
@@ -15249,7 +15639,7 @@
               </a:rPr>
               <a:t>第 6</a:t>
             </a:r>
-            <a:endParaRPr lang="en-US" sz="4800" dirty="0"/>
+            <a:endParaRPr lang="en-US" sz="5400" dirty="0"/>
           </a:p>
         </p:txBody>
       </p:sp>
@@ -15271,7 +15661,7 @@
           <a:ln/>
         </p:spPr>
         <p:txBody>
-          <a:bodyPr wrap="square" rtlCol="0" anchor="ctr"/>
+          <a:bodyPr wrap="square" lIns="0" tIns="0" rIns="0" bIns="0" rtlCol="0" anchor="t"/>
           <a:lstStyle/>
           <a:p>
             <a:pPr algn="ctr" indent="0" marL="0">
@@ -15281,7 +15671,7 @@
               <a:buNone/>
             </a:pPr>
             <a:r>
-              <a:rPr lang="en-US" sz="870" dirty="0">
+              <a:rPr lang="en-US" sz="980" dirty="0">
                 <a:solidFill>
                   <a:srgbClr val="AEBBC8"/>
                 </a:solidFill>
@@ -15291,7 +15681,7 @@
               </a:rPr>
               <a:t>2024年收入口径</a:t>
             </a:r>
-            <a:endParaRPr lang="en-US" sz="870" dirty="0"/>
+            <a:endParaRPr lang="en-US" sz="980" dirty="0"/>
           </a:p>
           <a:p>
             <a:pPr algn="ctr" indent="0" marL="0">
@@ -15301,7 +15691,7 @@
               <a:buNone/>
             </a:pPr>
             <a:r>
-              <a:rPr lang="en-US" sz="870" dirty="0">
+              <a:rPr lang="en-US" sz="980" dirty="0">
                 <a:solidFill>
                   <a:srgbClr val="AEBBC8"/>
                 </a:solidFill>
@@ -15311,7 +15701,7 @@
               </a:rPr>
               <a:t>全球份额约1.7%</a:t>
             </a:r>
-            <a:endParaRPr lang="en-US" sz="870" dirty="0"/>
+            <a:endParaRPr lang="en-US" sz="980" dirty="0"/>
           </a:p>
         </p:txBody>
       </p:sp>
@@ -15357,14 +15747,17 @@
           <a:ln/>
         </p:spPr>
         <p:txBody>
-          <a:bodyPr wrap="square" rtlCol="0" anchor="ctr"/>
+          <a:bodyPr wrap="square" lIns="0" tIns="0" rIns="0" bIns="0" rtlCol="0" anchor="t"/>
           <a:lstStyle/>
           <a:p>
             <a:pPr algn="ctr" indent="0" marL="0">
-              <a:buNone/>
-            </a:pPr>
-            <a:r>
-              <a:rPr lang="en-US" sz="1130" b="1" dirty="0">
+              <a:lnSpc>
+                <a:spcPct val="125000"/>
+              </a:lnSpc>
+              <a:buNone/>
+            </a:pPr>
+            <a:r>
+              <a:rPr lang="en-US" sz="1280" b="1" dirty="0">
                 <a:solidFill>
                   <a:srgbClr val="F26322"/>
                 </a:solidFill>
@@ -15374,7 +15767,7 @@
               </a:rPr>
               <a:t>高端化决定均价和利润</a:t>
             </a:r>
-            <a:endParaRPr lang="en-US" sz="1130" dirty="0"/>
+            <a:endParaRPr lang="en-US" sz="1280" dirty="0"/>
           </a:p>
         </p:txBody>
       </p:sp>
@@ -15428,14 +15821,17 @@
           <a:ln/>
         </p:spPr>
         <p:txBody>
-          <a:bodyPr wrap="square" rtlCol="0" anchor="ctr"/>
+          <a:bodyPr wrap="square" lIns="0" tIns="0" rIns="0" bIns="0" rtlCol="0" anchor="t"/>
           <a:lstStyle/>
           <a:p>
             <a:pPr indent="0" marL="0">
-              <a:buNone/>
-            </a:pPr>
-            <a:r>
-              <a:rPr lang="en-US" sz="730" b="1" spc="200" kern="0" dirty="0">
+              <a:lnSpc>
+                <a:spcPct val="125000"/>
+              </a:lnSpc>
+              <a:buNone/>
+            </a:pPr>
+            <a:r>
+              <a:rPr lang="en-US" sz="830" b="1" spc="200" kern="0" dirty="0">
                 <a:solidFill>
                   <a:srgbClr val="B63A06"/>
                 </a:solidFill>
@@ -15445,7 +15841,7 @@
               </a:rPr>
               <a:t>CAPABILITY SPINE</a:t>
             </a:r>
-            <a:endParaRPr lang="en-US" sz="730" dirty="0"/>
+            <a:endParaRPr lang="en-US" sz="830" dirty="0"/>
           </a:p>
         </p:txBody>
       </p:sp>
@@ -15467,7 +15863,7 @@
           <a:ln/>
         </p:spPr>
         <p:txBody>
-          <a:bodyPr wrap="square" rtlCol="0" anchor="ctr"/>
+          <a:bodyPr wrap="square" lIns="0" tIns="0" rIns="0" bIns="0" rtlCol="0" anchor="t"/>
           <a:lstStyle/>
           <a:p>
             <a:pPr indent="0" marL="0">
@@ -15477,7 +15873,7 @@
               <a:buNone/>
             </a:pPr>
             <a:r>
-              <a:rPr lang="en-US" sz="2270" b="1" dirty="0">
+              <a:rPr lang="en-US" sz="2550" b="1" dirty="0">
                 <a:solidFill>
                   <a:srgbClr val="132238"/>
                 </a:solidFill>
@@ -15487,7 +15883,7 @@
               </a:rPr>
               <a:t>一条技术主轴连接部件、机器人与场景</a:t>
             </a:r>
-            <a:endParaRPr lang="en-US" sz="2270" dirty="0"/>
+            <a:endParaRPr lang="en-US" sz="2550" dirty="0"/>
           </a:p>
         </p:txBody>
       </p:sp>
@@ -15560,14 +15956,17 @@
           <a:ln/>
         </p:spPr>
         <p:txBody>
-          <a:bodyPr wrap="square" rtlCol="0" anchor="ctr"/>
+          <a:bodyPr wrap="square" lIns="0" tIns="0" rIns="0" bIns="0" rtlCol="0" anchor="ctr"/>
           <a:lstStyle/>
           <a:p>
             <a:pPr algn="ctr" indent="0" marL="0">
-              <a:buNone/>
-            </a:pPr>
-            <a:r>
-              <a:rPr lang="en-US" sz="1470" b="1" dirty="0">
+              <a:lnSpc>
+                <a:spcPct val="125000"/>
+              </a:lnSpc>
+              <a:buNone/>
+            </a:pPr>
+            <a:r>
+              <a:rPr lang="en-US" sz="1650" b="1" dirty="0">
                 <a:solidFill>
                   <a:srgbClr val="FFFFFF"/>
                 </a:solidFill>
@@ -15577,7 +15976,7 @@
               </a:rPr>
               <a:t>01</a:t>
             </a:r>
-            <a:endParaRPr lang="en-US" sz="1470" dirty="0"/>
+            <a:endParaRPr lang="en-US" sz="1650" dirty="0"/>
           </a:p>
         </p:txBody>
       </p:sp>
@@ -15599,14 +15998,17 @@
           <a:ln/>
         </p:spPr>
         <p:txBody>
-          <a:bodyPr wrap="square" rtlCol="0" anchor="ctr"/>
+          <a:bodyPr wrap="square" lIns="0" tIns="0" rIns="0" bIns="0" rtlCol="0" anchor="t"/>
           <a:lstStyle/>
           <a:p>
             <a:pPr algn="ctr" indent="0" marL="0">
-              <a:buNone/>
-            </a:pPr>
-            <a:r>
-              <a:rPr lang="en-US" sz="1470" b="1" dirty="0">
+              <a:lnSpc>
+                <a:spcPct val="125000"/>
+              </a:lnSpc>
+              <a:buNone/>
+            </a:pPr>
+            <a:r>
+              <a:rPr lang="en-US" sz="1650" b="1" dirty="0">
                 <a:solidFill>
                   <a:srgbClr val="132238"/>
                 </a:solidFill>
@@ -15616,7 +16018,7 @@
               </a:rPr>
               <a:t>核心部件</a:t>
             </a:r>
-            <a:endParaRPr lang="en-US" sz="1470" dirty="0"/>
+            <a:endParaRPr lang="en-US" sz="1650" dirty="0"/>
           </a:p>
         </p:txBody>
       </p:sp>
@@ -15638,7 +16040,7 @@
           <a:ln/>
         </p:spPr>
         <p:txBody>
-          <a:bodyPr wrap="square" rtlCol="0" anchor="ctr"/>
+          <a:bodyPr wrap="square" lIns="0" tIns="0" rIns="0" bIns="0" rtlCol="0" anchor="t"/>
           <a:lstStyle/>
           <a:p>
             <a:pPr algn="ctr" indent="0" marL="0">
@@ -15648,7 +16050,7 @@
               <a:buNone/>
             </a:pPr>
             <a:r>
-              <a:rPr lang="en-US" sz="1000" dirty="0">
+              <a:rPr lang="en-US" sz="1130" dirty="0">
                 <a:solidFill>
                   <a:srgbClr val="5B6879"/>
                 </a:solidFill>
@@ -15658,7 +16060,7 @@
               </a:rPr>
               <a:t>伺服系统</a:t>
             </a:r>
-            <a:endParaRPr lang="en-US" sz="1000" dirty="0"/>
+            <a:endParaRPr lang="en-US" sz="1130" dirty="0"/>
           </a:p>
           <a:p>
             <a:pPr algn="ctr" indent="0" marL="0">
@@ -15668,7 +16070,7 @@
               <a:buNone/>
             </a:pPr>
             <a:r>
-              <a:rPr lang="en-US" sz="1000" dirty="0">
+              <a:rPr lang="en-US" sz="1130" dirty="0">
                 <a:solidFill>
                   <a:srgbClr val="5B6879"/>
                 </a:solidFill>
@@ -15678,7 +16080,7 @@
               </a:rPr>
               <a:t>控制器</a:t>
             </a:r>
-            <a:endParaRPr lang="en-US" sz="1000" dirty="0"/>
+            <a:endParaRPr lang="en-US" sz="1130" dirty="0"/>
           </a:p>
           <a:p>
             <a:pPr algn="ctr" indent="0" marL="0">
@@ -15688,7 +16090,7 @@
               <a:buNone/>
             </a:pPr>
             <a:r>
-              <a:rPr lang="en-US" sz="1000" dirty="0">
+              <a:rPr lang="en-US" sz="1130" dirty="0">
                 <a:solidFill>
                   <a:srgbClr val="5B6879"/>
                 </a:solidFill>
@@ -15698,7 +16100,7 @@
               </a:rPr>
               <a:t>运动控制</a:t>
             </a:r>
-            <a:endParaRPr lang="en-US" sz="1000" dirty="0"/>
+            <a:endParaRPr lang="en-US" sz="1130" dirty="0"/>
           </a:p>
         </p:txBody>
       </p:sp>
@@ -15747,14 +16149,17 @@
           <a:ln/>
         </p:spPr>
         <p:txBody>
-          <a:bodyPr wrap="square" rtlCol="0" anchor="ctr"/>
+          <a:bodyPr wrap="square" lIns="0" tIns="0" rIns="0" bIns="0" rtlCol="0" anchor="ctr"/>
           <a:lstStyle/>
           <a:p>
             <a:pPr algn="ctr" indent="0" marL="0">
-              <a:buNone/>
-            </a:pPr>
-            <a:r>
-              <a:rPr lang="en-US" sz="1470" b="1" dirty="0">
+              <a:lnSpc>
+                <a:spcPct val="125000"/>
+              </a:lnSpc>
+              <a:buNone/>
+            </a:pPr>
+            <a:r>
+              <a:rPr lang="en-US" sz="1650" b="1" dirty="0">
                 <a:solidFill>
                   <a:srgbClr val="FFFFFF"/>
                 </a:solidFill>
@@ -15764,7 +16169,7 @@
               </a:rPr>
               <a:t>02</a:t>
             </a:r>
-            <a:endParaRPr lang="en-US" sz="1470" dirty="0"/>
+            <a:endParaRPr lang="en-US" sz="1650" dirty="0"/>
           </a:p>
         </p:txBody>
       </p:sp>
@@ -15786,14 +16191,17 @@
           <a:ln/>
         </p:spPr>
         <p:txBody>
-          <a:bodyPr wrap="square" rtlCol="0" anchor="ctr"/>
+          <a:bodyPr wrap="square" lIns="0" tIns="0" rIns="0" bIns="0" rtlCol="0" anchor="t"/>
           <a:lstStyle/>
           <a:p>
             <a:pPr algn="ctr" indent="0" marL="0">
-              <a:buNone/>
-            </a:pPr>
-            <a:r>
-              <a:rPr lang="en-US" sz="1470" b="1" dirty="0">
+              <a:lnSpc>
+                <a:spcPct val="125000"/>
+              </a:lnSpc>
+              <a:buNone/>
+            </a:pPr>
+            <a:r>
+              <a:rPr lang="en-US" sz="1650" b="1" dirty="0">
                 <a:solidFill>
                   <a:srgbClr val="132238"/>
                 </a:solidFill>
@@ -15803,7 +16211,7 @@
               </a:rPr>
               <a:t>工业机器人</a:t>
             </a:r>
-            <a:endParaRPr lang="en-US" sz="1470" dirty="0"/>
+            <a:endParaRPr lang="en-US" sz="1650" dirty="0"/>
           </a:p>
         </p:txBody>
       </p:sp>
@@ -15825,7 +16233,7 @@
           <a:ln/>
         </p:spPr>
         <p:txBody>
-          <a:bodyPr wrap="square" rtlCol="0" anchor="ctr"/>
+          <a:bodyPr wrap="square" lIns="0" tIns="0" rIns="0" bIns="0" rtlCol="0" anchor="t"/>
           <a:lstStyle/>
           <a:p>
             <a:pPr algn="ctr" indent="0" marL="0">
@@ -15835,7 +16243,7 @@
               <a:buNone/>
             </a:pPr>
             <a:r>
-              <a:rPr lang="en-US" sz="1000" dirty="0">
+              <a:rPr lang="en-US" sz="1130" dirty="0">
                 <a:solidFill>
                   <a:srgbClr val="5B6879"/>
                 </a:solidFill>
@@ -15845,7 +16253,7 @@
               </a:rPr>
               <a:t>6kg至1200kg</a:t>
             </a:r>
-            <a:endParaRPr lang="en-US" sz="1000" dirty="0"/>
+            <a:endParaRPr lang="en-US" sz="1130" dirty="0"/>
           </a:p>
           <a:p>
             <a:pPr algn="ctr" indent="0" marL="0">
@@ -15855,7 +16263,7 @@
               <a:buNone/>
             </a:pPr>
             <a:r>
-              <a:rPr lang="en-US" sz="1000" dirty="0">
+              <a:rPr lang="en-US" sz="1130" dirty="0">
                 <a:solidFill>
                   <a:srgbClr val="5B6879"/>
                 </a:solidFill>
@@ -15865,7 +16273,7 @@
               </a:rPr>
               <a:t>覆盖焊接搬运</a:t>
             </a:r>
-            <a:endParaRPr lang="en-US" sz="1000" dirty="0"/>
+            <a:endParaRPr lang="en-US" sz="1130" dirty="0"/>
           </a:p>
         </p:txBody>
       </p:sp>
@@ -15914,14 +16322,17 @@
           <a:ln/>
         </p:spPr>
         <p:txBody>
-          <a:bodyPr wrap="square" rtlCol="0" anchor="ctr"/>
+          <a:bodyPr wrap="square" lIns="0" tIns="0" rIns="0" bIns="0" rtlCol="0" anchor="ctr"/>
           <a:lstStyle/>
           <a:p>
             <a:pPr algn="ctr" indent="0" marL="0">
-              <a:buNone/>
-            </a:pPr>
-            <a:r>
-              <a:rPr lang="en-US" sz="1470" b="1" dirty="0">
+              <a:lnSpc>
+                <a:spcPct val="125000"/>
+              </a:lnSpc>
+              <a:buNone/>
+            </a:pPr>
+            <a:r>
+              <a:rPr lang="en-US" sz="1650" b="1" dirty="0">
                 <a:solidFill>
                   <a:srgbClr val="FFFFFF"/>
                 </a:solidFill>
@@ -15931,7 +16342,7 @@
               </a:rPr>
               <a:t>03</a:t>
             </a:r>
-            <a:endParaRPr lang="en-US" sz="1470" dirty="0"/>
+            <a:endParaRPr lang="en-US" sz="1650" dirty="0"/>
           </a:p>
         </p:txBody>
       </p:sp>
@@ -15953,14 +16364,17 @@
           <a:ln/>
         </p:spPr>
         <p:txBody>
-          <a:bodyPr wrap="square" rtlCol="0" anchor="ctr"/>
+          <a:bodyPr wrap="square" lIns="0" tIns="0" rIns="0" bIns="0" rtlCol="0" anchor="t"/>
           <a:lstStyle/>
           <a:p>
             <a:pPr algn="ctr" indent="0" marL="0">
-              <a:buNone/>
-            </a:pPr>
-            <a:r>
-              <a:rPr lang="en-US" sz="1470" b="1" dirty="0">
+              <a:lnSpc>
+                <a:spcPct val="125000"/>
+              </a:lnSpc>
+              <a:buNone/>
+            </a:pPr>
+            <a:r>
+              <a:rPr lang="en-US" sz="1650" b="1" dirty="0">
                 <a:solidFill>
                   <a:srgbClr val="132238"/>
                 </a:solidFill>
@@ -15970,7 +16384,7 @@
               </a:rPr>
               <a:t>智能制造</a:t>
             </a:r>
-            <a:endParaRPr lang="en-US" sz="1470" dirty="0"/>
+            <a:endParaRPr lang="en-US" sz="1650" dirty="0"/>
           </a:p>
         </p:txBody>
       </p:sp>
@@ -15992,7 +16406,7 @@
           <a:ln/>
         </p:spPr>
         <p:txBody>
-          <a:bodyPr wrap="square" rtlCol="0" anchor="ctr"/>
+          <a:bodyPr wrap="square" lIns="0" tIns="0" rIns="0" bIns="0" rtlCol="0" anchor="t"/>
           <a:lstStyle/>
           <a:p>
             <a:pPr algn="ctr" indent="0" marL="0">
@@ -16002,7 +16416,7 @@
               <a:buNone/>
             </a:pPr>
             <a:r>
-              <a:rPr lang="en-US" sz="1000" dirty="0">
+              <a:rPr lang="en-US" sz="1130" dirty="0">
                 <a:solidFill>
                   <a:srgbClr val="5B6879"/>
                 </a:solidFill>
@@ -16012,7 +16426,7 @@
               </a:rPr>
               <a:t>系统集成</a:t>
             </a:r>
-            <a:endParaRPr lang="en-US" sz="1000" dirty="0"/>
+            <a:endParaRPr lang="en-US" sz="1130" dirty="0"/>
           </a:p>
           <a:p>
             <a:pPr algn="ctr" indent="0" marL="0">
@@ -16022,7 +16436,7 @@
               <a:buNone/>
             </a:pPr>
             <a:r>
-              <a:rPr lang="en-US" sz="1000" dirty="0">
+              <a:rPr lang="en-US" sz="1130" dirty="0">
                 <a:solidFill>
                   <a:srgbClr val="5B6879"/>
                 </a:solidFill>
@@ -16032,7 +16446,7 @@
               </a:rPr>
               <a:t>汽车与锂电场景</a:t>
             </a:r>
-            <a:endParaRPr lang="en-US" sz="1000" dirty="0"/>
+            <a:endParaRPr lang="en-US" sz="1130" dirty="0"/>
           </a:p>
         </p:txBody>
       </p:sp>
@@ -16081,14 +16495,17 @@
           <a:ln/>
         </p:spPr>
         <p:txBody>
-          <a:bodyPr wrap="square" rtlCol="0" anchor="ctr"/>
+          <a:bodyPr wrap="square" lIns="0" tIns="0" rIns="0" bIns="0" rtlCol="0" anchor="ctr"/>
           <a:lstStyle/>
           <a:p>
             <a:pPr algn="ctr" indent="0" marL="0">
-              <a:buNone/>
-            </a:pPr>
-            <a:r>
-              <a:rPr lang="en-US" sz="1470" b="1" dirty="0">
+              <a:lnSpc>
+                <a:spcPct val="125000"/>
+              </a:lnSpc>
+              <a:buNone/>
+            </a:pPr>
+            <a:r>
+              <a:rPr lang="en-US" sz="1650" b="1" dirty="0">
                 <a:solidFill>
                   <a:srgbClr val="FFFFFF"/>
                 </a:solidFill>
@@ -16098,7 +16515,7 @@
               </a:rPr>
               <a:t>04</a:t>
             </a:r>
-            <a:endParaRPr lang="en-US" sz="1470" dirty="0"/>
+            <a:endParaRPr lang="en-US" sz="1650" dirty="0"/>
           </a:p>
         </p:txBody>
       </p:sp>
@@ -16120,14 +16537,17 @@
           <a:ln/>
         </p:spPr>
         <p:txBody>
-          <a:bodyPr wrap="square" rtlCol="0" anchor="ctr"/>
+          <a:bodyPr wrap="square" lIns="0" tIns="0" rIns="0" bIns="0" rtlCol="0" anchor="t"/>
           <a:lstStyle/>
           <a:p>
             <a:pPr algn="ctr" indent="0" marL="0">
-              <a:buNone/>
-            </a:pPr>
-            <a:r>
-              <a:rPr lang="en-US" sz="1470" b="1" dirty="0">
+              <a:lnSpc>
+                <a:spcPct val="125000"/>
+              </a:lnSpc>
+              <a:buNone/>
+            </a:pPr>
+            <a:r>
+              <a:rPr lang="en-US" sz="1650" b="1" dirty="0">
                 <a:solidFill>
                   <a:srgbClr val="132238"/>
                 </a:solidFill>
@@ -16137,7 +16557,7 @@
               </a:rPr>
               <a:t>具身智能</a:t>
             </a:r>
-            <a:endParaRPr lang="en-US" sz="1470" dirty="0"/>
+            <a:endParaRPr lang="en-US" sz="1650" dirty="0"/>
           </a:p>
         </p:txBody>
       </p:sp>
@@ -16159,7 +16579,7 @@
           <a:ln/>
         </p:spPr>
         <p:txBody>
-          <a:bodyPr wrap="square" rtlCol="0" anchor="ctr"/>
+          <a:bodyPr wrap="square" lIns="0" tIns="0" rIns="0" bIns="0" rtlCol="0" anchor="t"/>
           <a:lstStyle/>
           <a:p>
             <a:pPr algn="ctr" indent="0" marL="0">
@@ -16169,7 +16589,7 @@
               <a:buNone/>
             </a:pPr>
             <a:r>
-              <a:rPr lang="en-US" sz="1000" dirty="0">
+              <a:rPr lang="en-US" sz="1130" dirty="0">
                 <a:solidFill>
                   <a:srgbClr val="5B6879"/>
                 </a:solidFill>
@@ -16179,7 +16599,7 @@
               </a:rPr>
               <a:t>协作、人形</a:t>
             </a:r>
-            <a:endParaRPr lang="en-US" sz="1000" dirty="0"/>
+            <a:endParaRPr lang="en-US" sz="1130" dirty="0"/>
           </a:p>
           <a:p>
             <a:pPr algn="ctr" indent="0" marL="0">
@@ -16189,7 +16609,7 @@
               <a:buNone/>
             </a:pPr>
             <a:r>
-              <a:rPr lang="en-US" sz="1000" dirty="0">
+              <a:rPr lang="en-US" sz="1130" dirty="0">
                 <a:solidFill>
                   <a:srgbClr val="5B6879"/>
                 </a:solidFill>
@@ -16199,7 +16619,7 @@
               </a:rPr>
               <a:t>工业场景智能体</a:t>
             </a:r>
-            <a:endParaRPr lang="en-US" sz="1000" dirty="0"/>
+            <a:endParaRPr lang="en-US" sz="1130" dirty="0"/>
           </a:p>
         </p:txBody>
       </p:sp>
@@ -16221,14 +16641,17 @@
           <a:ln/>
         </p:spPr>
         <p:txBody>
-          <a:bodyPr wrap="square" rtlCol="0" anchor="ctr"/>
+          <a:bodyPr wrap="square" lIns="0" tIns="0" rIns="0" bIns="0" rtlCol="0" anchor="t"/>
           <a:lstStyle/>
           <a:p>
             <a:pPr algn="ctr" indent="0" marL="0">
-              <a:buNone/>
-            </a:pPr>
-            <a:r>
-              <a:rPr lang="en-US" sz="1200" b="1" dirty="0">
+              <a:lnSpc>
+                <a:spcPct val="125000"/>
+              </a:lnSpc>
+              <a:buNone/>
+            </a:pPr>
+            <a:r>
+              <a:rPr lang="en-US" sz="1350" b="1" dirty="0">
                 <a:solidFill>
                   <a:srgbClr val="B63A06"/>
                 </a:solidFill>
@@ -16238,7 +16661,7 @@
               </a:rPr>
               <a:t>全产业链的价值不在“品类多”，而在关键环节可以共同迭代</a:t>
             </a:r>
-            <a:endParaRPr lang="en-US" sz="1200" dirty="0"/>
+            <a:endParaRPr lang="en-US" sz="1350" dirty="0"/>
           </a:p>
         </p:txBody>
       </p:sp>
@@ -16292,14 +16715,17 @@
           <a:ln/>
         </p:spPr>
         <p:txBody>
-          <a:bodyPr wrap="square" rtlCol="0" anchor="ctr"/>
+          <a:bodyPr wrap="square" lIns="0" tIns="0" rIns="0" bIns="0" rtlCol="0" anchor="t"/>
           <a:lstStyle/>
           <a:p>
             <a:pPr indent="0" marL="0">
-              <a:buNone/>
-            </a:pPr>
-            <a:r>
-              <a:rPr lang="en-US" sz="730" b="1" spc="200" kern="0" dirty="0">
+              <a:lnSpc>
+                <a:spcPct val="125000"/>
+              </a:lnSpc>
+              <a:buNone/>
+            </a:pPr>
+            <a:r>
+              <a:rPr lang="en-US" sz="830" b="1" spc="200" kern="0" dirty="0">
                 <a:solidFill>
                   <a:srgbClr val="B63A06"/>
                 </a:solidFill>
@@ -16309,7 +16735,7 @@
               </a:rPr>
               <a:t>THREE DECADES</a:t>
             </a:r>
-            <a:endParaRPr lang="en-US" sz="730" dirty="0"/>
+            <a:endParaRPr lang="en-US" sz="830" dirty="0"/>
           </a:p>
         </p:txBody>
       </p:sp>
@@ -16331,7 +16757,7 @@
           <a:ln/>
         </p:spPr>
         <p:txBody>
-          <a:bodyPr wrap="square" rtlCol="0" anchor="ctr"/>
+          <a:bodyPr wrap="square" lIns="0" tIns="0" rIns="0" bIns="0" rtlCol="0" anchor="t"/>
           <a:lstStyle/>
           <a:p>
             <a:pPr indent="0" marL="0">
@@ -16341,7 +16767,7 @@
               <a:buNone/>
             </a:pPr>
             <a:r>
-              <a:rPr lang="en-US" sz="2270" b="1" dirty="0">
+              <a:rPr lang="en-US" sz="2550" b="1" dirty="0">
                 <a:solidFill>
                   <a:srgbClr val="132238"/>
                 </a:solidFill>
@@ -16351,7 +16777,7 @@
               </a:rPr>
               <a:t>三次能力跃迁把公司推向全场景平台</a:t>
             </a:r>
-            <a:endParaRPr lang="en-US" sz="2270" dirty="0"/>
+            <a:endParaRPr lang="en-US" sz="2550" dirty="0"/>
           </a:p>
         </p:txBody>
       </p:sp>
@@ -16456,14 +16882,17 @@
           <a:ln/>
         </p:spPr>
         <p:txBody>
-          <a:bodyPr wrap="square" rtlCol="0" anchor="ctr"/>
-          <a:lstStyle/>
-          <a:p>
-            <a:pPr indent="0" marL="0">
-              <a:buNone/>
-            </a:pPr>
-            <a:r>
-              <a:rPr lang="en-US" sz="1070" b="1" dirty="0">
+          <a:bodyPr wrap="square" lIns="0" tIns="0" rIns="0" bIns="0" rtlCol="0" anchor="t"/>
+          <a:lstStyle/>
+          <a:p>
+            <a:pPr algn="ctr" indent="0" marL="0">
+              <a:lnSpc>
+                <a:spcPct val="125000"/>
+              </a:lnSpc>
+              <a:buNone/>
+            </a:pPr>
+            <a:r>
+              <a:rPr lang="en-US" sz="1200" b="1" dirty="0">
                 <a:solidFill>
                   <a:srgbClr val="B63A06"/>
                 </a:solidFill>
@@ -16473,7 +16902,7 @@
               </a:rPr>
               <a:t>1993</a:t>
             </a:r>
-            <a:endParaRPr lang="en-US" sz="1070" dirty="0"/>
+            <a:endParaRPr lang="en-US" sz="1200" dirty="0"/>
           </a:p>
         </p:txBody>
       </p:sp>
@@ -16495,14 +16924,17 @@
           <a:ln/>
         </p:spPr>
         <p:txBody>
-          <a:bodyPr wrap="square" rtlCol="0" anchor="ctr"/>
-          <a:lstStyle/>
-          <a:p>
-            <a:pPr indent="0" marL="0">
-              <a:buNone/>
-            </a:pPr>
-            <a:r>
-              <a:rPr lang="en-US" sz="1270" b="1" dirty="0">
+          <a:bodyPr wrap="square" lIns="0" tIns="0" rIns="0" bIns="0" rtlCol="0" anchor="t"/>
+          <a:lstStyle/>
+          <a:p>
+            <a:pPr algn="ctr" indent="0" marL="0">
+              <a:lnSpc>
+                <a:spcPct val="125000"/>
+              </a:lnSpc>
+              <a:buNone/>
+            </a:pPr>
+            <a:r>
+              <a:rPr lang="en-US" sz="1430" b="1" dirty="0">
                 <a:solidFill>
                   <a:srgbClr val="132238"/>
                 </a:solidFill>
@@ -16512,7 +16944,7 @@
               </a:rPr>
               <a:t>运动控制起步</a:t>
             </a:r>
-            <a:endParaRPr lang="en-US" sz="1270" dirty="0"/>
+            <a:endParaRPr lang="en-US" sz="1430" dirty="0"/>
           </a:p>
         </p:txBody>
       </p:sp>
@@ -16534,14 +16966,17 @@
           <a:ln/>
         </p:spPr>
         <p:txBody>
-          <a:bodyPr wrap="square" rtlCol="0" anchor="ctr"/>
-          <a:lstStyle/>
-          <a:p>
-            <a:pPr indent="0" marL="0">
-              <a:buNone/>
-            </a:pPr>
-            <a:r>
-              <a:rPr lang="en-US" sz="930" dirty="0">
+          <a:bodyPr wrap="square" lIns="0" tIns="0" rIns="0" bIns="0" rtlCol="0" anchor="t"/>
+          <a:lstStyle/>
+          <a:p>
+            <a:pPr algn="ctr" indent="0" marL="0">
+              <a:lnSpc>
+                <a:spcPct val="125000"/>
+              </a:lnSpc>
+              <a:buNone/>
+            </a:pPr>
+            <a:r>
+              <a:rPr lang="en-US" sz="1050" dirty="0">
                 <a:solidFill>
                   <a:srgbClr val="5B6879"/>
                 </a:solidFill>
@@ -16551,7 +16986,7 @@
               </a:rPr>
               <a:t>交流伺服电机</a:t>
             </a:r>
-            <a:endParaRPr lang="en-US" sz="930" dirty="0"/>
+            <a:endParaRPr lang="en-US" sz="1050" dirty="0"/>
           </a:p>
         </p:txBody>
       </p:sp>
@@ -16598,14 +17033,17 @@
           <a:ln/>
         </p:spPr>
         <p:txBody>
-          <a:bodyPr wrap="square" rtlCol="0" anchor="ctr"/>
-          <a:lstStyle/>
-          <a:p>
-            <a:pPr indent="0" marL="0">
-              <a:buNone/>
-            </a:pPr>
-            <a:r>
-              <a:rPr lang="en-US" sz="1070" b="1" dirty="0">
+          <a:bodyPr wrap="square" lIns="0" tIns="0" rIns="0" bIns="0" rtlCol="0" anchor="t"/>
+          <a:lstStyle/>
+          <a:p>
+            <a:pPr algn="ctr" indent="0" marL="0">
+              <a:lnSpc>
+                <a:spcPct val="125000"/>
+              </a:lnSpc>
+              <a:buNone/>
+            </a:pPr>
+            <a:r>
+              <a:rPr lang="en-US" sz="1200" b="1" dirty="0">
                 <a:solidFill>
                   <a:srgbClr val="B63A06"/>
                 </a:solidFill>
@@ -16615,7 +17053,7 @@
               </a:rPr>
               <a:t>2011</a:t>
             </a:r>
-            <a:endParaRPr lang="en-US" sz="1070" dirty="0"/>
+            <a:endParaRPr lang="en-US" sz="1200" dirty="0"/>
           </a:p>
         </p:txBody>
       </p:sp>
@@ -16637,14 +17075,17 @@
           <a:ln/>
         </p:spPr>
         <p:txBody>
-          <a:bodyPr wrap="square" rtlCol="0" anchor="ctr"/>
-          <a:lstStyle/>
-          <a:p>
-            <a:pPr indent="0" marL="0">
-              <a:buNone/>
-            </a:pPr>
-            <a:r>
-              <a:rPr lang="en-US" sz="1270" b="1" dirty="0">
+          <a:bodyPr wrap="square" lIns="0" tIns="0" rIns="0" bIns="0" rtlCol="0" anchor="t"/>
+          <a:lstStyle/>
+          <a:p>
+            <a:pPr algn="ctr" indent="0" marL="0">
+              <a:lnSpc>
+                <a:spcPct val="125000"/>
+              </a:lnSpc>
+              <a:buNone/>
+            </a:pPr>
+            <a:r>
+              <a:rPr lang="en-US" sz="1430" b="1" dirty="0">
                 <a:solidFill>
                   <a:srgbClr val="132238"/>
                 </a:solidFill>
@@ -16654,7 +17095,7 @@
               </a:rPr>
               <a:t>机器人本体</a:t>
             </a:r>
-            <a:endParaRPr lang="en-US" sz="1270" dirty="0"/>
+            <a:endParaRPr lang="en-US" sz="1430" dirty="0"/>
           </a:p>
         </p:txBody>
       </p:sp>
@@ -16676,14 +17117,17 @@
           <a:ln/>
         </p:spPr>
         <p:txBody>
-          <a:bodyPr wrap="square" rtlCol="0" anchor="ctr"/>
-          <a:lstStyle/>
-          <a:p>
-            <a:pPr indent="0" marL="0">
-              <a:buNone/>
-            </a:pPr>
-            <a:r>
-              <a:rPr lang="en-US" sz="930" dirty="0">
+          <a:bodyPr wrap="square" lIns="0" tIns="0" rIns="0" bIns="0" rtlCol="0" anchor="t"/>
+          <a:lstStyle/>
+          <a:p>
+            <a:pPr algn="ctr" indent="0" marL="0">
+              <a:lnSpc>
+                <a:spcPct val="125000"/>
+              </a:lnSpc>
+              <a:buNone/>
+            </a:pPr>
+            <a:r>
+              <a:rPr lang="en-US" sz="1050" dirty="0">
                 <a:solidFill>
                   <a:srgbClr val="5B6879"/>
                 </a:solidFill>
@@ -16693,7 +17137,7 @@
               </a:rPr>
               <a:t>推出自有品牌</a:t>
             </a:r>
-            <a:endParaRPr lang="en-US" sz="930" dirty="0"/>
+            <a:endParaRPr lang="en-US" sz="1050" dirty="0"/>
           </a:p>
         </p:txBody>
       </p:sp>
@@ -16740,14 +17184,17 @@
           <a:ln/>
         </p:spPr>
         <p:txBody>
-          <a:bodyPr wrap="square" rtlCol="0" anchor="ctr"/>
-          <a:lstStyle/>
-          <a:p>
-            <a:pPr indent="0" marL="0">
-              <a:buNone/>
-            </a:pPr>
-            <a:r>
-              <a:rPr lang="en-US" sz="1070" b="1" dirty="0">
+          <a:bodyPr wrap="square" lIns="0" tIns="0" rIns="0" bIns="0" rtlCol="0" anchor="t"/>
+          <a:lstStyle/>
+          <a:p>
+            <a:pPr algn="ctr" indent="0" marL="0">
+              <a:lnSpc>
+                <a:spcPct val="125000"/>
+              </a:lnSpc>
+              <a:buNone/>
+            </a:pPr>
+            <a:r>
+              <a:rPr lang="en-US" sz="1200" b="1" dirty="0">
                 <a:solidFill>
                   <a:srgbClr val="B63A06"/>
                 </a:solidFill>
@@ -16757,7 +17204,7 @@
               </a:rPr>
               <a:t>2017—2020</a:t>
             </a:r>
-            <a:endParaRPr lang="en-US" sz="1070" dirty="0"/>
+            <a:endParaRPr lang="en-US" sz="1200" dirty="0"/>
           </a:p>
         </p:txBody>
       </p:sp>
@@ -16779,14 +17226,17 @@
           <a:ln/>
         </p:spPr>
         <p:txBody>
-          <a:bodyPr wrap="square" rtlCol="0" anchor="ctr"/>
-          <a:lstStyle/>
-          <a:p>
-            <a:pPr indent="0" marL="0">
-              <a:buNone/>
-            </a:pPr>
-            <a:r>
-              <a:rPr lang="en-US" sz="1270" b="1" dirty="0">
+          <a:bodyPr wrap="square" lIns="0" tIns="0" rIns="0" bIns="0" rtlCol="0" anchor="t"/>
+          <a:lstStyle/>
+          <a:p>
+            <a:pPr algn="ctr" indent="0" marL="0">
+              <a:lnSpc>
+                <a:spcPct val="125000"/>
+              </a:lnSpc>
+              <a:buNone/>
+            </a:pPr>
+            <a:r>
+              <a:rPr lang="en-US" sz="1430" b="1" dirty="0">
                 <a:solidFill>
                   <a:srgbClr val="132238"/>
                 </a:solidFill>
@@ -16796,7 +17246,7 @@
               </a:rPr>
               <a:t>全球并购</a:t>
             </a:r>
-            <a:endParaRPr lang="en-US" sz="1270" dirty="0"/>
+            <a:endParaRPr lang="en-US" sz="1430" dirty="0"/>
           </a:p>
         </p:txBody>
       </p:sp>
@@ -16818,14 +17268,17 @@
           <a:ln/>
         </p:spPr>
         <p:txBody>
-          <a:bodyPr wrap="square" rtlCol="0" anchor="ctr"/>
-          <a:lstStyle/>
-          <a:p>
-            <a:pPr indent="0" marL="0">
-              <a:buNone/>
-            </a:pPr>
-            <a:r>
-              <a:rPr lang="en-US" sz="930" dirty="0">
+          <a:bodyPr wrap="square" lIns="0" tIns="0" rIns="0" bIns="0" rtlCol="0" anchor="t"/>
+          <a:lstStyle/>
+          <a:p>
+            <a:pPr algn="ctr" indent="0" marL="0">
+              <a:lnSpc>
+                <a:spcPct val="125000"/>
+              </a:lnSpc>
+              <a:buNone/>
+            </a:pPr>
+            <a:r>
+              <a:rPr lang="en-US" sz="1050" dirty="0">
                 <a:solidFill>
                   <a:srgbClr val="5B6879"/>
                 </a:solidFill>
@@ -16835,7 +17288,7 @@
               </a:rPr>
               <a:t>TRIO、M.A.i、Cloos</a:t>
             </a:r>
-            <a:endParaRPr lang="en-US" sz="930" dirty="0"/>
+            <a:endParaRPr lang="en-US" sz="1050" dirty="0"/>
           </a:p>
         </p:txBody>
       </p:sp>
@@ -16882,14 +17335,17 @@
           <a:ln/>
         </p:spPr>
         <p:txBody>
-          <a:bodyPr wrap="square" rtlCol="0" anchor="ctr"/>
-          <a:lstStyle/>
-          <a:p>
-            <a:pPr indent="0" marL="0">
-              <a:buNone/>
-            </a:pPr>
-            <a:r>
-              <a:rPr lang="en-US" sz="1070" b="1" dirty="0">
+          <a:bodyPr wrap="square" lIns="0" tIns="0" rIns="0" bIns="0" rtlCol="0" anchor="t"/>
+          <a:lstStyle/>
+          <a:p>
+            <a:pPr algn="ctr" indent="0" marL="0">
+              <a:lnSpc>
+                <a:spcPct val="125000"/>
+              </a:lnSpc>
+              <a:buNone/>
+            </a:pPr>
+            <a:r>
+              <a:rPr lang="en-US" sz="1200" b="1" dirty="0">
                 <a:solidFill>
                   <a:srgbClr val="B63A06"/>
                 </a:solidFill>
@@ -16899,7 +17355,7 @@
               </a:rPr>
               <a:t>2026</a:t>
             </a:r>
-            <a:endParaRPr lang="en-US" sz="1070" dirty="0"/>
+            <a:endParaRPr lang="en-US" sz="1200" dirty="0"/>
           </a:p>
         </p:txBody>
       </p:sp>
@@ -16921,14 +17377,17 @@
           <a:ln/>
         </p:spPr>
         <p:txBody>
-          <a:bodyPr wrap="square" rtlCol="0" anchor="ctr"/>
-          <a:lstStyle/>
-          <a:p>
-            <a:pPr indent="0" marL="0">
-              <a:buNone/>
-            </a:pPr>
-            <a:r>
-              <a:rPr lang="en-US" sz="1270" b="1" dirty="0">
+          <a:bodyPr wrap="square" lIns="0" tIns="0" rIns="0" bIns="0" rtlCol="0" anchor="t"/>
+          <a:lstStyle/>
+          <a:p>
+            <a:pPr algn="ctr" indent="0" marL="0">
+              <a:lnSpc>
+                <a:spcPct val="125000"/>
+              </a:lnSpc>
+              <a:buNone/>
+            </a:pPr>
+            <a:r>
+              <a:rPr lang="en-US" sz="1430" b="1" dirty="0">
                 <a:solidFill>
                   <a:srgbClr val="132238"/>
                 </a:solidFill>
@@ -16938,7 +17397,7 @@
               </a:rPr>
               <a:t>A+H与具身智能</a:t>
             </a:r>
-            <a:endParaRPr lang="en-US" sz="1270" dirty="0"/>
+            <a:endParaRPr lang="en-US" sz="1430" dirty="0"/>
           </a:p>
         </p:txBody>
       </p:sp>
@@ -16960,14 +17419,17 @@
           <a:ln/>
         </p:spPr>
         <p:txBody>
-          <a:bodyPr wrap="square" rtlCol="0" anchor="ctr"/>
-          <a:lstStyle/>
-          <a:p>
-            <a:pPr indent="0" marL="0">
-              <a:buNone/>
-            </a:pPr>
-            <a:r>
-              <a:rPr lang="en-US" sz="930" dirty="0">
+          <a:bodyPr wrap="square" lIns="0" tIns="0" rIns="0" bIns="0" rtlCol="0" anchor="t"/>
+          <a:lstStyle/>
+          <a:p>
+            <a:pPr algn="ctr" indent="0" marL="0">
+              <a:lnSpc>
+                <a:spcPct val="125000"/>
+              </a:lnSpc>
+              <a:buNone/>
+            </a:pPr>
+            <a:r>
+              <a:rPr lang="en-US" sz="1050" dirty="0">
                 <a:solidFill>
                   <a:srgbClr val="5B6879"/>
                 </a:solidFill>
@@ -16977,7 +17439,7 @@
               </a:rPr>
               <a:t>港股上市并拟收购酷卓</a:t>
             </a:r>
-            <a:endParaRPr lang="en-US" sz="930" dirty="0"/>
+            <a:endParaRPr lang="en-US" sz="1050" dirty="0"/>
           </a:p>
         </p:txBody>
       </p:sp>
